--- a/solar-walkway-template/output/reliance-jio/GridMats_Solar_Walkway_Proposal_Reliance_Jio.pptx
+++ b/solar-walkway-template/output/reliance-jio/GridMats_Solar_Walkway_Proposal_Reliance_Jio.pptx
@@ -124,35 +124,35 @@
   <p:extLst>
     <p:ext uri="{521415D9-36F7-43E2-AB2F-B90AF26B5E84}">
       <p14:sectionLst xmlns:p14="http://schemas.microsoft.com/office/powerpoint/2010/main">
-        <p14:section name="Proposal" id="{9cf94045-7d17-bb34-08d1-709a1066f1fa}">
+        <p14:section name="Proposal" id="{102a84f8-726e-8f23-fd1b-466159cdac2c}">
           <p14:sldIdLst>
             <p14:sldId id="256"/>
             <p14:sldId id="257"/>
             <p14:sldId id="258"/>
           </p14:sldIdLst>
         </p14:section>
-        <p14:section name="Technology" id="{03f7ea2e-eb15-d13d-4b86-c3916e2dfc27}">
+        <p14:section name="Technology" id="{6c7a2dad-d197-b2ed-5807-267add0caf64}">
           <p14:sldIdLst>
             <p14:sldId id="259"/>
             <p14:sldId id="260"/>
             <p14:sldId id="261"/>
           </p14:sldIdLst>
         </p14:section>
-        <p14:section name="Pilot" id="{d7a1334a-79ab-0c03-e827-2a49bfb5317d}">
+        <p14:section name="Pilot" id="{d936fa46-84d9-5859-45ec-12f46651ee72}">
           <p14:sldIdLst>
             <p14:sldId id="262"/>
             <p14:sldId id="263"/>
             <p14:sldId id="264"/>
           </p14:sldIdLst>
         </p14:section>
-        <p14:section name="Economics" id="{dcc6d45a-f006-c55f-e8f6-1d20747e4086}">
+        <p14:section name="Economics" id="{4fa8aedf-7a1a-2bde-0dee-d58f4bf2f3bb}">
           <p14:sldIdLst>
             <p14:sldId id="265"/>
             <p14:sldId id="266"/>
             <p14:sldId id="267"/>
           </p14:sldIdLst>
         </p14:section>
-        <p14:section name="Plan" id="{e01e97db-b06d-8947-0bea-557283e0d9ae}">
+        <p14:section name="Plan" id="{96f6f028-a357-e6b1-caac-3b207a7d248b}">
           <p14:sldIdLst>
             <p14:sldId id="268"/>
             <p14:sldId id="269"/>
@@ -160,12 +160,12 @@
             <p14:sldId id="271"/>
           </p14:sldIdLst>
         </p14:section>
-        <p14:section name="Close" id="{3700e85e-7d64-ed12-977e-ed4ab6d9ea16}">
+        <p14:section name="Close" id="{c0774068-68c0-c68e-148c-8981450d54e4}">
           <p14:sldIdLst>
             <p14:sldId id="272"/>
           </p14:sldIdLst>
         </p14:section>
-        <p14:section name="Appendix" id="{334a47ed-8c71-6ae0-e85a-247f389187d9}">
+        <p14:section name="Appendix" id="{8454ceee-16b4-7c43-aa3e-c99770fdcba3}">
           <p14:sldIdLst>
             <p14:sldId id="273"/>
           </p14:sldIdLst>
@@ -975,67 +975,67 @@
                 <c:formatCode>General</c:formatCode>
                 <c:ptCount val="21"/>
                 <c:pt idx="0">
-                  <c:v>-104.329</c:v>
+                  <c:v>-188.2045</c:v>
                 </c:pt>
                 <c:pt idx="1">
-                  <c:v>-85.59536390156919</c:v>
+                  <c:v>-170.728996401569</c:v>
                 </c:pt>
                 <c:pt idx="2">
-                  <c:v>-66.3739282395737</c:v>
+                  <c:v>-152.765693239574</c:v>
                 </c:pt>
                 <c:pt idx="3">
-                  <c:v>-46.653073628409494</c:v>
+                  <c:v>-134.30297112841</c:v>
                 </c:pt>
                 <c:pt idx="4">
-                  <c:v>-26.420903908707402</c:v>
+                  <c:v>-115.328933908707</c:v>
                 </c:pt>
                 <c:pt idx="5">
-                  <c:v>-5.66523955458197</c:v>
+                  <c:v>-95.831402054582</c:v>
                 </c:pt>
                 <c:pt idx="6">
-                  <c:v>15.6263890761587</c:v>
+                  <c:v>-75.7979059238413</c:v>
                 </c:pt>
                 <c:pt idx="7">
-                  <c:v>37.4667486525837</c:v>
+                  <c:v>-55.21567884741631</c:v>
                 </c:pt>
                 <c:pt idx="8">
-                  <c:v>59.868909945819</c:v>
+                  <c:v>-34.0716500541809</c:v>
                 </c:pt>
                 <c:pt idx="9">
-                  <c:v>82.84625507275929</c:v>
+                  <c:v>-12.352437427240702</c:v>
                 </c:pt>
                 <c:pt idx="10">
-                  <c:v>106.412484912323</c:v>
+                  <c:v>9.95565991232328</c:v>
                 </c:pt>
                 <c:pt idx="11">
-                  <c:v>130.581626698366</c:v>
+                  <c:v>32.8666691983657</c:v>
                 </c:pt>
                 <c:pt idx="12">
-                  <c:v>148.968041793452</c:v>
+                  <c:v>49.9949517934516</c:v>
                 </c:pt>
                 <c:pt idx="13">
-                  <c:v>174.386433647802</c:v>
+                  <c:v>74.1552111478024</c:v>
                 </c:pt>
                 <c:pt idx="14">
-                  <c:v>200.45185594782401</c:v>
+                  <c:v>98.9625009478239</c:v>
                 </c:pt>
                 <c:pt idx="15">
-                  <c:v>227.179720958732</c:v>
+                  <c:v>124.432233458732</c:v>
                 </c:pt>
                 <c:pt idx="16">
-                  <c:v>254.58580806589998</c:v>
+                  <c:v>150.5801880659</c:v>
                 </c:pt>
                 <c:pt idx="17">
-                  <c:v>282.68627251966</c:v>
+                  <c:v>177.42252001966</c:v>
                 </c:pt>
                 <c:pt idx="18">
-                  <c:v>311.497654388409</c:v>
+                  <c:v>204.97576938841001</c:v>
                 </c:pt>
                 <c:pt idx="19">
-                  <c:v>341.036887724972</c:v>
+                  <c:v>233.256870224972</c:v>
                 </c:pt>
                 <c:pt idx="20">
-                  <c:v>371.321309951312</c:v>
+                  <c:v>262.283159951312</c:v>
                 </c:pt>
               </c:numCache>
             </c:numRef>
@@ -1304,7 +1304,7 @@
                   <c:v>61000</c:v>
                 </c:pt>
                 <c:pt idx="2">
-                  <c:v>72705.625</c:v>
+                  <c:v>125127.8125</c:v>
                 </c:pt>
               </c:numCache>
             </c:numRef>
@@ -1385,7 +1385,7 @@
         <c:axId val="2094734552"/>
         <c:scaling>
           <c:orientation val="minMax"/>
-          <c:max val="95000"/>
+          <c:max val="160000"/>
           <c:min val="0"/>
         </c:scaling>
         <c:delete val="1"/>
@@ -1929,7 +1929,7 @@
           <a:p>
             <a:r>
               <a:rPr lang="en-US" dirty="0"/>
-              <a:t>Separate the two cases. The pilot is an evidence purchase, made cheap by co-funding. The business case is rollout: at campus scale, with rollout prices and a credit for the walkway that would be built anyway, payback is a little under five years.</a:t>
+              <a:t>Separate the two cases. The pilot is an evidence purchase, made cheaper by co-funding. The rollout case at today's prices pays back in 9.6 years and delivers power at ₹12.46/kWh against ₹10.00 from the grid, so say plainly that it is not yet a pure energy-savings case. It improves with the walkway credit, a higher tariff, volume pricing and measured yield; the pilot measures the yield.</a:t>
             </a:r>
             <a:endParaRPr lang="en-US" dirty="0"/>
           </a:p>
@@ -2721,7 +2721,7 @@
           <a:p>
             <a:r>
               <a:rPr lang="en-US" dirty="0"/>
-              <a:t>Four lines and one ask. The ask: a 25 m² pilot for which Reliance Jio pays about ₹2.22 L ex-GST, with GridMats carrying design, half the PV layer, supervision and a 12-month performance study.</a:t>
+              <a:t>Four lines and one ask. The ask: a 25 m² pilot for which Reliance Jio pays about ₹3.26 L ex-GST, with GridMats carrying design, 50% of the PV layer, supervision and a 12-month performance study.</a:t>
             </a:r>
             <a:endParaRPr lang="en-US" dirty="0"/>
           </a:p>
@@ -2897,7 +2897,7 @@
           <a:p>
             <a:r>
               <a:rPr lang="en-US" dirty="0"/>
-              <a:t>Three layers. Walkable PV on top, MLP lumber that carries the wiring and lets water and air through, and the patented GridMats base. Design basis about 160 W per square metre of walkway.</a:t>
+              <a:t>Three layers plus the ground beneath them. Walkable PV on top, MLP lumber that carries the wiring and lets water and air through, the patented GridMats base, and a prepared bed: compacted soil, geotextile, WMM and M-sand. The WMM is 100 mm where the soil CBR is under 8 and 50 mm otherwise, so the site soil test matters. Design basis about 160 W per square metre of walkway.</a:t>
             </a:r>
             <a:endParaRPr lang="en-US" dirty="0"/>
           </a:p>
@@ -3337,7 +3337,7 @@
           <a:p>
             <a:r>
               <a:rPr lang="en-US" dirty="0"/>
-              <a:t>The offer: Reliance Jio pays for the base, half the PV layer, the electrical work and installation; GridMats carries engineering, the other half of the PV layer, supervision and the monitoring study. Prices shown per sq ft first.</a:t>
+              <a:t>The offer: Reliance Jio pays for the ground preparation, the base, 50% of the PV layer, the electrical work and installation; GridMats carries engineering, 50% of the PV layer, supervision and the monitoring study. Prices shown per sq ft first.</a:t>
             </a:r>
             <a:endParaRPr lang="en-US" dirty="0"/>
           </a:p>
@@ -4868,7 +4868,7 @@
                   <a:schemeClr val="accent1"/>
                 </a:solidFill>
               </a:rPr>
-              <a:t>4.6 years</a:t>
+              <a:t>6.9 years</a:t>
             </a:r>
             <a:endParaRPr lang="en-US" sz="2800" dirty="0"/>
           </a:p>
@@ -4904,7 +4904,7 @@
                   <a:schemeClr val="tx2"/>
                 </a:solidFill>
               </a:rPr>
-              <a:t>payback on Reliance Jio's ₹2.22 L outlay</a:t>
+              <a:t>payback on Reliance Jio's ₹3.26 L outlay</a:t>
             </a:r>
             <a:endParaRPr lang="en-US" sz="1300" dirty="0"/>
           </a:p>
@@ -4940,7 +4940,7 @@
                   <a:schemeClr val="tx2"/>
                 </a:solidFill>
               </a:rPr>
-              <a:t>6.8 years</a:t>
+              <a:t>10.7 years</a:t>
             </a:r>
             <a:endParaRPr lang="en-US" sz="2800" dirty="0"/>
           </a:p>
@@ -4976,7 +4976,7 @@
                   <a:schemeClr val="tx2"/>
                 </a:solidFill>
               </a:rPr>
-              <a:t>payback on the full ₹3.41 L installed cost, without co-funding</a:t>
+              <a:t>payback on the full ₹5.30 L installed cost, without co-funding</a:t>
             </a:r>
             <a:endParaRPr lang="en-US" sz="1300" dirty="0"/>
           </a:p>
@@ -5064,7 +5064,7 @@
                   <a:schemeClr val="tx1"/>
                 </a:solidFill>
               </a:rPr>
-              <a:t>₹1,081/sq ft</a:t>
+              <a:t>₹1,860/sq ft</a:t>
             </a:r>
             <a:endParaRPr lang="en-US" sz="2200" dirty="0"/>
           </a:p>
@@ -5100,7 +5100,7 @@
                   <a:schemeClr val="tx2"/>
                 </a:solidFill>
               </a:rPr>
-              <a:t>installed at rollout (₹11,633/m²)</a:t>
+              <a:t>installed at rollout (₹20,020/m²)</a:t>
             </a:r>
             <a:endParaRPr lang="en-US" sz="1300" dirty="0"/>
           </a:p>
@@ -5136,7 +5136,7 @@
                   <a:schemeClr val="accent2"/>
                 </a:solidFill>
               </a:rPr>
-              <a:t>5.3 years</a:t>
+              <a:t>9.6 years</a:t>
             </a:r>
             <a:endParaRPr lang="en-US" sz="2200" dirty="0"/>
           </a:p>
@@ -5208,7 +5208,7 @@
                   <a:schemeClr val="accent2"/>
                 </a:solidFill>
               </a:rPr>
-              <a:t>20%</a:t>
+              <a:t>9%</a:t>
             </a:r>
             <a:endParaRPr lang="en-US" sz="2200" dirty="0"/>
           </a:p>
@@ -5280,7 +5280,7 @@
                   <a:schemeClr val="accent6"/>
                 </a:solidFill>
               </a:rPr>
-              <a:t>₹7.22</a:t>
+              <a:t>₹12.46</a:t>
             </a:r>
             <a:endParaRPr lang="en-US" sz="2200" dirty="0"/>
           </a:p>
@@ -5352,7 +5352,7 @@
                   <a:schemeClr val="accent4"/>
                 </a:solidFill>
               </a:rPr>
-              <a:t>Rollout uses the rollout PV-layer price (₹8,500/m²), the GridMats price ladder and a ₹1,200/m² credit for the paver walkway it replaces. 3% tariff escalation, 10% discount rate.</a:t>
+              <a:t>Rollout uses the rollout PV-layer price (₹15,984/m²), the GridMats price ladder and a ₹1,200/m² credit for the paver walkway it replaces. 3% tariff escalation, 10% discount rate.</a:t>
             </a:r>
             <a:endParaRPr lang="en-US" sz="1000" dirty="0"/>
           </a:p>
@@ -5977,7 +5977,7 @@
                           <a:ea typeface="Arial" pitchFamily="34" charset="-122"/>
                           <a:cs typeface="Arial" pitchFamily="34" charset="-120"/>
                         </a:rPr>
-                        <a:t>6.1</a:t>
+                        <a:t>11.3</a:t>
                       </a:r>
                       <a:endParaRPr lang="en-US" sz="1100" dirty="0">
                         <a:latin typeface="Arial" charset="0"/>
@@ -8007,7 +8007,7 @@
                           <a:ea typeface="Arial" pitchFamily="34" charset="-122"/>
                           <a:cs typeface="Arial" pitchFamily="34" charset="-120"/>
                         </a:rPr>
-                        <a:t>8.8</a:t>
+                        <a:t>17.8</a:t>
                       </a:r>
                       <a:endParaRPr lang="en-US" sz="1300" dirty="0">
                         <a:latin typeface="Arial" charset="0"/>
@@ -8054,7 +8054,7 @@
                       <a:tailEnd type="none" w="med" len="med"/>
                     </a:lnB>
                     <a:solidFill>
-                      <a:srgbClr val="FFF4D6"/>
+                      <a:srgbClr val="FBEAEC"/>
                     </a:solidFill>
                   </a:tcPr>
                 </a:tc>
@@ -8075,7 +8075,7 @@
                           <a:ea typeface="Arial" pitchFamily="34" charset="-122"/>
                           <a:cs typeface="Arial" pitchFamily="34" charset="-120"/>
                         </a:rPr>
-                        <a:t>8.1</a:t>
+                        <a:t>16.1</a:t>
                       </a:r>
                       <a:endParaRPr lang="en-US" sz="1300" dirty="0">
                         <a:latin typeface="Arial" charset="0"/>
@@ -8122,7 +8122,7 @@
                       <a:tailEnd type="none" w="med" len="med"/>
                     </a:lnB>
                     <a:solidFill>
-                      <a:srgbClr val="FFF4D6"/>
+                      <a:srgbClr val="FBEAEC"/>
                     </a:solidFill>
                   </a:tcPr>
                 </a:tc>
@@ -8143,7 +8143,7 @@
                           <a:ea typeface="Arial" pitchFamily="34" charset="-122"/>
                           <a:cs typeface="Arial" pitchFamily="34" charset="-120"/>
                         </a:rPr>
-                        <a:t>7.4</a:t>
+                        <a:t>14.7</a:t>
                       </a:r>
                       <a:endParaRPr lang="en-US" sz="1300" dirty="0">
                         <a:latin typeface="Arial" charset="0"/>
@@ -8190,7 +8190,7 @@
                       <a:tailEnd type="none" w="med" len="med"/>
                     </a:lnB>
                     <a:solidFill>
-                      <a:srgbClr val="FFF4D6"/>
+                      <a:srgbClr val="FBEAEC"/>
                     </a:solidFill>
                   </a:tcPr>
                 </a:tc>
@@ -8211,7 +8211,7 @@
                           <a:ea typeface="Arial" pitchFamily="34" charset="-122"/>
                           <a:cs typeface="Arial" pitchFamily="34" charset="-120"/>
                         </a:rPr>
-                        <a:t>6.9</a:t>
+                        <a:t>13.5</a:t>
                       </a:r>
                       <a:endParaRPr lang="en-US" sz="1300" dirty="0">
                         <a:latin typeface="Arial" charset="0"/>
@@ -8258,7 +8258,7 @@
                       <a:tailEnd type="none" w="med" len="med"/>
                     </a:lnB>
                     <a:solidFill>
-                      <a:srgbClr val="FFF4D6"/>
+                      <a:srgbClr val="FBEAEC"/>
                     </a:solidFill>
                   </a:tcPr>
                 </a:tc>
@@ -8279,7 +8279,7 @@
                           <a:ea typeface="Arial" pitchFamily="34" charset="-122"/>
                           <a:cs typeface="Arial" pitchFamily="34" charset="-120"/>
                         </a:rPr>
-                        <a:t>6.4</a:t>
+                        <a:t>12.5</a:t>
                       </a:r>
                       <a:endParaRPr lang="en-US" sz="1300" dirty="0">
                         <a:latin typeface="Arial" charset="0"/>
@@ -8326,7 +8326,7 @@
                       <a:tailEnd type="none" w="med" len="med"/>
                     </a:lnB>
                     <a:solidFill>
-                      <a:srgbClr val="FFF4D6"/>
+                      <a:srgbClr val="FBEAEC"/>
                     </a:solidFill>
                   </a:tcPr>
                 </a:tc>
@@ -8397,6 +8397,1850 @@
                     </a:lnB>
                     <a:solidFill>
                       <a:srgbClr val="FFFFFF"/>
+                    </a:solidFill>
+                  </a:tcPr>
+                </a:tc>
+                <a:tc>
+                  <a:txBody>
+                    <a:bodyPr/>
+                    <a:lstStyle/>
+                    <a:p>
+                      <a:pPr algn="ctr" indent="0" marL="0">
+                        <a:buNone/>
+                      </a:pPr>
+                      <a:r>
+                        <a:rPr lang="en-US" sz="1300" dirty="0">
+                          <a:solidFill>
+                            <a:srgbClr val="1A1A1A"/>
+                          </a:solidFill>
+                          <a:latin typeface="Arial" pitchFamily="34" charset="0"/>
+                          <a:ea typeface="Arial" pitchFamily="34" charset="-122"/>
+                          <a:cs typeface="Arial" pitchFamily="34" charset="-120"/>
+                        </a:rPr>
+                        <a:t>15.3</a:t>
+                      </a:r>
+                      <a:endParaRPr lang="en-US" sz="1300" dirty="0">
+                        <a:latin typeface="Arial" charset="0"/>
+                        <a:ea typeface="Arial" charset="0"/>
+                        <a:cs typeface="Arial" charset="0"/>
+                      </a:endParaRPr>
+                    </a:p>
+                  </a:txBody>
+                  <a:tcPr marL="91440" marR="91440" marT="45720" marB="45720" anchor="ctr">
+                    <a:lnL w="6350" cap="flat" cmpd="sng" algn="ctr">
+                      <a:solidFill>
+                        <a:srgbClr val="E3E3E3"/>
+                      </a:solidFill>
+                      <a:prstDash val="solid"/>
+                      <a:round/>
+                      <a:headEnd type="none" w="med" len="med"/>
+                      <a:tailEnd type="none" w="med" len="med"/>
+                    </a:lnL>
+                    <a:lnR w="6350" cap="flat" cmpd="sng" algn="ctr">
+                      <a:solidFill>
+                        <a:srgbClr val="E3E3E3"/>
+                      </a:solidFill>
+                      <a:prstDash val="solid"/>
+                      <a:round/>
+                      <a:headEnd type="none" w="med" len="med"/>
+                      <a:tailEnd type="none" w="med" len="med"/>
+                    </a:lnR>
+                    <a:lnT w="6350" cap="flat" cmpd="sng" algn="ctr">
+                      <a:solidFill>
+                        <a:srgbClr val="E3E3E3"/>
+                      </a:solidFill>
+                      <a:prstDash val="solid"/>
+                      <a:round/>
+                      <a:headEnd type="none" w="med" len="med"/>
+                      <a:tailEnd type="none" w="med" len="med"/>
+                    </a:lnT>
+                    <a:lnB w="6350" cap="flat" cmpd="sng" algn="ctr">
+                      <a:solidFill>
+                        <a:srgbClr val="E3E3E3"/>
+                      </a:solidFill>
+                      <a:prstDash val="solid"/>
+                      <a:round/>
+                      <a:headEnd type="none" w="med" len="med"/>
+                      <a:tailEnd type="none" w="med" len="med"/>
+                    </a:lnB>
+                    <a:solidFill>
+                      <a:srgbClr val="FBEAEC"/>
+                    </a:solidFill>
+                  </a:tcPr>
+                </a:tc>
+                <a:tc>
+                  <a:txBody>
+                    <a:bodyPr/>
+                    <a:lstStyle/>
+                    <a:p>
+                      <a:pPr algn="ctr" indent="0" marL="0">
+                        <a:buNone/>
+                      </a:pPr>
+                      <a:r>
+                        <a:rPr lang="en-US" sz="1300" dirty="0">
+                          <a:solidFill>
+                            <a:srgbClr val="1A1A1A"/>
+                          </a:solidFill>
+                          <a:latin typeface="Arial" pitchFamily="34" charset="0"/>
+                          <a:ea typeface="Arial" pitchFamily="34" charset="-122"/>
+                          <a:cs typeface="Arial" pitchFamily="34" charset="-120"/>
+                        </a:rPr>
+                        <a:t>13.9</a:t>
+                      </a:r>
+                      <a:endParaRPr lang="en-US" sz="1300" dirty="0">
+                        <a:latin typeface="Arial" charset="0"/>
+                        <a:ea typeface="Arial" charset="0"/>
+                        <a:cs typeface="Arial" charset="0"/>
+                      </a:endParaRPr>
+                    </a:p>
+                  </a:txBody>
+                  <a:tcPr marL="91440" marR="91440" marT="45720" marB="45720" anchor="ctr">
+                    <a:lnL w="6350" cap="flat" cmpd="sng" algn="ctr">
+                      <a:solidFill>
+                        <a:srgbClr val="E3E3E3"/>
+                      </a:solidFill>
+                      <a:prstDash val="solid"/>
+                      <a:round/>
+                      <a:headEnd type="none" w="med" len="med"/>
+                      <a:tailEnd type="none" w="med" len="med"/>
+                    </a:lnL>
+                    <a:lnR w="6350" cap="flat" cmpd="sng" algn="ctr">
+                      <a:solidFill>
+                        <a:srgbClr val="E3E3E3"/>
+                      </a:solidFill>
+                      <a:prstDash val="solid"/>
+                      <a:round/>
+                      <a:headEnd type="none" w="med" len="med"/>
+                      <a:tailEnd type="none" w="med" len="med"/>
+                    </a:lnR>
+                    <a:lnT w="6350" cap="flat" cmpd="sng" algn="ctr">
+                      <a:solidFill>
+                        <a:srgbClr val="E3E3E3"/>
+                      </a:solidFill>
+                      <a:prstDash val="solid"/>
+                      <a:round/>
+                      <a:headEnd type="none" w="med" len="med"/>
+                      <a:tailEnd type="none" w="med" len="med"/>
+                    </a:lnT>
+                    <a:lnB w="6350" cap="flat" cmpd="sng" algn="ctr">
+                      <a:solidFill>
+                        <a:srgbClr val="E3E3E3"/>
+                      </a:solidFill>
+                      <a:prstDash val="solid"/>
+                      <a:round/>
+                      <a:headEnd type="none" w="med" len="med"/>
+                      <a:tailEnd type="none" w="med" len="med"/>
+                    </a:lnB>
+                    <a:solidFill>
+                      <a:srgbClr val="FBEAEC"/>
+                    </a:solidFill>
+                  </a:tcPr>
+                </a:tc>
+                <a:tc>
+                  <a:txBody>
+                    <a:bodyPr/>
+                    <a:lstStyle/>
+                    <a:p>
+                      <a:pPr algn="ctr" indent="0" marL="0">
+                        <a:buNone/>
+                      </a:pPr>
+                      <a:r>
+                        <a:rPr lang="en-US" sz="1300" dirty="0">
+                          <a:solidFill>
+                            <a:srgbClr val="1A1A1A"/>
+                          </a:solidFill>
+                          <a:latin typeface="Arial" pitchFamily="34" charset="0"/>
+                          <a:ea typeface="Arial" pitchFamily="34" charset="-122"/>
+                          <a:cs typeface="Arial" pitchFamily="34" charset="-120"/>
+                        </a:rPr>
+                        <a:t>12.7</a:t>
+                      </a:r>
+                      <a:endParaRPr lang="en-US" sz="1300" dirty="0">
+                        <a:latin typeface="Arial" charset="0"/>
+                        <a:ea typeface="Arial" charset="0"/>
+                        <a:cs typeface="Arial" charset="0"/>
+                      </a:endParaRPr>
+                    </a:p>
+                  </a:txBody>
+                  <a:tcPr marL="91440" marR="91440" marT="45720" marB="45720" anchor="ctr">
+                    <a:lnL w="6350" cap="flat" cmpd="sng" algn="ctr">
+                      <a:solidFill>
+                        <a:srgbClr val="E3E3E3"/>
+                      </a:solidFill>
+                      <a:prstDash val="solid"/>
+                      <a:round/>
+                      <a:headEnd type="none" w="med" len="med"/>
+                      <a:tailEnd type="none" w="med" len="med"/>
+                    </a:lnL>
+                    <a:lnR w="6350" cap="flat" cmpd="sng" algn="ctr">
+                      <a:solidFill>
+                        <a:srgbClr val="E3E3E3"/>
+                      </a:solidFill>
+                      <a:prstDash val="solid"/>
+                      <a:round/>
+                      <a:headEnd type="none" w="med" len="med"/>
+                      <a:tailEnd type="none" w="med" len="med"/>
+                    </a:lnR>
+                    <a:lnT w="6350" cap="flat" cmpd="sng" algn="ctr">
+                      <a:solidFill>
+                        <a:srgbClr val="E3E3E3"/>
+                      </a:solidFill>
+                      <a:prstDash val="solid"/>
+                      <a:round/>
+                      <a:headEnd type="none" w="med" len="med"/>
+                      <a:tailEnd type="none" w="med" len="med"/>
+                    </a:lnT>
+                    <a:lnB w="6350" cap="flat" cmpd="sng" algn="ctr">
+                      <a:solidFill>
+                        <a:srgbClr val="E3E3E3"/>
+                      </a:solidFill>
+                      <a:prstDash val="solid"/>
+                      <a:round/>
+                      <a:headEnd type="none" w="med" len="med"/>
+                      <a:tailEnd type="none" w="med" len="med"/>
+                    </a:lnB>
+                    <a:solidFill>
+                      <a:srgbClr val="FBEAEC"/>
+                    </a:solidFill>
+                  </a:tcPr>
+                </a:tc>
+                <a:tc>
+                  <a:txBody>
+                    <a:bodyPr/>
+                    <a:lstStyle/>
+                    <a:p>
+                      <a:pPr algn="ctr" indent="0" marL="0">
+                        <a:buNone/>
+                      </a:pPr>
+                      <a:r>
+                        <a:rPr lang="en-US" sz="1300" dirty="0">
+                          <a:solidFill>
+                            <a:srgbClr val="1A1A1A"/>
+                          </a:solidFill>
+                          <a:latin typeface="Arial" pitchFamily="34" charset="0"/>
+                          <a:ea typeface="Arial" pitchFamily="34" charset="-122"/>
+                          <a:cs typeface="Arial" pitchFamily="34" charset="-120"/>
+                        </a:rPr>
+                        <a:t>11.7</a:t>
+                      </a:r>
+                      <a:endParaRPr lang="en-US" sz="1300" dirty="0">
+                        <a:latin typeface="Arial" charset="0"/>
+                        <a:ea typeface="Arial" charset="0"/>
+                        <a:cs typeface="Arial" charset="0"/>
+                      </a:endParaRPr>
+                    </a:p>
+                  </a:txBody>
+                  <a:tcPr marL="91440" marR="91440" marT="45720" marB="45720" anchor="ctr">
+                    <a:lnL w="6350" cap="flat" cmpd="sng" algn="ctr">
+                      <a:solidFill>
+                        <a:srgbClr val="E3E3E3"/>
+                      </a:solidFill>
+                      <a:prstDash val="solid"/>
+                      <a:round/>
+                      <a:headEnd type="none" w="med" len="med"/>
+                      <a:tailEnd type="none" w="med" len="med"/>
+                    </a:lnL>
+                    <a:lnR w="6350" cap="flat" cmpd="sng" algn="ctr">
+                      <a:solidFill>
+                        <a:srgbClr val="E3E3E3"/>
+                      </a:solidFill>
+                      <a:prstDash val="solid"/>
+                      <a:round/>
+                      <a:headEnd type="none" w="med" len="med"/>
+                      <a:tailEnd type="none" w="med" len="med"/>
+                    </a:lnR>
+                    <a:lnT w="6350" cap="flat" cmpd="sng" algn="ctr">
+                      <a:solidFill>
+                        <a:srgbClr val="E3E3E3"/>
+                      </a:solidFill>
+                      <a:prstDash val="solid"/>
+                      <a:round/>
+                      <a:headEnd type="none" w="med" len="med"/>
+                      <a:tailEnd type="none" w="med" len="med"/>
+                    </a:lnT>
+                    <a:lnB w="6350" cap="flat" cmpd="sng" algn="ctr">
+                      <a:solidFill>
+                        <a:srgbClr val="E3E3E3"/>
+                      </a:solidFill>
+                      <a:prstDash val="solid"/>
+                      <a:round/>
+                      <a:headEnd type="none" w="med" len="med"/>
+                      <a:tailEnd type="none" w="med" len="med"/>
+                    </a:lnB>
+                    <a:solidFill>
+                      <a:srgbClr val="FBEAEC"/>
+                    </a:solidFill>
+                  </a:tcPr>
+                </a:tc>
+                <a:tc>
+                  <a:txBody>
+                    <a:bodyPr/>
+                    <a:lstStyle/>
+                    <a:p>
+                      <a:pPr algn="ctr" indent="0" marL="0">
+                        <a:buNone/>
+                      </a:pPr>
+                      <a:r>
+                        <a:rPr lang="en-US" sz="1300" dirty="0">
+                          <a:solidFill>
+                            <a:srgbClr val="1A1A1A"/>
+                          </a:solidFill>
+                          <a:latin typeface="Arial" pitchFamily="34" charset="0"/>
+                          <a:ea typeface="Arial" pitchFamily="34" charset="-122"/>
+                          <a:cs typeface="Arial" pitchFamily="34" charset="-120"/>
+                        </a:rPr>
+                        <a:t>10.8</a:t>
+                      </a:r>
+                      <a:endParaRPr lang="en-US" sz="1300" dirty="0">
+                        <a:latin typeface="Arial" charset="0"/>
+                        <a:ea typeface="Arial" charset="0"/>
+                        <a:cs typeface="Arial" charset="0"/>
+                      </a:endParaRPr>
+                    </a:p>
+                  </a:txBody>
+                  <a:tcPr marL="91440" marR="91440" marT="45720" marB="45720" anchor="ctr">
+                    <a:lnL w="6350" cap="flat" cmpd="sng" algn="ctr">
+                      <a:solidFill>
+                        <a:srgbClr val="E3E3E3"/>
+                      </a:solidFill>
+                      <a:prstDash val="solid"/>
+                      <a:round/>
+                      <a:headEnd type="none" w="med" len="med"/>
+                      <a:tailEnd type="none" w="med" len="med"/>
+                    </a:lnL>
+                    <a:lnR w="6350" cap="flat" cmpd="sng" algn="ctr">
+                      <a:solidFill>
+                        <a:srgbClr val="E3E3E3"/>
+                      </a:solidFill>
+                      <a:prstDash val="solid"/>
+                      <a:round/>
+                      <a:headEnd type="none" w="med" len="med"/>
+                      <a:tailEnd type="none" w="med" len="med"/>
+                    </a:lnR>
+                    <a:lnT w="6350" cap="flat" cmpd="sng" algn="ctr">
+                      <a:solidFill>
+                        <a:srgbClr val="E3E3E3"/>
+                      </a:solidFill>
+                      <a:prstDash val="solid"/>
+                      <a:round/>
+                      <a:headEnd type="none" w="med" len="med"/>
+                      <a:tailEnd type="none" w="med" len="med"/>
+                    </a:lnT>
+                    <a:lnB w="6350" cap="flat" cmpd="sng" algn="ctr">
+                      <a:solidFill>
+                        <a:srgbClr val="E3E3E3"/>
+                      </a:solidFill>
+                      <a:prstDash val="solid"/>
+                      <a:round/>
+                      <a:headEnd type="none" w="med" len="med"/>
+                      <a:tailEnd type="none" w="med" len="med"/>
+                    </a:lnB>
+                    <a:solidFill>
+                      <a:srgbClr val="FBEAEC"/>
+                    </a:solidFill>
+                  </a:tcPr>
+                </a:tc>
+              </a:tr>
+              <a:tr h="475488">
+                <a:tc>
+                  <a:txBody>
+                    <a:bodyPr/>
+                    <a:lstStyle/>
+                    <a:p>
+                      <a:pPr algn="ctr" indent="0" marL="0">
+                        <a:buNone/>
+                      </a:pPr>
+                      <a:r>
+                        <a:rPr lang="en-US" sz="1300" b="1" dirty="0">
+                          <a:solidFill>
+                            <a:srgbClr val="1A1A1A"/>
+                          </a:solidFill>
+                          <a:latin typeface="Arial" pitchFamily="34" charset="0"/>
+                          <a:ea typeface="Arial" pitchFamily="34" charset="-122"/>
+                          <a:cs typeface="Arial" pitchFamily="34" charset="-120"/>
+                        </a:rPr>
+                        <a:t>₹10</a:t>
+                      </a:r>
+                      <a:endParaRPr lang="en-US" sz="1300" dirty="0">
+                        <a:latin typeface="Arial" charset="0"/>
+                        <a:ea typeface="Arial" charset="0"/>
+                        <a:cs typeface="Arial" charset="0"/>
+                      </a:endParaRPr>
+                    </a:p>
+                  </a:txBody>
+                  <a:tcPr marL="91440" marR="91440" marT="45720" marB="45720" anchor="ctr">
+                    <a:lnL w="6350" cap="flat" cmpd="sng" algn="ctr">
+                      <a:solidFill>
+                        <a:srgbClr val="E3E3E3"/>
+                      </a:solidFill>
+                      <a:prstDash val="solid"/>
+                      <a:round/>
+                      <a:headEnd type="none" w="med" len="med"/>
+                      <a:tailEnd type="none" w="med" len="med"/>
+                    </a:lnL>
+                    <a:lnR w="6350" cap="flat" cmpd="sng" algn="ctr">
+                      <a:solidFill>
+                        <a:srgbClr val="E3E3E3"/>
+                      </a:solidFill>
+                      <a:prstDash val="solid"/>
+                      <a:round/>
+                      <a:headEnd type="none" w="med" len="med"/>
+                      <a:tailEnd type="none" w="med" len="med"/>
+                    </a:lnR>
+                    <a:lnT w="6350" cap="flat" cmpd="sng" algn="ctr">
+                      <a:solidFill>
+                        <a:srgbClr val="E3E3E3"/>
+                      </a:solidFill>
+                      <a:prstDash val="solid"/>
+                      <a:round/>
+                      <a:headEnd type="none" w="med" len="med"/>
+                      <a:tailEnd type="none" w="med" len="med"/>
+                    </a:lnT>
+                    <a:lnB w="6350" cap="flat" cmpd="sng" algn="ctr">
+                      <a:solidFill>
+                        <a:srgbClr val="E3E3E3"/>
+                      </a:solidFill>
+                      <a:prstDash val="solid"/>
+                      <a:round/>
+                      <a:headEnd type="none" w="med" len="med"/>
+                      <a:tailEnd type="none" w="med" len="med"/>
+                    </a:lnB>
+                    <a:solidFill>
+                      <a:srgbClr val="FFFFFF"/>
+                    </a:solidFill>
+                  </a:tcPr>
+                </a:tc>
+                <a:tc>
+                  <a:txBody>
+                    <a:bodyPr/>
+                    <a:lstStyle/>
+                    <a:p>
+                      <a:pPr algn="ctr" indent="0" marL="0">
+                        <a:buNone/>
+                      </a:pPr>
+                      <a:r>
+                        <a:rPr lang="en-US" sz="1300" dirty="0">
+                          <a:solidFill>
+                            <a:srgbClr val="1A1A1A"/>
+                          </a:solidFill>
+                          <a:latin typeface="Arial" pitchFamily="34" charset="0"/>
+                          <a:ea typeface="Arial" pitchFamily="34" charset="-122"/>
+                          <a:cs typeface="Arial" pitchFamily="34" charset="-120"/>
+                        </a:rPr>
+                        <a:t>13.5</a:t>
+                      </a:r>
+                      <a:endParaRPr lang="en-US" sz="1300" dirty="0">
+                        <a:latin typeface="Arial" charset="0"/>
+                        <a:ea typeface="Arial" charset="0"/>
+                        <a:cs typeface="Arial" charset="0"/>
+                      </a:endParaRPr>
+                    </a:p>
+                  </a:txBody>
+                  <a:tcPr marL="91440" marR="91440" marT="45720" marB="45720" anchor="ctr">
+                    <a:lnL w="6350" cap="flat" cmpd="sng" algn="ctr">
+                      <a:solidFill>
+                        <a:srgbClr val="E3E3E3"/>
+                      </a:solidFill>
+                      <a:prstDash val="solid"/>
+                      <a:round/>
+                      <a:headEnd type="none" w="med" len="med"/>
+                      <a:tailEnd type="none" w="med" len="med"/>
+                    </a:lnL>
+                    <a:lnR w="6350" cap="flat" cmpd="sng" algn="ctr">
+                      <a:solidFill>
+                        <a:srgbClr val="E3E3E3"/>
+                      </a:solidFill>
+                      <a:prstDash val="solid"/>
+                      <a:round/>
+                      <a:headEnd type="none" w="med" len="med"/>
+                      <a:tailEnd type="none" w="med" len="med"/>
+                    </a:lnR>
+                    <a:lnT w="6350" cap="flat" cmpd="sng" algn="ctr">
+                      <a:solidFill>
+                        <a:srgbClr val="E3E3E3"/>
+                      </a:solidFill>
+                      <a:prstDash val="solid"/>
+                      <a:round/>
+                      <a:headEnd type="none" w="med" len="med"/>
+                      <a:tailEnd type="none" w="med" len="med"/>
+                    </a:lnT>
+                    <a:lnB w="6350" cap="flat" cmpd="sng" algn="ctr">
+                      <a:solidFill>
+                        <a:srgbClr val="E3E3E3"/>
+                      </a:solidFill>
+                      <a:prstDash val="solid"/>
+                      <a:round/>
+                      <a:headEnd type="none" w="med" len="med"/>
+                      <a:tailEnd type="none" w="med" len="med"/>
+                    </a:lnB>
+                    <a:solidFill>
+                      <a:srgbClr val="FBEAEC"/>
+                    </a:solidFill>
+                  </a:tcPr>
+                </a:tc>
+                <a:tc>
+                  <a:txBody>
+                    <a:bodyPr/>
+                    <a:lstStyle/>
+                    <a:p>
+                      <a:pPr algn="ctr" indent="0" marL="0">
+                        <a:buNone/>
+                      </a:pPr>
+                      <a:r>
+                        <a:rPr lang="en-US" sz="1300" dirty="0">
+                          <a:solidFill>
+                            <a:srgbClr val="1A1A1A"/>
+                          </a:solidFill>
+                          <a:latin typeface="Arial" pitchFamily="34" charset="0"/>
+                          <a:ea typeface="Arial" pitchFamily="34" charset="-122"/>
+                          <a:cs typeface="Arial" pitchFamily="34" charset="-120"/>
+                        </a:rPr>
+                        <a:t>12.2</a:t>
+                      </a:r>
+                      <a:endParaRPr lang="en-US" sz="1300" dirty="0">
+                        <a:latin typeface="Arial" charset="0"/>
+                        <a:ea typeface="Arial" charset="0"/>
+                        <a:cs typeface="Arial" charset="0"/>
+                      </a:endParaRPr>
+                    </a:p>
+                  </a:txBody>
+                  <a:tcPr marL="91440" marR="91440" marT="45720" marB="45720" anchor="ctr">
+                    <a:lnL w="6350" cap="flat" cmpd="sng" algn="ctr">
+                      <a:solidFill>
+                        <a:srgbClr val="E3E3E3"/>
+                      </a:solidFill>
+                      <a:prstDash val="solid"/>
+                      <a:round/>
+                      <a:headEnd type="none" w="med" len="med"/>
+                      <a:tailEnd type="none" w="med" len="med"/>
+                    </a:lnL>
+                    <a:lnR w="6350" cap="flat" cmpd="sng" algn="ctr">
+                      <a:solidFill>
+                        <a:srgbClr val="E3E3E3"/>
+                      </a:solidFill>
+                      <a:prstDash val="solid"/>
+                      <a:round/>
+                      <a:headEnd type="none" w="med" len="med"/>
+                      <a:tailEnd type="none" w="med" len="med"/>
+                    </a:lnR>
+                    <a:lnT w="6350" cap="flat" cmpd="sng" algn="ctr">
+                      <a:solidFill>
+                        <a:srgbClr val="E3E3E3"/>
+                      </a:solidFill>
+                      <a:prstDash val="solid"/>
+                      <a:round/>
+                      <a:headEnd type="none" w="med" len="med"/>
+                      <a:tailEnd type="none" w="med" len="med"/>
+                    </a:lnT>
+                    <a:lnB w="6350" cap="flat" cmpd="sng" algn="ctr">
+                      <a:solidFill>
+                        <a:srgbClr val="E3E3E3"/>
+                      </a:solidFill>
+                      <a:prstDash val="solid"/>
+                      <a:round/>
+                      <a:headEnd type="none" w="med" len="med"/>
+                      <a:tailEnd type="none" w="med" len="med"/>
+                    </a:lnB>
+                    <a:solidFill>
+                      <a:srgbClr val="FBEAEC"/>
+                    </a:solidFill>
+                  </a:tcPr>
+                </a:tc>
+                <a:tc>
+                  <a:txBody>
+                    <a:bodyPr/>
+                    <a:lstStyle/>
+                    <a:p>
+                      <a:pPr algn="ctr" indent="0" marL="0">
+                        <a:buNone/>
+                      </a:pPr>
+                      <a:r>
+                        <a:rPr lang="en-US" sz="1300" dirty="0">
+                          <a:solidFill>
+                            <a:srgbClr val="1A1A1A"/>
+                          </a:solidFill>
+                          <a:latin typeface="Arial" pitchFamily="34" charset="0"/>
+                          <a:ea typeface="Arial" pitchFamily="34" charset="-122"/>
+                          <a:cs typeface="Arial" pitchFamily="34" charset="-120"/>
+                        </a:rPr>
+                        <a:t>11.2</a:t>
+                      </a:r>
+                      <a:endParaRPr lang="en-US" sz="1300" dirty="0">
+                        <a:latin typeface="Arial" charset="0"/>
+                        <a:ea typeface="Arial" charset="0"/>
+                        <a:cs typeface="Arial" charset="0"/>
+                      </a:endParaRPr>
+                    </a:p>
+                  </a:txBody>
+                  <a:tcPr marL="91440" marR="91440" marT="45720" marB="45720" anchor="ctr">
+                    <a:lnL w="6350" cap="flat" cmpd="sng" algn="ctr">
+                      <a:solidFill>
+                        <a:srgbClr val="E3E3E3"/>
+                      </a:solidFill>
+                      <a:prstDash val="solid"/>
+                      <a:round/>
+                      <a:headEnd type="none" w="med" len="med"/>
+                      <a:tailEnd type="none" w="med" len="med"/>
+                    </a:lnL>
+                    <a:lnR w="6350" cap="flat" cmpd="sng" algn="ctr">
+                      <a:solidFill>
+                        <a:srgbClr val="E3E3E3"/>
+                      </a:solidFill>
+                      <a:prstDash val="solid"/>
+                      <a:round/>
+                      <a:headEnd type="none" w="med" len="med"/>
+                      <a:tailEnd type="none" w="med" len="med"/>
+                    </a:lnR>
+                    <a:lnT w="6350" cap="flat" cmpd="sng" algn="ctr">
+                      <a:solidFill>
+                        <a:srgbClr val="E3E3E3"/>
+                      </a:solidFill>
+                      <a:prstDash val="solid"/>
+                      <a:round/>
+                      <a:headEnd type="none" w="med" len="med"/>
+                      <a:tailEnd type="none" w="med" len="med"/>
+                    </a:lnT>
+                    <a:lnB w="6350" cap="flat" cmpd="sng" algn="ctr">
+                      <a:solidFill>
+                        <a:srgbClr val="E3E3E3"/>
+                      </a:solidFill>
+                      <a:prstDash val="solid"/>
+                      <a:round/>
+                      <a:headEnd type="none" w="med" len="med"/>
+                      <a:tailEnd type="none" w="med" len="med"/>
+                    </a:lnB>
+                    <a:solidFill>
+                      <a:srgbClr val="FBEAEC"/>
+                    </a:solidFill>
+                  </a:tcPr>
+                </a:tc>
+                <a:tc>
+                  <a:txBody>
+                    <a:bodyPr/>
+                    <a:lstStyle/>
+                    <a:p>
+                      <a:pPr algn="ctr" indent="0" marL="0">
+                        <a:buNone/>
+                      </a:pPr>
+                      <a:r>
+                        <a:rPr lang="en-US" sz="1300" dirty="0">
+                          <a:solidFill>
+                            <a:srgbClr val="1A1A1A"/>
+                          </a:solidFill>
+                          <a:latin typeface="Arial" pitchFamily="34" charset="0"/>
+                          <a:ea typeface="Arial" pitchFamily="34" charset="-122"/>
+                          <a:cs typeface="Arial" pitchFamily="34" charset="-120"/>
+                        </a:rPr>
+                        <a:t>10.3</a:t>
+                      </a:r>
+                      <a:endParaRPr lang="en-US" sz="1300" dirty="0">
+                        <a:latin typeface="Arial" charset="0"/>
+                        <a:ea typeface="Arial" charset="0"/>
+                        <a:cs typeface="Arial" charset="0"/>
+                      </a:endParaRPr>
+                    </a:p>
+                  </a:txBody>
+                  <a:tcPr marL="91440" marR="91440" marT="45720" marB="45720" anchor="ctr">
+                    <a:lnL w="6350" cap="flat" cmpd="sng" algn="ctr">
+                      <a:solidFill>
+                        <a:srgbClr val="E3E3E3"/>
+                      </a:solidFill>
+                      <a:prstDash val="solid"/>
+                      <a:round/>
+                      <a:headEnd type="none" w="med" len="med"/>
+                      <a:tailEnd type="none" w="med" len="med"/>
+                    </a:lnL>
+                    <a:lnR w="6350" cap="flat" cmpd="sng" algn="ctr">
+                      <a:solidFill>
+                        <a:srgbClr val="E3E3E3"/>
+                      </a:solidFill>
+                      <a:prstDash val="solid"/>
+                      <a:round/>
+                      <a:headEnd type="none" w="med" len="med"/>
+                      <a:tailEnd type="none" w="med" len="med"/>
+                    </a:lnR>
+                    <a:lnT w="6350" cap="flat" cmpd="sng" algn="ctr">
+                      <a:solidFill>
+                        <a:srgbClr val="E3E3E3"/>
+                      </a:solidFill>
+                      <a:prstDash val="solid"/>
+                      <a:round/>
+                      <a:headEnd type="none" w="med" len="med"/>
+                      <a:tailEnd type="none" w="med" len="med"/>
+                    </a:lnT>
+                    <a:lnB w="6350" cap="flat" cmpd="sng" algn="ctr">
+                      <a:solidFill>
+                        <a:srgbClr val="E3E3E3"/>
+                      </a:solidFill>
+                      <a:prstDash val="solid"/>
+                      <a:round/>
+                      <a:headEnd type="none" w="med" len="med"/>
+                      <a:tailEnd type="none" w="med" len="med"/>
+                    </a:lnB>
+                    <a:solidFill>
+                      <a:srgbClr val="FBEAEC"/>
+                    </a:solidFill>
+                  </a:tcPr>
+                </a:tc>
+                <a:tc>
+                  <a:txBody>
+                    <a:bodyPr/>
+                    <a:lstStyle/>
+                    <a:p>
+                      <a:pPr algn="ctr" indent="0" marL="0">
+                        <a:buNone/>
+                      </a:pPr>
+                      <a:r>
+                        <a:rPr lang="en-US" sz="1300" dirty="0">
+                          <a:solidFill>
+                            <a:srgbClr val="1A1A1A"/>
+                          </a:solidFill>
+                          <a:latin typeface="Arial" pitchFamily="34" charset="0"/>
+                          <a:ea typeface="Arial" pitchFamily="34" charset="-122"/>
+                          <a:cs typeface="Arial" pitchFamily="34" charset="-120"/>
+                        </a:rPr>
+                        <a:t>9.6</a:t>
+                      </a:r>
+                      <a:endParaRPr lang="en-US" sz="1300" dirty="0">
+                        <a:latin typeface="Arial" charset="0"/>
+                        <a:ea typeface="Arial" charset="0"/>
+                        <a:cs typeface="Arial" charset="0"/>
+                      </a:endParaRPr>
+                    </a:p>
+                  </a:txBody>
+                  <a:tcPr marL="91440" marR="91440" marT="45720" marB="45720" anchor="ctr">
+                    <a:lnL w="6350" cap="flat" cmpd="sng" algn="ctr">
+                      <a:solidFill>
+                        <a:srgbClr val="E3E3E3"/>
+                      </a:solidFill>
+                      <a:prstDash val="solid"/>
+                      <a:round/>
+                      <a:headEnd type="none" w="med" len="med"/>
+                      <a:tailEnd type="none" w="med" len="med"/>
+                    </a:lnL>
+                    <a:lnR w="6350" cap="flat" cmpd="sng" algn="ctr">
+                      <a:solidFill>
+                        <a:srgbClr val="E3E3E3"/>
+                      </a:solidFill>
+                      <a:prstDash val="solid"/>
+                      <a:round/>
+                      <a:headEnd type="none" w="med" len="med"/>
+                      <a:tailEnd type="none" w="med" len="med"/>
+                    </a:lnR>
+                    <a:lnT w="6350" cap="flat" cmpd="sng" algn="ctr">
+                      <a:solidFill>
+                        <a:srgbClr val="E3E3E3"/>
+                      </a:solidFill>
+                      <a:prstDash val="solid"/>
+                      <a:round/>
+                      <a:headEnd type="none" w="med" len="med"/>
+                      <a:tailEnd type="none" w="med" len="med"/>
+                    </a:lnT>
+                    <a:lnB w="6350" cap="flat" cmpd="sng" algn="ctr">
+                      <a:solidFill>
+                        <a:srgbClr val="E3E3E3"/>
+                      </a:solidFill>
+                      <a:prstDash val="solid"/>
+                      <a:round/>
+                      <a:headEnd type="none" w="med" len="med"/>
+                      <a:tailEnd type="none" w="med" len="med"/>
+                    </a:lnB>
+                    <a:solidFill>
+                      <a:srgbClr val="FBEAEC"/>
+                    </a:solidFill>
+                  </a:tcPr>
+                </a:tc>
+              </a:tr>
+              <a:tr h="475488">
+                <a:tc>
+                  <a:txBody>
+                    <a:bodyPr/>
+                    <a:lstStyle/>
+                    <a:p>
+                      <a:pPr algn="ctr" indent="0" marL="0">
+                        <a:buNone/>
+                      </a:pPr>
+                      <a:r>
+                        <a:rPr lang="en-US" sz="1300" b="1" dirty="0">
+                          <a:solidFill>
+                            <a:srgbClr val="1A1A1A"/>
+                          </a:solidFill>
+                          <a:latin typeface="Arial" pitchFamily="34" charset="0"/>
+                          <a:ea typeface="Arial" pitchFamily="34" charset="-122"/>
+                          <a:cs typeface="Arial" pitchFamily="34" charset="-120"/>
+                        </a:rPr>
+                        <a:t>₹11</a:t>
+                      </a:r>
+                      <a:endParaRPr lang="en-US" sz="1300" dirty="0">
+                        <a:latin typeface="Arial" charset="0"/>
+                        <a:ea typeface="Arial" charset="0"/>
+                        <a:cs typeface="Arial" charset="0"/>
+                      </a:endParaRPr>
+                    </a:p>
+                  </a:txBody>
+                  <a:tcPr marL="91440" marR="91440" marT="45720" marB="45720" anchor="ctr">
+                    <a:lnL w="6350" cap="flat" cmpd="sng" algn="ctr">
+                      <a:solidFill>
+                        <a:srgbClr val="E3E3E3"/>
+                      </a:solidFill>
+                      <a:prstDash val="solid"/>
+                      <a:round/>
+                      <a:headEnd type="none" w="med" len="med"/>
+                      <a:tailEnd type="none" w="med" len="med"/>
+                    </a:lnL>
+                    <a:lnR w="6350" cap="flat" cmpd="sng" algn="ctr">
+                      <a:solidFill>
+                        <a:srgbClr val="E3E3E3"/>
+                      </a:solidFill>
+                      <a:prstDash val="solid"/>
+                      <a:round/>
+                      <a:headEnd type="none" w="med" len="med"/>
+                      <a:tailEnd type="none" w="med" len="med"/>
+                    </a:lnR>
+                    <a:lnT w="6350" cap="flat" cmpd="sng" algn="ctr">
+                      <a:solidFill>
+                        <a:srgbClr val="E3E3E3"/>
+                      </a:solidFill>
+                      <a:prstDash val="solid"/>
+                      <a:round/>
+                      <a:headEnd type="none" w="med" len="med"/>
+                      <a:tailEnd type="none" w="med" len="med"/>
+                    </a:lnT>
+                    <a:lnB w="6350" cap="flat" cmpd="sng" algn="ctr">
+                      <a:solidFill>
+                        <a:srgbClr val="E3E3E3"/>
+                      </a:solidFill>
+                      <a:prstDash val="solid"/>
+                      <a:round/>
+                      <a:headEnd type="none" w="med" len="med"/>
+                      <a:tailEnd type="none" w="med" len="med"/>
+                    </a:lnB>
+                    <a:solidFill>
+                      <a:srgbClr val="FFFFFF"/>
+                    </a:solidFill>
+                  </a:tcPr>
+                </a:tc>
+                <a:tc>
+                  <a:txBody>
+                    <a:bodyPr/>
+                    <a:lstStyle/>
+                    <a:p>
+                      <a:pPr algn="ctr" indent="0" marL="0">
+                        <a:buNone/>
+                      </a:pPr>
+                      <a:r>
+                        <a:rPr lang="en-US" sz="1300" dirty="0">
+                          <a:solidFill>
+                            <a:srgbClr val="1A1A1A"/>
+                          </a:solidFill>
+                          <a:latin typeface="Arial" pitchFamily="34" charset="0"/>
+                          <a:ea typeface="Arial" pitchFamily="34" charset="-122"/>
+                          <a:cs typeface="Arial" pitchFamily="34" charset="-120"/>
+                        </a:rPr>
+                        <a:t>12.0</a:t>
+                      </a:r>
+                      <a:endParaRPr lang="en-US" sz="1300" dirty="0">
+                        <a:latin typeface="Arial" charset="0"/>
+                        <a:ea typeface="Arial" charset="0"/>
+                        <a:cs typeface="Arial" charset="0"/>
+                      </a:endParaRPr>
+                    </a:p>
+                  </a:txBody>
+                  <a:tcPr marL="91440" marR="91440" marT="45720" marB="45720" anchor="ctr">
+                    <a:lnL w="6350" cap="flat" cmpd="sng" algn="ctr">
+                      <a:solidFill>
+                        <a:srgbClr val="E3E3E3"/>
+                      </a:solidFill>
+                      <a:prstDash val="solid"/>
+                      <a:round/>
+                      <a:headEnd type="none" w="med" len="med"/>
+                      <a:tailEnd type="none" w="med" len="med"/>
+                    </a:lnL>
+                    <a:lnR w="6350" cap="flat" cmpd="sng" algn="ctr">
+                      <a:solidFill>
+                        <a:srgbClr val="E3E3E3"/>
+                      </a:solidFill>
+                      <a:prstDash val="solid"/>
+                      <a:round/>
+                      <a:headEnd type="none" w="med" len="med"/>
+                      <a:tailEnd type="none" w="med" len="med"/>
+                    </a:lnR>
+                    <a:lnT w="6350" cap="flat" cmpd="sng" algn="ctr">
+                      <a:solidFill>
+                        <a:srgbClr val="E3E3E3"/>
+                      </a:solidFill>
+                      <a:prstDash val="solid"/>
+                      <a:round/>
+                      <a:headEnd type="none" w="med" len="med"/>
+                      <a:tailEnd type="none" w="med" len="med"/>
+                    </a:lnT>
+                    <a:lnB w="6350" cap="flat" cmpd="sng" algn="ctr">
+                      <a:solidFill>
+                        <a:srgbClr val="E3E3E3"/>
+                      </a:solidFill>
+                      <a:prstDash val="solid"/>
+                      <a:round/>
+                      <a:headEnd type="none" w="med" len="med"/>
+                      <a:tailEnd type="none" w="med" len="med"/>
+                    </a:lnB>
+                    <a:solidFill>
+                      <a:srgbClr val="FBEAEC"/>
+                    </a:solidFill>
+                  </a:tcPr>
+                </a:tc>
+                <a:tc>
+                  <a:txBody>
+                    <a:bodyPr/>
+                    <a:lstStyle/>
+                    <a:p>
+                      <a:pPr algn="ctr" indent="0" marL="0">
+                        <a:buNone/>
+                      </a:pPr>
+                      <a:r>
+                        <a:rPr lang="en-US" sz="1300" dirty="0">
+                          <a:solidFill>
+                            <a:srgbClr val="1A1A1A"/>
+                          </a:solidFill>
+                          <a:latin typeface="Arial" pitchFamily="34" charset="0"/>
+                          <a:ea typeface="Arial" pitchFamily="34" charset="-122"/>
+                          <a:cs typeface="Arial" pitchFamily="34" charset="-120"/>
+                        </a:rPr>
+                        <a:t>10.9</a:t>
+                      </a:r>
+                      <a:endParaRPr lang="en-US" sz="1300" dirty="0">
+                        <a:latin typeface="Arial" charset="0"/>
+                        <a:ea typeface="Arial" charset="0"/>
+                        <a:cs typeface="Arial" charset="0"/>
+                      </a:endParaRPr>
+                    </a:p>
+                  </a:txBody>
+                  <a:tcPr marL="91440" marR="91440" marT="45720" marB="45720" anchor="ctr">
+                    <a:lnL w="6350" cap="flat" cmpd="sng" algn="ctr">
+                      <a:solidFill>
+                        <a:srgbClr val="E3E3E3"/>
+                      </a:solidFill>
+                      <a:prstDash val="solid"/>
+                      <a:round/>
+                      <a:headEnd type="none" w="med" len="med"/>
+                      <a:tailEnd type="none" w="med" len="med"/>
+                    </a:lnL>
+                    <a:lnR w="6350" cap="flat" cmpd="sng" algn="ctr">
+                      <a:solidFill>
+                        <a:srgbClr val="E3E3E3"/>
+                      </a:solidFill>
+                      <a:prstDash val="solid"/>
+                      <a:round/>
+                      <a:headEnd type="none" w="med" len="med"/>
+                      <a:tailEnd type="none" w="med" len="med"/>
+                    </a:lnR>
+                    <a:lnT w="6350" cap="flat" cmpd="sng" algn="ctr">
+                      <a:solidFill>
+                        <a:srgbClr val="E3E3E3"/>
+                      </a:solidFill>
+                      <a:prstDash val="solid"/>
+                      <a:round/>
+                      <a:headEnd type="none" w="med" len="med"/>
+                      <a:tailEnd type="none" w="med" len="med"/>
+                    </a:lnT>
+                    <a:lnB w="6350" cap="flat" cmpd="sng" algn="ctr">
+                      <a:solidFill>
+                        <a:srgbClr val="E3E3E3"/>
+                      </a:solidFill>
+                      <a:prstDash val="solid"/>
+                      <a:round/>
+                      <a:headEnd type="none" w="med" len="med"/>
+                      <a:tailEnd type="none" w="med" len="med"/>
+                    </a:lnB>
+                    <a:solidFill>
+                      <a:srgbClr val="FBEAEC"/>
+                    </a:solidFill>
+                  </a:tcPr>
+                </a:tc>
+                <a:tc>
+                  <a:txBody>
+                    <a:bodyPr/>
+                    <a:lstStyle/>
+                    <a:p>
+                      <a:pPr algn="ctr" indent="0" marL="0">
+                        <a:buNone/>
+                      </a:pPr>
+                      <a:r>
+                        <a:rPr lang="en-US" sz="1300" dirty="0">
+                          <a:solidFill>
+                            <a:srgbClr val="1A1A1A"/>
+                          </a:solidFill>
+                          <a:latin typeface="Arial" pitchFamily="34" charset="0"/>
+                          <a:ea typeface="Arial" pitchFamily="34" charset="-122"/>
+                          <a:cs typeface="Arial" pitchFamily="34" charset="-120"/>
+                        </a:rPr>
+                        <a:t>10.0</a:t>
+                      </a:r>
+                      <a:endParaRPr lang="en-US" sz="1300" dirty="0">
+                        <a:latin typeface="Arial" charset="0"/>
+                        <a:ea typeface="Arial" charset="0"/>
+                        <a:cs typeface="Arial" charset="0"/>
+                      </a:endParaRPr>
+                    </a:p>
+                  </a:txBody>
+                  <a:tcPr marL="91440" marR="91440" marT="45720" marB="45720" anchor="ctr">
+                    <a:lnL w="6350" cap="flat" cmpd="sng" algn="ctr">
+                      <a:solidFill>
+                        <a:srgbClr val="E3E3E3"/>
+                      </a:solidFill>
+                      <a:prstDash val="solid"/>
+                      <a:round/>
+                      <a:headEnd type="none" w="med" len="med"/>
+                      <a:tailEnd type="none" w="med" len="med"/>
+                    </a:lnL>
+                    <a:lnR w="6350" cap="flat" cmpd="sng" algn="ctr">
+                      <a:solidFill>
+                        <a:srgbClr val="E3E3E3"/>
+                      </a:solidFill>
+                      <a:prstDash val="solid"/>
+                      <a:round/>
+                      <a:headEnd type="none" w="med" len="med"/>
+                      <a:tailEnd type="none" w="med" len="med"/>
+                    </a:lnR>
+                    <a:lnT w="6350" cap="flat" cmpd="sng" algn="ctr">
+                      <a:solidFill>
+                        <a:srgbClr val="E3E3E3"/>
+                      </a:solidFill>
+                      <a:prstDash val="solid"/>
+                      <a:round/>
+                      <a:headEnd type="none" w="med" len="med"/>
+                      <a:tailEnd type="none" w="med" len="med"/>
+                    </a:lnT>
+                    <a:lnB w="6350" cap="flat" cmpd="sng" algn="ctr">
+                      <a:solidFill>
+                        <a:srgbClr val="E3E3E3"/>
+                      </a:solidFill>
+                      <a:prstDash val="solid"/>
+                      <a:round/>
+                      <a:headEnd type="none" w="med" len="med"/>
+                      <a:tailEnd type="none" w="med" len="med"/>
+                    </a:lnB>
+                    <a:solidFill>
+                      <a:srgbClr val="FBEAEC"/>
+                    </a:solidFill>
+                  </a:tcPr>
+                </a:tc>
+                <a:tc>
+                  <a:txBody>
+                    <a:bodyPr/>
+                    <a:lstStyle/>
+                    <a:p>
+                      <a:pPr algn="ctr" indent="0" marL="0">
+                        <a:buNone/>
+                      </a:pPr>
+                      <a:r>
+                        <a:rPr lang="en-US" sz="1300" dirty="0">
+                          <a:solidFill>
+                            <a:srgbClr val="1A1A1A"/>
+                          </a:solidFill>
+                          <a:latin typeface="Arial" pitchFamily="34" charset="0"/>
+                          <a:ea typeface="Arial" pitchFamily="34" charset="-122"/>
+                          <a:cs typeface="Arial" pitchFamily="34" charset="-120"/>
+                        </a:rPr>
+                        <a:t>9.3</a:t>
+                      </a:r>
+                      <a:endParaRPr lang="en-US" sz="1300" dirty="0">
+                        <a:latin typeface="Arial" charset="0"/>
+                        <a:ea typeface="Arial" charset="0"/>
+                        <a:cs typeface="Arial" charset="0"/>
+                      </a:endParaRPr>
+                    </a:p>
+                  </a:txBody>
+                  <a:tcPr marL="91440" marR="91440" marT="45720" marB="45720" anchor="ctr">
+                    <a:lnL w="6350" cap="flat" cmpd="sng" algn="ctr">
+                      <a:solidFill>
+                        <a:srgbClr val="E3E3E3"/>
+                      </a:solidFill>
+                      <a:prstDash val="solid"/>
+                      <a:round/>
+                      <a:headEnd type="none" w="med" len="med"/>
+                      <a:tailEnd type="none" w="med" len="med"/>
+                    </a:lnL>
+                    <a:lnR w="6350" cap="flat" cmpd="sng" algn="ctr">
+                      <a:solidFill>
+                        <a:srgbClr val="E3E3E3"/>
+                      </a:solidFill>
+                      <a:prstDash val="solid"/>
+                      <a:round/>
+                      <a:headEnd type="none" w="med" len="med"/>
+                      <a:tailEnd type="none" w="med" len="med"/>
+                    </a:lnR>
+                    <a:lnT w="6350" cap="flat" cmpd="sng" algn="ctr">
+                      <a:solidFill>
+                        <a:srgbClr val="E3E3E3"/>
+                      </a:solidFill>
+                      <a:prstDash val="solid"/>
+                      <a:round/>
+                      <a:headEnd type="none" w="med" len="med"/>
+                      <a:tailEnd type="none" w="med" len="med"/>
+                    </a:lnT>
+                    <a:lnB w="6350" cap="flat" cmpd="sng" algn="ctr">
+                      <a:solidFill>
+                        <a:srgbClr val="E3E3E3"/>
+                      </a:solidFill>
+                      <a:prstDash val="solid"/>
+                      <a:round/>
+                      <a:headEnd type="none" w="med" len="med"/>
+                      <a:tailEnd type="none" w="med" len="med"/>
+                    </a:lnB>
+                    <a:solidFill>
+                      <a:srgbClr val="FBEAEC"/>
+                    </a:solidFill>
+                  </a:tcPr>
+                </a:tc>
+                <a:tc>
+                  <a:txBody>
+                    <a:bodyPr/>
+                    <a:lstStyle/>
+                    <a:p>
+                      <a:pPr algn="ctr" indent="0" marL="0">
+                        <a:buNone/>
+                      </a:pPr>
+                      <a:r>
+                        <a:rPr lang="en-US" sz="1300" dirty="0">
+                          <a:solidFill>
+                            <a:srgbClr val="1A1A1A"/>
+                          </a:solidFill>
+                          <a:latin typeface="Arial" pitchFamily="34" charset="0"/>
+                          <a:ea typeface="Arial" pitchFamily="34" charset="-122"/>
+                          <a:cs typeface="Arial" pitchFamily="34" charset="-120"/>
+                        </a:rPr>
+                        <a:t>8.6</a:t>
+                      </a:r>
+                      <a:endParaRPr lang="en-US" sz="1300" dirty="0">
+                        <a:latin typeface="Arial" charset="0"/>
+                        <a:ea typeface="Arial" charset="0"/>
+                        <a:cs typeface="Arial" charset="0"/>
+                      </a:endParaRPr>
+                    </a:p>
+                  </a:txBody>
+                  <a:tcPr marL="91440" marR="91440" marT="45720" marB="45720" anchor="ctr">
+                    <a:lnL w="6350" cap="flat" cmpd="sng" algn="ctr">
+                      <a:solidFill>
+                        <a:srgbClr val="E3E3E3"/>
+                      </a:solidFill>
+                      <a:prstDash val="solid"/>
+                      <a:round/>
+                      <a:headEnd type="none" w="med" len="med"/>
+                      <a:tailEnd type="none" w="med" len="med"/>
+                    </a:lnL>
+                    <a:lnR w="6350" cap="flat" cmpd="sng" algn="ctr">
+                      <a:solidFill>
+                        <a:srgbClr val="E3E3E3"/>
+                      </a:solidFill>
+                      <a:prstDash val="solid"/>
+                      <a:round/>
+                      <a:headEnd type="none" w="med" len="med"/>
+                      <a:tailEnd type="none" w="med" len="med"/>
+                    </a:lnR>
+                    <a:lnT w="6350" cap="flat" cmpd="sng" algn="ctr">
+                      <a:solidFill>
+                        <a:srgbClr val="E3E3E3"/>
+                      </a:solidFill>
+                      <a:prstDash val="solid"/>
+                      <a:round/>
+                      <a:headEnd type="none" w="med" len="med"/>
+                      <a:tailEnd type="none" w="med" len="med"/>
+                    </a:lnT>
+                    <a:lnB w="6350" cap="flat" cmpd="sng" algn="ctr">
+                      <a:solidFill>
+                        <a:srgbClr val="E3E3E3"/>
+                      </a:solidFill>
+                      <a:prstDash val="solid"/>
+                      <a:round/>
+                      <a:headEnd type="none" w="med" len="med"/>
+                      <a:tailEnd type="none" w="med" len="med"/>
+                    </a:lnB>
+                    <a:solidFill>
+                      <a:srgbClr val="FFF4D6"/>
+                    </a:solidFill>
+                  </a:tcPr>
+                </a:tc>
+              </a:tr>
+              <a:tr h="475488">
+                <a:tc>
+                  <a:txBody>
+                    <a:bodyPr/>
+                    <a:lstStyle/>
+                    <a:p>
+                      <a:pPr algn="ctr" indent="0" marL="0">
+                        <a:buNone/>
+                      </a:pPr>
+                      <a:r>
+                        <a:rPr lang="en-US" sz="1300" b="1" dirty="0">
+                          <a:solidFill>
+                            <a:srgbClr val="1A1A1A"/>
+                          </a:solidFill>
+                          <a:latin typeface="Arial" pitchFamily="34" charset="0"/>
+                          <a:ea typeface="Arial" pitchFamily="34" charset="-122"/>
+                          <a:cs typeface="Arial" pitchFamily="34" charset="-120"/>
+                        </a:rPr>
+                        <a:t>₹12</a:t>
+                      </a:r>
+                      <a:endParaRPr lang="en-US" sz="1300" dirty="0">
+                        <a:latin typeface="Arial" charset="0"/>
+                        <a:ea typeface="Arial" charset="0"/>
+                        <a:cs typeface="Arial" charset="0"/>
+                      </a:endParaRPr>
+                    </a:p>
+                  </a:txBody>
+                  <a:tcPr marL="91440" marR="91440" marT="45720" marB="45720" anchor="ctr">
+                    <a:lnL w="6350" cap="flat" cmpd="sng" algn="ctr">
+                      <a:solidFill>
+                        <a:srgbClr val="E3E3E3"/>
+                      </a:solidFill>
+                      <a:prstDash val="solid"/>
+                      <a:round/>
+                      <a:headEnd type="none" w="med" len="med"/>
+                      <a:tailEnd type="none" w="med" len="med"/>
+                    </a:lnL>
+                    <a:lnR w="6350" cap="flat" cmpd="sng" algn="ctr">
+                      <a:solidFill>
+                        <a:srgbClr val="E3E3E3"/>
+                      </a:solidFill>
+                      <a:prstDash val="solid"/>
+                      <a:round/>
+                      <a:headEnd type="none" w="med" len="med"/>
+                      <a:tailEnd type="none" w="med" len="med"/>
+                    </a:lnR>
+                    <a:lnT w="6350" cap="flat" cmpd="sng" algn="ctr">
+                      <a:solidFill>
+                        <a:srgbClr val="E3E3E3"/>
+                      </a:solidFill>
+                      <a:prstDash val="solid"/>
+                      <a:round/>
+                      <a:headEnd type="none" w="med" len="med"/>
+                      <a:tailEnd type="none" w="med" len="med"/>
+                    </a:lnT>
+                    <a:lnB w="6350" cap="flat" cmpd="sng" algn="ctr">
+                      <a:solidFill>
+                        <a:srgbClr val="E3E3E3"/>
+                      </a:solidFill>
+                      <a:prstDash val="solid"/>
+                      <a:round/>
+                      <a:headEnd type="none" w="med" len="med"/>
+                      <a:tailEnd type="none" w="med" len="med"/>
+                    </a:lnB>
+                    <a:solidFill>
+                      <a:srgbClr val="FFFFFF"/>
+                    </a:solidFill>
+                  </a:tcPr>
+                </a:tc>
+                <a:tc>
+                  <a:txBody>
+                    <a:bodyPr/>
+                    <a:lstStyle/>
+                    <a:p>
+                      <a:pPr algn="ctr" indent="0" marL="0">
+                        <a:buNone/>
+                      </a:pPr>
+                      <a:r>
+                        <a:rPr lang="en-US" sz="1300" dirty="0">
+                          <a:solidFill>
+                            <a:srgbClr val="1A1A1A"/>
+                          </a:solidFill>
+                          <a:latin typeface="Arial" pitchFamily="34" charset="0"/>
+                          <a:ea typeface="Arial" pitchFamily="34" charset="-122"/>
+                          <a:cs typeface="Arial" pitchFamily="34" charset="-120"/>
+                        </a:rPr>
+                        <a:t>10.8</a:t>
+                      </a:r>
+                      <a:endParaRPr lang="en-US" sz="1300" dirty="0">
+                        <a:latin typeface="Arial" charset="0"/>
+                        <a:ea typeface="Arial" charset="0"/>
+                        <a:cs typeface="Arial" charset="0"/>
+                      </a:endParaRPr>
+                    </a:p>
+                  </a:txBody>
+                  <a:tcPr marL="91440" marR="91440" marT="45720" marB="45720" anchor="ctr">
+                    <a:lnL w="6350" cap="flat" cmpd="sng" algn="ctr">
+                      <a:solidFill>
+                        <a:srgbClr val="E3E3E3"/>
+                      </a:solidFill>
+                      <a:prstDash val="solid"/>
+                      <a:round/>
+                      <a:headEnd type="none" w="med" len="med"/>
+                      <a:tailEnd type="none" w="med" len="med"/>
+                    </a:lnL>
+                    <a:lnR w="6350" cap="flat" cmpd="sng" algn="ctr">
+                      <a:solidFill>
+                        <a:srgbClr val="E3E3E3"/>
+                      </a:solidFill>
+                      <a:prstDash val="solid"/>
+                      <a:round/>
+                      <a:headEnd type="none" w="med" len="med"/>
+                      <a:tailEnd type="none" w="med" len="med"/>
+                    </a:lnR>
+                    <a:lnT w="6350" cap="flat" cmpd="sng" algn="ctr">
+                      <a:solidFill>
+                        <a:srgbClr val="E3E3E3"/>
+                      </a:solidFill>
+                      <a:prstDash val="solid"/>
+                      <a:round/>
+                      <a:headEnd type="none" w="med" len="med"/>
+                      <a:tailEnd type="none" w="med" len="med"/>
+                    </a:lnT>
+                    <a:lnB w="6350" cap="flat" cmpd="sng" algn="ctr">
+                      <a:solidFill>
+                        <a:srgbClr val="E3E3E3"/>
+                      </a:solidFill>
+                      <a:prstDash val="solid"/>
+                      <a:round/>
+                      <a:headEnd type="none" w="med" len="med"/>
+                      <a:tailEnd type="none" w="med" len="med"/>
+                    </a:lnB>
+                    <a:solidFill>
+                      <a:srgbClr val="FBEAEC"/>
+                    </a:solidFill>
+                  </a:tcPr>
+                </a:tc>
+                <a:tc>
+                  <a:txBody>
+                    <a:bodyPr/>
+                    <a:lstStyle/>
+                    <a:p>
+                      <a:pPr algn="ctr" indent="0" marL="0">
+                        <a:buNone/>
+                      </a:pPr>
+                      <a:r>
+                        <a:rPr lang="en-US" sz="1300" dirty="0">
+                          <a:solidFill>
+                            <a:srgbClr val="1A1A1A"/>
+                          </a:solidFill>
+                          <a:latin typeface="Arial" pitchFamily="34" charset="0"/>
+                          <a:ea typeface="Arial" pitchFamily="34" charset="-122"/>
+                          <a:cs typeface="Arial" pitchFamily="34" charset="-120"/>
+                        </a:rPr>
+                        <a:t>9.9</a:t>
+                      </a:r>
+                      <a:endParaRPr lang="en-US" sz="1300" dirty="0">
+                        <a:latin typeface="Arial" charset="0"/>
+                        <a:ea typeface="Arial" charset="0"/>
+                        <a:cs typeface="Arial" charset="0"/>
+                      </a:endParaRPr>
+                    </a:p>
+                  </a:txBody>
+                  <a:tcPr marL="91440" marR="91440" marT="45720" marB="45720" anchor="ctr">
+                    <a:lnL w="6350" cap="flat" cmpd="sng" algn="ctr">
+                      <a:solidFill>
+                        <a:srgbClr val="E3E3E3"/>
+                      </a:solidFill>
+                      <a:prstDash val="solid"/>
+                      <a:round/>
+                      <a:headEnd type="none" w="med" len="med"/>
+                      <a:tailEnd type="none" w="med" len="med"/>
+                    </a:lnL>
+                    <a:lnR w="6350" cap="flat" cmpd="sng" algn="ctr">
+                      <a:solidFill>
+                        <a:srgbClr val="E3E3E3"/>
+                      </a:solidFill>
+                      <a:prstDash val="solid"/>
+                      <a:round/>
+                      <a:headEnd type="none" w="med" len="med"/>
+                      <a:tailEnd type="none" w="med" len="med"/>
+                    </a:lnR>
+                    <a:lnT w="6350" cap="flat" cmpd="sng" algn="ctr">
+                      <a:solidFill>
+                        <a:srgbClr val="E3E3E3"/>
+                      </a:solidFill>
+                      <a:prstDash val="solid"/>
+                      <a:round/>
+                      <a:headEnd type="none" w="med" len="med"/>
+                      <a:tailEnd type="none" w="med" len="med"/>
+                    </a:lnT>
+                    <a:lnB w="6350" cap="flat" cmpd="sng" algn="ctr">
+                      <a:solidFill>
+                        <a:srgbClr val="E3E3E3"/>
+                      </a:solidFill>
+                      <a:prstDash val="solid"/>
+                      <a:round/>
+                      <a:headEnd type="none" w="med" len="med"/>
+                      <a:tailEnd type="none" w="med" len="med"/>
+                    </a:lnB>
+                    <a:solidFill>
+                      <a:srgbClr val="FBEAEC"/>
+                    </a:solidFill>
+                  </a:tcPr>
+                </a:tc>
+                <a:tc>
+                  <a:txBody>
+                    <a:bodyPr/>
+                    <a:lstStyle/>
+                    <a:p>
+                      <a:pPr algn="ctr" indent="0" marL="0">
+                        <a:buNone/>
+                      </a:pPr>
+                      <a:r>
+                        <a:rPr lang="en-US" sz="1300" dirty="0">
+                          <a:solidFill>
+                            <a:srgbClr val="1A1A1A"/>
+                          </a:solidFill>
+                          <a:latin typeface="Arial" pitchFamily="34" charset="0"/>
+                          <a:ea typeface="Arial" pitchFamily="34" charset="-122"/>
+                          <a:cs typeface="Arial" pitchFamily="34" charset="-120"/>
+                        </a:rPr>
+                        <a:t>9.1</a:t>
+                      </a:r>
+                      <a:endParaRPr lang="en-US" sz="1300" dirty="0">
+                        <a:latin typeface="Arial" charset="0"/>
+                        <a:ea typeface="Arial" charset="0"/>
+                        <a:cs typeface="Arial" charset="0"/>
+                      </a:endParaRPr>
+                    </a:p>
+                  </a:txBody>
+                  <a:tcPr marL="91440" marR="91440" marT="45720" marB="45720" anchor="ctr">
+                    <a:lnL w="6350" cap="flat" cmpd="sng" algn="ctr">
+                      <a:solidFill>
+                        <a:srgbClr val="E3E3E3"/>
+                      </a:solidFill>
+                      <a:prstDash val="solid"/>
+                      <a:round/>
+                      <a:headEnd type="none" w="med" len="med"/>
+                      <a:tailEnd type="none" w="med" len="med"/>
+                    </a:lnL>
+                    <a:lnR w="6350" cap="flat" cmpd="sng" algn="ctr">
+                      <a:solidFill>
+                        <a:srgbClr val="E3E3E3"/>
+                      </a:solidFill>
+                      <a:prstDash val="solid"/>
+                      <a:round/>
+                      <a:headEnd type="none" w="med" len="med"/>
+                      <a:tailEnd type="none" w="med" len="med"/>
+                    </a:lnR>
+                    <a:lnT w="6350" cap="flat" cmpd="sng" algn="ctr">
+                      <a:solidFill>
+                        <a:srgbClr val="E3E3E3"/>
+                      </a:solidFill>
+                      <a:prstDash val="solid"/>
+                      <a:round/>
+                      <a:headEnd type="none" w="med" len="med"/>
+                      <a:tailEnd type="none" w="med" len="med"/>
+                    </a:lnT>
+                    <a:lnB w="6350" cap="flat" cmpd="sng" algn="ctr">
+                      <a:solidFill>
+                        <a:srgbClr val="E3E3E3"/>
+                      </a:solidFill>
+                      <a:prstDash val="solid"/>
+                      <a:round/>
+                      <a:headEnd type="none" w="med" len="med"/>
+                      <a:tailEnd type="none" w="med" len="med"/>
+                    </a:lnB>
+                    <a:solidFill>
+                      <a:srgbClr val="FBEAEC"/>
+                    </a:solidFill>
+                  </a:tcPr>
+                </a:tc>
+                <a:tc>
+                  <a:txBody>
+                    <a:bodyPr/>
+                    <a:lstStyle/>
+                    <a:p>
+                      <a:pPr algn="ctr" indent="0" marL="0">
+                        <a:buNone/>
+                      </a:pPr>
+                      <a:r>
+                        <a:rPr lang="en-US" sz="1300" dirty="0">
+                          <a:solidFill>
+                            <a:srgbClr val="1A1A1A"/>
+                          </a:solidFill>
+                          <a:latin typeface="Arial" pitchFamily="34" charset="0"/>
+                          <a:ea typeface="Arial" pitchFamily="34" charset="-122"/>
+                          <a:cs typeface="Arial" pitchFamily="34" charset="-120"/>
+                        </a:rPr>
+                        <a:t>8.4</a:t>
+                      </a:r>
+                      <a:endParaRPr lang="en-US" sz="1300" dirty="0">
+                        <a:latin typeface="Arial" charset="0"/>
+                        <a:ea typeface="Arial" charset="0"/>
+                        <a:cs typeface="Arial" charset="0"/>
+                      </a:endParaRPr>
+                    </a:p>
+                  </a:txBody>
+                  <a:tcPr marL="91440" marR="91440" marT="45720" marB="45720" anchor="ctr">
+                    <a:lnL w="6350" cap="flat" cmpd="sng" algn="ctr">
+                      <a:solidFill>
+                        <a:srgbClr val="E3E3E3"/>
+                      </a:solidFill>
+                      <a:prstDash val="solid"/>
+                      <a:round/>
+                      <a:headEnd type="none" w="med" len="med"/>
+                      <a:tailEnd type="none" w="med" len="med"/>
+                    </a:lnL>
+                    <a:lnR w="6350" cap="flat" cmpd="sng" algn="ctr">
+                      <a:solidFill>
+                        <a:srgbClr val="E3E3E3"/>
+                      </a:solidFill>
+                      <a:prstDash val="solid"/>
+                      <a:round/>
+                      <a:headEnd type="none" w="med" len="med"/>
+                      <a:tailEnd type="none" w="med" len="med"/>
+                    </a:lnR>
+                    <a:lnT w="6350" cap="flat" cmpd="sng" algn="ctr">
+                      <a:solidFill>
+                        <a:srgbClr val="E3E3E3"/>
+                      </a:solidFill>
+                      <a:prstDash val="solid"/>
+                      <a:round/>
+                      <a:headEnd type="none" w="med" len="med"/>
+                      <a:tailEnd type="none" w="med" len="med"/>
+                    </a:lnT>
+                    <a:lnB w="6350" cap="flat" cmpd="sng" algn="ctr">
+                      <a:solidFill>
+                        <a:srgbClr val="E3E3E3"/>
+                      </a:solidFill>
+                      <a:prstDash val="solid"/>
+                      <a:round/>
+                      <a:headEnd type="none" w="med" len="med"/>
+                      <a:tailEnd type="none" w="med" len="med"/>
+                    </a:lnB>
+                    <a:solidFill>
+                      <a:srgbClr val="FFF4D6"/>
+                    </a:solidFill>
+                  </a:tcPr>
+                </a:tc>
+                <a:tc>
+                  <a:txBody>
+                    <a:bodyPr/>
+                    <a:lstStyle/>
+                    <a:p>
+                      <a:pPr algn="ctr" indent="0" marL="0">
+                        <a:buNone/>
+                      </a:pPr>
+                      <a:r>
+                        <a:rPr lang="en-US" sz="1300" dirty="0">
+                          <a:solidFill>
+                            <a:srgbClr val="1A1A1A"/>
+                          </a:solidFill>
+                          <a:latin typeface="Arial" pitchFamily="34" charset="0"/>
+                          <a:ea typeface="Arial" pitchFamily="34" charset="-122"/>
+                          <a:cs typeface="Arial" pitchFamily="34" charset="-120"/>
+                        </a:rPr>
+                        <a:t>7.8</a:t>
+                      </a:r>
+                      <a:endParaRPr lang="en-US" sz="1300" dirty="0">
+                        <a:latin typeface="Arial" charset="0"/>
+                        <a:ea typeface="Arial" charset="0"/>
+                        <a:cs typeface="Arial" charset="0"/>
+                      </a:endParaRPr>
+                    </a:p>
+                  </a:txBody>
+                  <a:tcPr marL="91440" marR="91440" marT="45720" marB="45720" anchor="ctr">
+                    <a:lnL w="6350" cap="flat" cmpd="sng" algn="ctr">
+                      <a:solidFill>
+                        <a:srgbClr val="E3E3E3"/>
+                      </a:solidFill>
+                      <a:prstDash val="solid"/>
+                      <a:round/>
+                      <a:headEnd type="none" w="med" len="med"/>
+                      <a:tailEnd type="none" w="med" len="med"/>
+                    </a:lnL>
+                    <a:lnR w="6350" cap="flat" cmpd="sng" algn="ctr">
+                      <a:solidFill>
+                        <a:srgbClr val="E3E3E3"/>
+                      </a:solidFill>
+                      <a:prstDash val="solid"/>
+                      <a:round/>
+                      <a:headEnd type="none" w="med" len="med"/>
+                      <a:tailEnd type="none" w="med" len="med"/>
+                    </a:lnR>
+                    <a:lnT w="6350" cap="flat" cmpd="sng" algn="ctr">
+                      <a:solidFill>
+                        <a:srgbClr val="E3E3E3"/>
+                      </a:solidFill>
+                      <a:prstDash val="solid"/>
+                      <a:round/>
+                      <a:headEnd type="none" w="med" len="med"/>
+                      <a:tailEnd type="none" w="med" len="med"/>
+                    </a:lnT>
+                    <a:lnB w="6350" cap="flat" cmpd="sng" algn="ctr">
+                      <a:solidFill>
+                        <a:srgbClr val="E3E3E3"/>
+                      </a:solidFill>
+                      <a:prstDash val="solid"/>
+                      <a:round/>
+                      <a:headEnd type="none" w="med" len="med"/>
+                      <a:tailEnd type="none" w="med" len="med"/>
+                    </a:lnB>
+                    <a:solidFill>
+                      <a:srgbClr val="FFF4D6"/>
+                    </a:solidFill>
+                  </a:tcPr>
+                </a:tc>
+              </a:tr>
+              <a:tr h="475488">
+                <a:tc>
+                  <a:txBody>
+                    <a:bodyPr/>
+                    <a:lstStyle/>
+                    <a:p>
+                      <a:pPr algn="ctr" indent="0" marL="0">
+                        <a:buNone/>
+                      </a:pPr>
+                      <a:r>
+                        <a:rPr lang="en-US" sz="1300" b="1" dirty="0">
+                          <a:solidFill>
+                            <a:srgbClr val="1A1A1A"/>
+                          </a:solidFill>
+                          <a:latin typeface="Arial" pitchFamily="34" charset="0"/>
+                          <a:ea typeface="Arial" pitchFamily="34" charset="-122"/>
+                          <a:cs typeface="Arial" pitchFamily="34" charset="-120"/>
+                        </a:rPr>
+                        <a:t>₹13</a:t>
+                      </a:r>
+                      <a:endParaRPr lang="en-US" sz="1300" dirty="0">
+                        <a:latin typeface="Arial" charset="0"/>
+                        <a:ea typeface="Arial" charset="0"/>
+                        <a:cs typeface="Arial" charset="0"/>
+                      </a:endParaRPr>
+                    </a:p>
+                  </a:txBody>
+                  <a:tcPr marL="91440" marR="91440" marT="45720" marB="45720" anchor="ctr">
+                    <a:lnL w="6350" cap="flat" cmpd="sng" algn="ctr">
+                      <a:solidFill>
+                        <a:srgbClr val="E3E3E3"/>
+                      </a:solidFill>
+                      <a:prstDash val="solid"/>
+                      <a:round/>
+                      <a:headEnd type="none" w="med" len="med"/>
+                      <a:tailEnd type="none" w="med" len="med"/>
+                    </a:lnL>
+                    <a:lnR w="6350" cap="flat" cmpd="sng" algn="ctr">
+                      <a:solidFill>
+                        <a:srgbClr val="E3E3E3"/>
+                      </a:solidFill>
+                      <a:prstDash val="solid"/>
+                      <a:round/>
+                      <a:headEnd type="none" w="med" len="med"/>
+                      <a:tailEnd type="none" w="med" len="med"/>
+                    </a:lnR>
+                    <a:lnT w="6350" cap="flat" cmpd="sng" algn="ctr">
+                      <a:solidFill>
+                        <a:srgbClr val="E3E3E3"/>
+                      </a:solidFill>
+                      <a:prstDash val="solid"/>
+                      <a:round/>
+                      <a:headEnd type="none" w="med" len="med"/>
+                      <a:tailEnd type="none" w="med" len="med"/>
+                    </a:lnT>
+                    <a:lnB w="6350" cap="flat" cmpd="sng" algn="ctr">
+                      <a:solidFill>
+                        <a:srgbClr val="E3E3E3"/>
+                      </a:solidFill>
+                      <a:prstDash val="solid"/>
+                      <a:round/>
+                      <a:headEnd type="none" w="med" len="med"/>
+                      <a:tailEnd type="none" w="med" len="med"/>
+                    </a:lnB>
+                    <a:solidFill>
+                      <a:srgbClr val="FFFFFF"/>
+                    </a:solidFill>
+                  </a:tcPr>
+                </a:tc>
+                <a:tc>
+                  <a:txBody>
+                    <a:bodyPr/>
+                    <a:lstStyle/>
+                    <a:p>
+                      <a:pPr algn="ctr" indent="0" marL="0">
+                        <a:buNone/>
+                      </a:pPr>
+                      <a:r>
+                        <a:rPr lang="en-US" sz="1300" dirty="0">
+                          <a:solidFill>
+                            <a:srgbClr val="1A1A1A"/>
+                          </a:solidFill>
+                          <a:latin typeface="Arial" pitchFamily="34" charset="0"/>
+                          <a:ea typeface="Arial" pitchFamily="34" charset="-122"/>
+                          <a:cs typeface="Arial" pitchFamily="34" charset="-120"/>
+                        </a:rPr>
+                        <a:t>9.9</a:t>
+                      </a:r>
+                      <a:endParaRPr lang="en-US" sz="1300" dirty="0">
+                        <a:latin typeface="Arial" charset="0"/>
+                        <a:ea typeface="Arial" charset="0"/>
+                        <a:cs typeface="Arial" charset="0"/>
+                      </a:endParaRPr>
+                    </a:p>
+                  </a:txBody>
+                  <a:tcPr marL="91440" marR="91440" marT="45720" marB="45720" anchor="ctr">
+                    <a:lnL w="6350" cap="flat" cmpd="sng" algn="ctr">
+                      <a:solidFill>
+                        <a:srgbClr val="E3E3E3"/>
+                      </a:solidFill>
+                      <a:prstDash val="solid"/>
+                      <a:round/>
+                      <a:headEnd type="none" w="med" len="med"/>
+                      <a:tailEnd type="none" w="med" len="med"/>
+                    </a:lnL>
+                    <a:lnR w="6350" cap="flat" cmpd="sng" algn="ctr">
+                      <a:solidFill>
+                        <a:srgbClr val="E3E3E3"/>
+                      </a:solidFill>
+                      <a:prstDash val="solid"/>
+                      <a:round/>
+                      <a:headEnd type="none" w="med" len="med"/>
+                      <a:tailEnd type="none" w="med" len="med"/>
+                    </a:lnR>
+                    <a:lnT w="6350" cap="flat" cmpd="sng" algn="ctr">
+                      <a:solidFill>
+                        <a:srgbClr val="E3E3E3"/>
+                      </a:solidFill>
+                      <a:prstDash val="solid"/>
+                      <a:round/>
+                      <a:headEnd type="none" w="med" len="med"/>
+                      <a:tailEnd type="none" w="med" len="med"/>
+                    </a:lnT>
+                    <a:lnB w="6350" cap="flat" cmpd="sng" algn="ctr">
+                      <a:solidFill>
+                        <a:srgbClr val="E3E3E3"/>
+                      </a:solidFill>
+                      <a:prstDash val="solid"/>
+                      <a:round/>
+                      <a:headEnd type="none" w="med" len="med"/>
+                      <a:tailEnd type="none" w="med" len="med"/>
+                    </a:lnB>
+                    <a:solidFill>
+                      <a:srgbClr val="FBEAEC"/>
+                    </a:solidFill>
+                  </a:tcPr>
+                </a:tc>
+                <a:tc>
+                  <a:txBody>
+                    <a:bodyPr/>
+                    <a:lstStyle/>
+                    <a:p>
+                      <a:pPr algn="ctr" indent="0" marL="0">
+                        <a:buNone/>
+                      </a:pPr>
+                      <a:r>
+                        <a:rPr lang="en-US" sz="1300" dirty="0">
+                          <a:solidFill>
+                            <a:srgbClr val="1A1A1A"/>
+                          </a:solidFill>
+                          <a:latin typeface="Arial" pitchFamily="34" charset="0"/>
+                          <a:ea typeface="Arial" pitchFamily="34" charset="-122"/>
+                          <a:cs typeface="Arial" pitchFamily="34" charset="-120"/>
+                        </a:rPr>
+                        <a:t>9.0</a:t>
+                      </a:r>
+                      <a:endParaRPr lang="en-US" sz="1300" dirty="0">
+                        <a:latin typeface="Arial" charset="0"/>
+                        <a:ea typeface="Arial" charset="0"/>
+                        <a:cs typeface="Arial" charset="0"/>
+                      </a:endParaRPr>
+                    </a:p>
+                  </a:txBody>
+                  <a:tcPr marL="91440" marR="91440" marT="45720" marB="45720" anchor="ctr">
+                    <a:lnL w="6350" cap="flat" cmpd="sng" algn="ctr">
+                      <a:solidFill>
+                        <a:srgbClr val="E3E3E3"/>
+                      </a:solidFill>
+                      <a:prstDash val="solid"/>
+                      <a:round/>
+                      <a:headEnd type="none" w="med" len="med"/>
+                      <a:tailEnd type="none" w="med" len="med"/>
+                    </a:lnL>
+                    <a:lnR w="6350" cap="flat" cmpd="sng" algn="ctr">
+                      <a:solidFill>
+                        <a:srgbClr val="E3E3E3"/>
+                      </a:solidFill>
+                      <a:prstDash val="solid"/>
+                      <a:round/>
+                      <a:headEnd type="none" w="med" len="med"/>
+                      <a:tailEnd type="none" w="med" len="med"/>
+                    </a:lnR>
+                    <a:lnT w="6350" cap="flat" cmpd="sng" algn="ctr">
+                      <a:solidFill>
+                        <a:srgbClr val="E3E3E3"/>
+                      </a:solidFill>
+                      <a:prstDash val="solid"/>
+                      <a:round/>
+                      <a:headEnd type="none" w="med" len="med"/>
+                      <a:tailEnd type="none" w="med" len="med"/>
+                    </a:lnT>
+                    <a:lnB w="6350" cap="flat" cmpd="sng" algn="ctr">
+                      <a:solidFill>
+                        <a:srgbClr val="E3E3E3"/>
+                      </a:solidFill>
+                      <a:prstDash val="solid"/>
+                      <a:round/>
+                      <a:headEnd type="none" w="med" len="med"/>
+                      <a:tailEnd type="none" w="med" len="med"/>
+                    </a:lnB>
+                    <a:solidFill>
+                      <a:srgbClr val="FBEAEC"/>
+                    </a:solidFill>
+                  </a:tcPr>
+                </a:tc>
+                <a:tc>
+                  <a:txBody>
+                    <a:bodyPr/>
+                    <a:lstStyle/>
+                    <a:p>
+                      <a:pPr algn="ctr" indent="0" marL="0">
+                        <a:buNone/>
+                      </a:pPr>
+                      <a:r>
+                        <a:rPr lang="en-US" sz="1300" dirty="0">
+                          <a:solidFill>
+                            <a:srgbClr val="1A1A1A"/>
+                          </a:solidFill>
+                          <a:latin typeface="Arial" pitchFamily="34" charset="0"/>
+                          <a:ea typeface="Arial" pitchFamily="34" charset="-122"/>
+                          <a:cs typeface="Arial" pitchFamily="34" charset="-120"/>
+                        </a:rPr>
+                        <a:t>8.3</a:t>
+                      </a:r>
+                      <a:endParaRPr lang="en-US" sz="1300" dirty="0">
+                        <a:latin typeface="Arial" charset="0"/>
+                        <a:ea typeface="Arial" charset="0"/>
+                        <a:cs typeface="Arial" charset="0"/>
+                      </a:endParaRPr>
+                    </a:p>
+                  </a:txBody>
+                  <a:tcPr marL="91440" marR="91440" marT="45720" marB="45720" anchor="ctr">
+                    <a:lnL w="6350" cap="flat" cmpd="sng" algn="ctr">
+                      <a:solidFill>
+                        <a:srgbClr val="E3E3E3"/>
+                      </a:solidFill>
+                      <a:prstDash val="solid"/>
+                      <a:round/>
+                      <a:headEnd type="none" w="med" len="med"/>
+                      <a:tailEnd type="none" w="med" len="med"/>
+                    </a:lnL>
+                    <a:lnR w="6350" cap="flat" cmpd="sng" algn="ctr">
+                      <a:solidFill>
+                        <a:srgbClr val="E3E3E3"/>
+                      </a:solidFill>
+                      <a:prstDash val="solid"/>
+                      <a:round/>
+                      <a:headEnd type="none" w="med" len="med"/>
+                      <a:tailEnd type="none" w="med" len="med"/>
+                    </a:lnR>
+                    <a:lnT w="6350" cap="flat" cmpd="sng" algn="ctr">
+                      <a:solidFill>
+                        <a:srgbClr val="E3E3E3"/>
+                      </a:solidFill>
+                      <a:prstDash val="solid"/>
+                      <a:round/>
+                      <a:headEnd type="none" w="med" len="med"/>
+                      <a:tailEnd type="none" w="med" len="med"/>
+                    </a:lnT>
+                    <a:lnB w="6350" cap="flat" cmpd="sng" algn="ctr">
+                      <a:solidFill>
+                        <a:srgbClr val="E3E3E3"/>
+                      </a:solidFill>
+                      <a:prstDash val="solid"/>
+                      <a:round/>
+                      <a:headEnd type="none" w="med" len="med"/>
+                      <a:tailEnd type="none" w="med" len="med"/>
+                    </a:lnB>
+                    <a:solidFill>
+                      <a:srgbClr val="FFF4D6"/>
                     </a:solidFill>
                   </a:tcPr>
                 </a:tc>
@@ -8536,1850 +10380,6 @@
                     </a:solidFill>
                   </a:tcPr>
                 </a:tc>
-                <a:tc>
-                  <a:txBody>
-                    <a:bodyPr/>
-                    <a:lstStyle/>
-                    <a:p>
-                      <a:pPr algn="ctr" indent="0" marL="0">
-                        <a:buNone/>
-                      </a:pPr>
-                      <a:r>
-                        <a:rPr lang="en-US" sz="1300" dirty="0">
-                          <a:solidFill>
-                            <a:srgbClr val="1A1A1A"/>
-                          </a:solidFill>
-                          <a:latin typeface="Arial" pitchFamily="34" charset="0"/>
-                          <a:ea typeface="Arial" pitchFamily="34" charset="-122"/>
-                          <a:cs typeface="Arial" pitchFamily="34" charset="-120"/>
-                        </a:rPr>
-                        <a:t>6.5</a:t>
-                      </a:r>
-                      <a:endParaRPr lang="en-US" sz="1300" dirty="0">
-                        <a:latin typeface="Arial" charset="0"/>
-                        <a:ea typeface="Arial" charset="0"/>
-                        <a:cs typeface="Arial" charset="0"/>
-                      </a:endParaRPr>
-                    </a:p>
-                  </a:txBody>
-                  <a:tcPr marL="91440" marR="91440" marT="45720" marB="45720" anchor="ctr">
-                    <a:lnL w="6350" cap="flat" cmpd="sng" algn="ctr">
-                      <a:solidFill>
-                        <a:srgbClr val="E3E3E3"/>
-                      </a:solidFill>
-                      <a:prstDash val="solid"/>
-                      <a:round/>
-                      <a:headEnd type="none" w="med" len="med"/>
-                      <a:tailEnd type="none" w="med" len="med"/>
-                    </a:lnL>
-                    <a:lnR w="6350" cap="flat" cmpd="sng" algn="ctr">
-                      <a:solidFill>
-                        <a:srgbClr val="E3E3E3"/>
-                      </a:solidFill>
-                      <a:prstDash val="solid"/>
-                      <a:round/>
-                      <a:headEnd type="none" w="med" len="med"/>
-                      <a:tailEnd type="none" w="med" len="med"/>
-                    </a:lnR>
-                    <a:lnT w="6350" cap="flat" cmpd="sng" algn="ctr">
-                      <a:solidFill>
-                        <a:srgbClr val="E3E3E3"/>
-                      </a:solidFill>
-                      <a:prstDash val="solid"/>
-                      <a:round/>
-                      <a:headEnd type="none" w="med" len="med"/>
-                      <a:tailEnd type="none" w="med" len="med"/>
-                    </a:lnT>
-                    <a:lnB w="6350" cap="flat" cmpd="sng" algn="ctr">
-                      <a:solidFill>
-                        <a:srgbClr val="E3E3E3"/>
-                      </a:solidFill>
-                      <a:prstDash val="solid"/>
-                      <a:round/>
-                      <a:headEnd type="none" w="med" len="med"/>
-                      <a:tailEnd type="none" w="med" len="med"/>
-                    </a:lnB>
-                    <a:solidFill>
-                      <a:srgbClr val="FFF4D6"/>
-                    </a:solidFill>
-                  </a:tcPr>
-                </a:tc>
-                <a:tc>
-                  <a:txBody>
-                    <a:bodyPr/>
-                    <a:lstStyle/>
-                    <a:p>
-                      <a:pPr algn="ctr" indent="0" marL="0">
-                        <a:buNone/>
-                      </a:pPr>
-                      <a:r>
-                        <a:rPr lang="en-US" sz="1300" dirty="0">
-                          <a:solidFill>
-                            <a:srgbClr val="1A1A1A"/>
-                          </a:solidFill>
-                          <a:latin typeface="Arial" pitchFamily="34" charset="0"/>
-                          <a:ea typeface="Arial" pitchFamily="34" charset="-122"/>
-                          <a:cs typeface="Arial" pitchFamily="34" charset="-120"/>
-                        </a:rPr>
-                        <a:t>6.0</a:t>
-                      </a:r>
-                      <a:endParaRPr lang="en-US" sz="1300" dirty="0">
-                        <a:latin typeface="Arial" charset="0"/>
-                        <a:ea typeface="Arial" charset="0"/>
-                        <a:cs typeface="Arial" charset="0"/>
-                      </a:endParaRPr>
-                    </a:p>
-                  </a:txBody>
-                  <a:tcPr marL="91440" marR="91440" marT="45720" marB="45720" anchor="ctr">
-                    <a:lnL w="6350" cap="flat" cmpd="sng" algn="ctr">
-                      <a:solidFill>
-                        <a:srgbClr val="E3E3E3"/>
-                      </a:solidFill>
-                      <a:prstDash val="solid"/>
-                      <a:round/>
-                      <a:headEnd type="none" w="med" len="med"/>
-                      <a:tailEnd type="none" w="med" len="med"/>
-                    </a:lnL>
-                    <a:lnR w="6350" cap="flat" cmpd="sng" algn="ctr">
-                      <a:solidFill>
-                        <a:srgbClr val="E3E3E3"/>
-                      </a:solidFill>
-                      <a:prstDash val="solid"/>
-                      <a:round/>
-                      <a:headEnd type="none" w="med" len="med"/>
-                      <a:tailEnd type="none" w="med" len="med"/>
-                    </a:lnR>
-                    <a:lnT w="6350" cap="flat" cmpd="sng" algn="ctr">
-                      <a:solidFill>
-                        <a:srgbClr val="E3E3E3"/>
-                      </a:solidFill>
-                      <a:prstDash val="solid"/>
-                      <a:round/>
-                      <a:headEnd type="none" w="med" len="med"/>
-                      <a:tailEnd type="none" w="med" len="med"/>
-                    </a:lnT>
-                    <a:lnB w="6350" cap="flat" cmpd="sng" algn="ctr">
-                      <a:solidFill>
-                        <a:srgbClr val="E3E3E3"/>
-                      </a:solidFill>
-                      <a:prstDash val="solid"/>
-                      <a:round/>
-                      <a:headEnd type="none" w="med" len="med"/>
-                      <a:tailEnd type="none" w="med" len="med"/>
-                    </a:lnB>
-                    <a:solidFill>
-                      <a:srgbClr val="FFF4D6"/>
-                    </a:solidFill>
-                  </a:tcPr>
-                </a:tc>
-                <a:tc>
-                  <a:txBody>
-                    <a:bodyPr/>
-                    <a:lstStyle/>
-                    <a:p>
-                      <a:pPr algn="ctr" indent="0" marL="0">
-                        <a:buNone/>
-                      </a:pPr>
-                      <a:r>
-                        <a:rPr lang="en-US" sz="1300" dirty="0">
-                          <a:solidFill>
-                            <a:srgbClr val="1A1A1A"/>
-                          </a:solidFill>
-                          <a:latin typeface="Arial" pitchFamily="34" charset="0"/>
-                          <a:ea typeface="Arial" pitchFamily="34" charset="-122"/>
-                          <a:cs typeface="Arial" pitchFamily="34" charset="-120"/>
-                        </a:rPr>
-                        <a:t>5.6</a:t>
-                      </a:r>
-                      <a:endParaRPr lang="en-US" sz="1300" dirty="0">
-                        <a:latin typeface="Arial" charset="0"/>
-                        <a:ea typeface="Arial" charset="0"/>
-                        <a:cs typeface="Arial" charset="0"/>
-                      </a:endParaRPr>
-                    </a:p>
-                  </a:txBody>
-                  <a:tcPr marL="91440" marR="91440" marT="45720" marB="45720" anchor="ctr">
-                    <a:lnL w="6350" cap="flat" cmpd="sng" algn="ctr">
-                      <a:solidFill>
-                        <a:srgbClr val="E3E3E3"/>
-                      </a:solidFill>
-                      <a:prstDash val="solid"/>
-                      <a:round/>
-                      <a:headEnd type="none" w="med" len="med"/>
-                      <a:tailEnd type="none" w="med" len="med"/>
-                    </a:lnL>
-                    <a:lnR w="6350" cap="flat" cmpd="sng" algn="ctr">
-                      <a:solidFill>
-                        <a:srgbClr val="E3E3E3"/>
-                      </a:solidFill>
-                      <a:prstDash val="solid"/>
-                      <a:round/>
-                      <a:headEnd type="none" w="med" len="med"/>
-                      <a:tailEnd type="none" w="med" len="med"/>
-                    </a:lnR>
-                    <a:lnT w="6350" cap="flat" cmpd="sng" algn="ctr">
-                      <a:solidFill>
-                        <a:srgbClr val="E3E3E3"/>
-                      </a:solidFill>
-                      <a:prstDash val="solid"/>
-                      <a:round/>
-                      <a:headEnd type="none" w="med" len="med"/>
-                      <a:tailEnd type="none" w="med" len="med"/>
-                    </a:lnT>
-                    <a:lnB w="6350" cap="flat" cmpd="sng" algn="ctr">
-                      <a:solidFill>
-                        <a:srgbClr val="E3E3E3"/>
-                      </a:solidFill>
-                      <a:prstDash val="solid"/>
-                      <a:round/>
-                      <a:headEnd type="none" w="med" len="med"/>
-                      <a:tailEnd type="none" w="med" len="med"/>
-                    </a:lnB>
-                    <a:solidFill>
-                      <a:srgbClr val="E3F1E6"/>
-                    </a:solidFill>
-                  </a:tcPr>
-                </a:tc>
-              </a:tr>
-              <a:tr h="475488">
-                <a:tc>
-                  <a:txBody>
-                    <a:bodyPr/>
-                    <a:lstStyle/>
-                    <a:p>
-                      <a:pPr algn="ctr" indent="0" marL="0">
-                        <a:buNone/>
-                      </a:pPr>
-                      <a:r>
-                        <a:rPr lang="en-US" sz="1300" b="1" dirty="0">
-                          <a:solidFill>
-                            <a:srgbClr val="1A1A1A"/>
-                          </a:solidFill>
-                          <a:latin typeface="Arial" pitchFamily="34" charset="0"/>
-                          <a:ea typeface="Arial" pitchFamily="34" charset="-122"/>
-                          <a:cs typeface="Arial" pitchFamily="34" charset="-120"/>
-                        </a:rPr>
-                        <a:t>₹10</a:t>
-                      </a:r>
-                      <a:endParaRPr lang="en-US" sz="1300" dirty="0">
-                        <a:latin typeface="Arial" charset="0"/>
-                        <a:ea typeface="Arial" charset="0"/>
-                        <a:cs typeface="Arial" charset="0"/>
-                      </a:endParaRPr>
-                    </a:p>
-                  </a:txBody>
-                  <a:tcPr marL="91440" marR="91440" marT="45720" marB="45720" anchor="ctr">
-                    <a:lnL w="6350" cap="flat" cmpd="sng" algn="ctr">
-                      <a:solidFill>
-                        <a:srgbClr val="E3E3E3"/>
-                      </a:solidFill>
-                      <a:prstDash val="solid"/>
-                      <a:round/>
-                      <a:headEnd type="none" w="med" len="med"/>
-                      <a:tailEnd type="none" w="med" len="med"/>
-                    </a:lnL>
-                    <a:lnR w="6350" cap="flat" cmpd="sng" algn="ctr">
-                      <a:solidFill>
-                        <a:srgbClr val="E3E3E3"/>
-                      </a:solidFill>
-                      <a:prstDash val="solid"/>
-                      <a:round/>
-                      <a:headEnd type="none" w="med" len="med"/>
-                      <a:tailEnd type="none" w="med" len="med"/>
-                    </a:lnR>
-                    <a:lnT w="6350" cap="flat" cmpd="sng" algn="ctr">
-                      <a:solidFill>
-                        <a:srgbClr val="E3E3E3"/>
-                      </a:solidFill>
-                      <a:prstDash val="solid"/>
-                      <a:round/>
-                      <a:headEnd type="none" w="med" len="med"/>
-                      <a:tailEnd type="none" w="med" len="med"/>
-                    </a:lnT>
-                    <a:lnB w="6350" cap="flat" cmpd="sng" algn="ctr">
-                      <a:solidFill>
-                        <a:srgbClr val="E3E3E3"/>
-                      </a:solidFill>
-                      <a:prstDash val="solid"/>
-                      <a:round/>
-                      <a:headEnd type="none" w="med" len="med"/>
-                      <a:tailEnd type="none" w="med" len="med"/>
-                    </a:lnB>
-                    <a:solidFill>
-                      <a:srgbClr val="FFFFFF"/>
-                    </a:solidFill>
-                  </a:tcPr>
-                </a:tc>
-                <a:tc>
-                  <a:txBody>
-                    <a:bodyPr/>
-                    <a:lstStyle/>
-                    <a:p>
-                      <a:pPr algn="ctr" indent="0" marL="0">
-                        <a:buNone/>
-                      </a:pPr>
-                      <a:r>
-                        <a:rPr lang="en-US" sz="1300" dirty="0">
-                          <a:solidFill>
-                            <a:srgbClr val="1A1A1A"/>
-                          </a:solidFill>
-                          <a:latin typeface="Arial" pitchFamily="34" charset="0"/>
-                          <a:ea typeface="Arial" pitchFamily="34" charset="-122"/>
-                          <a:cs typeface="Arial" pitchFamily="34" charset="-120"/>
-                        </a:rPr>
-                        <a:t>6.9</a:t>
-                      </a:r>
-                      <a:endParaRPr lang="en-US" sz="1300" dirty="0">
-                        <a:latin typeface="Arial" charset="0"/>
-                        <a:ea typeface="Arial" charset="0"/>
-                        <a:cs typeface="Arial" charset="0"/>
-                      </a:endParaRPr>
-                    </a:p>
-                  </a:txBody>
-                  <a:tcPr marL="91440" marR="91440" marT="45720" marB="45720" anchor="ctr">
-                    <a:lnL w="6350" cap="flat" cmpd="sng" algn="ctr">
-                      <a:solidFill>
-                        <a:srgbClr val="E3E3E3"/>
-                      </a:solidFill>
-                      <a:prstDash val="solid"/>
-                      <a:round/>
-                      <a:headEnd type="none" w="med" len="med"/>
-                      <a:tailEnd type="none" w="med" len="med"/>
-                    </a:lnL>
-                    <a:lnR w="6350" cap="flat" cmpd="sng" algn="ctr">
-                      <a:solidFill>
-                        <a:srgbClr val="E3E3E3"/>
-                      </a:solidFill>
-                      <a:prstDash val="solid"/>
-                      <a:round/>
-                      <a:headEnd type="none" w="med" len="med"/>
-                      <a:tailEnd type="none" w="med" len="med"/>
-                    </a:lnR>
-                    <a:lnT w="6350" cap="flat" cmpd="sng" algn="ctr">
-                      <a:solidFill>
-                        <a:srgbClr val="E3E3E3"/>
-                      </a:solidFill>
-                      <a:prstDash val="solid"/>
-                      <a:round/>
-                      <a:headEnd type="none" w="med" len="med"/>
-                      <a:tailEnd type="none" w="med" len="med"/>
-                    </a:lnT>
-                    <a:lnB w="6350" cap="flat" cmpd="sng" algn="ctr">
-                      <a:solidFill>
-                        <a:srgbClr val="E3E3E3"/>
-                      </a:solidFill>
-                      <a:prstDash val="solid"/>
-                      <a:round/>
-                      <a:headEnd type="none" w="med" len="med"/>
-                      <a:tailEnd type="none" w="med" len="med"/>
-                    </a:lnB>
-                    <a:solidFill>
-                      <a:srgbClr val="FFF4D6"/>
-                    </a:solidFill>
-                  </a:tcPr>
-                </a:tc>
-                <a:tc>
-                  <a:txBody>
-                    <a:bodyPr/>
-                    <a:lstStyle/>
-                    <a:p>
-                      <a:pPr algn="ctr" indent="0" marL="0">
-                        <a:buNone/>
-                      </a:pPr>
-                      <a:r>
-                        <a:rPr lang="en-US" sz="1300" dirty="0">
-                          <a:solidFill>
-                            <a:srgbClr val="1A1A1A"/>
-                          </a:solidFill>
-                          <a:latin typeface="Arial" pitchFamily="34" charset="0"/>
-                          <a:ea typeface="Arial" pitchFamily="34" charset="-122"/>
-                          <a:cs typeface="Arial" pitchFamily="34" charset="-120"/>
-                        </a:rPr>
-                        <a:t>6.3</a:t>
-                      </a:r>
-                      <a:endParaRPr lang="en-US" sz="1300" dirty="0">
-                        <a:latin typeface="Arial" charset="0"/>
-                        <a:ea typeface="Arial" charset="0"/>
-                        <a:cs typeface="Arial" charset="0"/>
-                      </a:endParaRPr>
-                    </a:p>
-                  </a:txBody>
-                  <a:tcPr marL="91440" marR="91440" marT="45720" marB="45720" anchor="ctr">
-                    <a:lnL w="6350" cap="flat" cmpd="sng" algn="ctr">
-                      <a:solidFill>
-                        <a:srgbClr val="E3E3E3"/>
-                      </a:solidFill>
-                      <a:prstDash val="solid"/>
-                      <a:round/>
-                      <a:headEnd type="none" w="med" len="med"/>
-                      <a:tailEnd type="none" w="med" len="med"/>
-                    </a:lnL>
-                    <a:lnR w="6350" cap="flat" cmpd="sng" algn="ctr">
-                      <a:solidFill>
-                        <a:srgbClr val="E3E3E3"/>
-                      </a:solidFill>
-                      <a:prstDash val="solid"/>
-                      <a:round/>
-                      <a:headEnd type="none" w="med" len="med"/>
-                      <a:tailEnd type="none" w="med" len="med"/>
-                    </a:lnR>
-                    <a:lnT w="6350" cap="flat" cmpd="sng" algn="ctr">
-                      <a:solidFill>
-                        <a:srgbClr val="E3E3E3"/>
-                      </a:solidFill>
-                      <a:prstDash val="solid"/>
-                      <a:round/>
-                      <a:headEnd type="none" w="med" len="med"/>
-                      <a:tailEnd type="none" w="med" len="med"/>
-                    </a:lnT>
-                    <a:lnB w="6350" cap="flat" cmpd="sng" algn="ctr">
-                      <a:solidFill>
-                        <a:srgbClr val="E3E3E3"/>
-                      </a:solidFill>
-                      <a:prstDash val="solid"/>
-                      <a:round/>
-                      <a:headEnd type="none" w="med" len="med"/>
-                      <a:tailEnd type="none" w="med" len="med"/>
-                    </a:lnB>
-                    <a:solidFill>
-                      <a:srgbClr val="FFF4D6"/>
-                    </a:solidFill>
-                  </a:tcPr>
-                </a:tc>
-                <a:tc>
-                  <a:txBody>
-                    <a:bodyPr/>
-                    <a:lstStyle/>
-                    <a:p>
-                      <a:pPr algn="ctr" indent="0" marL="0">
-                        <a:buNone/>
-                      </a:pPr>
-                      <a:r>
-                        <a:rPr lang="en-US" sz="1300" dirty="0">
-                          <a:solidFill>
-                            <a:srgbClr val="1A1A1A"/>
-                          </a:solidFill>
-                          <a:latin typeface="Arial" pitchFamily="34" charset="0"/>
-                          <a:ea typeface="Arial" pitchFamily="34" charset="-122"/>
-                          <a:cs typeface="Arial" pitchFamily="34" charset="-120"/>
-                        </a:rPr>
-                        <a:t>5.8</a:t>
-                      </a:r>
-                      <a:endParaRPr lang="en-US" sz="1300" dirty="0">
-                        <a:latin typeface="Arial" charset="0"/>
-                        <a:ea typeface="Arial" charset="0"/>
-                        <a:cs typeface="Arial" charset="0"/>
-                      </a:endParaRPr>
-                    </a:p>
-                  </a:txBody>
-                  <a:tcPr marL="91440" marR="91440" marT="45720" marB="45720" anchor="ctr">
-                    <a:lnL w="6350" cap="flat" cmpd="sng" algn="ctr">
-                      <a:solidFill>
-                        <a:srgbClr val="E3E3E3"/>
-                      </a:solidFill>
-                      <a:prstDash val="solid"/>
-                      <a:round/>
-                      <a:headEnd type="none" w="med" len="med"/>
-                      <a:tailEnd type="none" w="med" len="med"/>
-                    </a:lnL>
-                    <a:lnR w="6350" cap="flat" cmpd="sng" algn="ctr">
-                      <a:solidFill>
-                        <a:srgbClr val="E3E3E3"/>
-                      </a:solidFill>
-                      <a:prstDash val="solid"/>
-                      <a:round/>
-                      <a:headEnd type="none" w="med" len="med"/>
-                      <a:tailEnd type="none" w="med" len="med"/>
-                    </a:lnR>
-                    <a:lnT w="6350" cap="flat" cmpd="sng" algn="ctr">
-                      <a:solidFill>
-                        <a:srgbClr val="E3E3E3"/>
-                      </a:solidFill>
-                      <a:prstDash val="solid"/>
-                      <a:round/>
-                      <a:headEnd type="none" w="med" len="med"/>
-                      <a:tailEnd type="none" w="med" len="med"/>
-                    </a:lnT>
-                    <a:lnB w="6350" cap="flat" cmpd="sng" algn="ctr">
-                      <a:solidFill>
-                        <a:srgbClr val="E3E3E3"/>
-                      </a:solidFill>
-                      <a:prstDash val="solid"/>
-                      <a:round/>
-                      <a:headEnd type="none" w="med" len="med"/>
-                      <a:tailEnd type="none" w="med" len="med"/>
-                    </a:lnB>
-                    <a:solidFill>
-                      <a:srgbClr val="E3F1E6"/>
-                    </a:solidFill>
-                  </a:tcPr>
-                </a:tc>
-                <a:tc>
-                  <a:txBody>
-                    <a:bodyPr/>
-                    <a:lstStyle/>
-                    <a:p>
-                      <a:pPr algn="ctr" indent="0" marL="0">
-                        <a:buNone/>
-                      </a:pPr>
-                      <a:r>
-                        <a:rPr lang="en-US" sz="1300" dirty="0">
-                          <a:solidFill>
-                            <a:srgbClr val="1A1A1A"/>
-                          </a:solidFill>
-                          <a:latin typeface="Arial" pitchFamily="34" charset="0"/>
-                          <a:ea typeface="Arial" pitchFamily="34" charset="-122"/>
-                          <a:cs typeface="Arial" pitchFamily="34" charset="-120"/>
-                        </a:rPr>
-                        <a:t>5.4</a:t>
-                      </a:r>
-                      <a:endParaRPr lang="en-US" sz="1300" dirty="0">
-                        <a:latin typeface="Arial" charset="0"/>
-                        <a:ea typeface="Arial" charset="0"/>
-                        <a:cs typeface="Arial" charset="0"/>
-                      </a:endParaRPr>
-                    </a:p>
-                  </a:txBody>
-                  <a:tcPr marL="91440" marR="91440" marT="45720" marB="45720" anchor="ctr">
-                    <a:lnL w="6350" cap="flat" cmpd="sng" algn="ctr">
-                      <a:solidFill>
-                        <a:srgbClr val="E3E3E3"/>
-                      </a:solidFill>
-                      <a:prstDash val="solid"/>
-                      <a:round/>
-                      <a:headEnd type="none" w="med" len="med"/>
-                      <a:tailEnd type="none" w="med" len="med"/>
-                    </a:lnL>
-                    <a:lnR w="6350" cap="flat" cmpd="sng" algn="ctr">
-                      <a:solidFill>
-                        <a:srgbClr val="E3E3E3"/>
-                      </a:solidFill>
-                      <a:prstDash val="solid"/>
-                      <a:round/>
-                      <a:headEnd type="none" w="med" len="med"/>
-                      <a:tailEnd type="none" w="med" len="med"/>
-                    </a:lnR>
-                    <a:lnT w="6350" cap="flat" cmpd="sng" algn="ctr">
-                      <a:solidFill>
-                        <a:srgbClr val="E3E3E3"/>
-                      </a:solidFill>
-                      <a:prstDash val="solid"/>
-                      <a:round/>
-                      <a:headEnd type="none" w="med" len="med"/>
-                      <a:tailEnd type="none" w="med" len="med"/>
-                    </a:lnT>
-                    <a:lnB w="6350" cap="flat" cmpd="sng" algn="ctr">
-                      <a:solidFill>
-                        <a:srgbClr val="E3E3E3"/>
-                      </a:solidFill>
-                      <a:prstDash val="solid"/>
-                      <a:round/>
-                      <a:headEnd type="none" w="med" len="med"/>
-                      <a:tailEnd type="none" w="med" len="med"/>
-                    </a:lnB>
-                    <a:solidFill>
-                      <a:srgbClr val="E3F1E6"/>
-                    </a:solidFill>
-                  </a:tcPr>
-                </a:tc>
-                <a:tc>
-                  <a:txBody>
-                    <a:bodyPr/>
-                    <a:lstStyle/>
-                    <a:p>
-                      <a:pPr algn="ctr" indent="0" marL="0">
-                        <a:buNone/>
-                      </a:pPr>
-                      <a:r>
-                        <a:rPr lang="en-US" sz="1300" dirty="0">
-                          <a:solidFill>
-                            <a:srgbClr val="1A1A1A"/>
-                          </a:solidFill>
-                          <a:latin typeface="Arial" pitchFamily="34" charset="0"/>
-                          <a:ea typeface="Arial" pitchFamily="34" charset="-122"/>
-                          <a:cs typeface="Arial" pitchFamily="34" charset="-120"/>
-                        </a:rPr>
-                        <a:t>5.0</a:t>
-                      </a:r>
-                      <a:endParaRPr lang="en-US" sz="1300" dirty="0">
-                        <a:latin typeface="Arial" charset="0"/>
-                        <a:ea typeface="Arial" charset="0"/>
-                        <a:cs typeface="Arial" charset="0"/>
-                      </a:endParaRPr>
-                    </a:p>
-                  </a:txBody>
-                  <a:tcPr marL="91440" marR="91440" marT="45720" marB="45720" anchor="ctr">
-                    <a:lnL w="6350" cap="flat" cmpd="sng" algn="ctr">
-                      <a:solidFill>
-                        <a:srgbClr val="E3E3E3"/>
-                      </a:solidFill>
-                      <a:prstDash val="solid"/>
-                      <a:round/>
-                      <a:headEnd type="none" w="med" len="med"/>
-                      <a:tailEnd type="none" w="med" len="med"/>
-                    </a:lnL>
-                    <a:lnR w="6350" cap="flat" cmpd="sng" algn="ctr">
-                      <a:solidFill>
-                        <a:srgbClr val="E3E3E3"/>
-                      </a:solidFill>
-                      <a:prstDash val="solid"/>
-                      <a:round/>
-                      <a:headEnd type="none" w="med" len="med"/>
-                      <a:tailEnd type="none" w="med" len="med"/>
-                    </a:lnR>
-                    <a:lnT w="6350" cap="flat" cmpd="sng" algn="ctr">
-                      <a:solidFill>
-                        <a:srgbClr val="E3E3E3"/>
-                      </a:solidFill>
-                      <a:prstDash val="solid"/>
-                      <a:round/>
-                      <a:headEnd type="none" w="med" len="med"/>
-                      <a:tailEnd type="none" w="med" len="med"/>
-                    </a:lnT>
-                    <a:lnB w="6350" cap="flat" cmpd="sng" algn="ctr">
-                      <a:solidFill>
-                        <a:srgbClr val="E3E3E3"/>
-                      </a:solidFill>
-                      <a:prstDash val="solid"/>
-                      <a:round/>
-                      <a:headEnd type="none" w="med" len="med"/>
-                      <a:tailEnd type="none" w="med" len="med"/>
-                    </a:lnB>
-                    <a:solidFill>
-                      <a:srgbClr val="E3F1E6"/>
-                    </a:solidFill>
-                  </a:tcPr>
-                </a:tc>
-              </a:tr>
-              <a:tr h="475488">
-                <a:tc>
-                  <a:txBody>
-                    <a:bodyPr/>
-                    <a:lstStyle/>
-                    <a:p>
-                      <a:pPr algn="ctr" indent="0" marL="0">
-                        <a:buNone/>
-                      </a:pPr>
-                      <a:r>
-                        <a:rPr lang="en-US" sz="1300" b="1" dirty="0">
-                          <a:solidFill>
-                            <a:srgbClr val="1A1A1A"/>
-                          </a:solidFill>
-                          <a:latin typeface="Arial" pitchFamily="34" charset="0"/>
-                          <a:ea typeface="Arial" pitchFamily="34" charset="-122"/>
-                          <a:cs typeface="Arial" pitchFamily="34" charset="-120"/>
-                        </a:rPr>
-                        <a:t>₹11</a:t>
-                      </a:r>
-                      <a:endParaRPr lang="en-US" sz="1300" dirty="0">
-                        <a:latin typeface="Arial" charset="0"/>
-                        <a:ea typeface="Arial" charset="0"/>
-                        <a:cs typeface="Arial" charset="0"/>
-                      </a:endParaRPr>
-                    </a:p>
-                  </a:txBody>
-                  <a:tcPr marL="91440" marR="91440" marT="45720" marB="45720" anchor="ctr">
-                    <a:lnL w="6350" cap="flat" cmpd="sng" algn="ctr">
-                      <a:solidFill>
-                        <a:srgbClr val="E3E3E3"/>
-                      </a:solidFill>
-                      <a:prstDash val="solid"/>
-                      <a:round/>
-                      <a:headEnd type="none" w="med" len="med"/>
-                      <a:tailEnd type="none" w="med" len="med"/>
-                    </a:lnL>
-                    <a:lnR w="6350" cap="flat" cmpd="sng" algn="ctr">
-                      <a:solidFill>
-                        <a:srgbClr val="E3E3E3"/>
-                      </a:solidFill>
-                      <a:prstDash val="solid"/>
-                      <a:round/>
-                      <a:headEnd type="none" w="med" len="med"/>
-                      <a:tailEnd type="none" w="med" len="med"/>
-                    </a:lnR>
-                    <a:lnT w="6350" cap="flat" cmpd="sng" algn="ctr">
-                      <a:solidFill>
-                        <a:srgbClr val="E3E3E3"/>
-                      </a:solidFill>
-                      <a:prstDash val="solid"/>
-                      <a:round/>
-                      <a:headEnd type="none" w="med" len="med"/>
-                      <a:tailEnd type="none" w="med" len="med"/>
-                    </a:lnT>
-                    <a:lnB w="6350" cap="flat" cmpd="sng" algn="ctr">
-                      <a:solidFill>
-                        <a:srgbClr val="E3E3E3"/>
-                      </a:solidFill>
-                      <a:prstDash val="solid"/>
-                      <a:round/>
-                      <a:headEnd type="none" w="med" len="med"/>
-                      <a:tailEnd type="none" w="med" len="med"/>
-                    </a:lnB>
-                    <a:solidFill>
-                      <a:srgbClr val="FFFFFF"/>
-                    </a:solidFill>
-                  </a:tcPr>
-                </a:tc>
-                <a:tc>
-                  <a:txBody>
-                    <a:bodyPr/>
-                    <a:lstStyle/>
-                    <a:p>
-                      <a:pPr algn="ctr" indent="0" marL="0">
-                        <a:buNone/>
-                      </a:pPr>
-                      <a:r>
-                        <a:rPr lang="en-US" sz="1300" dirty="0">
-                          <a:solidFill>
-                            <a:srgbClr val="1A1A1A"/>
-                          </a:solidFill>
-                          <a:latin typeface="Arial" pitchFamily="34" charset="0"/>
-                          <a:ea typeface="Arial" pitchFamily="34" charset="-122"/>
-                          <a:cs typeface="Arial" pitchFamily="34" charset="-120"/>
-                        </a:rPr>
-                        <a:t>6.2</a:t>
-                      </a:r>
-                      <a:endParaRPr lang="en-US" sz="1300" dirty="0">
-                        <a:latin typeface="Arial" charset="0"/>
-                        <a:ea typeface="Arial" charset="0"/>
-                        <a:cs typeface="Arial" charset="0"/>
-                      </a:endParaRPr>
-                    </a:p>
-                  </a:txBody>
-                  <a:tcPr marL="91440" marR="91440" marT="45720" marB="45720" anchor="ctr">
-                    <a:lnL w="6350" cap="flat" cmpd="sng" algn="ctr">
-                      <a:solidFill>
-                        <a:srgbClr val="E3E3E3"/>
-                      </a:solidFill>
-                      <a:prstDash val="solid"/>
-                      <a:round/>
-                      <a:headEnd type="none" w="med" len="med"/>
-                      <a:tailEnd type="none" w="med" len="med"/>
-                    </a:lnL>
-                    <a:lnR w="6350" cap="flat" cmpd="sng" algn="ctr">
-                      <a:solidFill>
-                        <a:srgbClr val="E3E3E3"/>
-                      </a:solidFill>
-                      <a:prstDash val="solid"/>
-                      <a:round/>
-                      <a:headEnd type="none" w="med" len="med"/>
-                      <a:tailEnd type="none" w="med" len="med"/>
-                    </a:lnR>
-                    <a:lnT w="6350" cap="flat" cmpd="sng" algn="ctr">
-                      <a:solidFill>
-                        <a:srgbClr val="E3E3E3"/>
-                      </a:solidFill>
-                      <a:prstDash val="solid"/>
-                      <a:round/>
-                      <a:headEnd type="none" w="med" len="med"/>
-                      <a:tailEnd type="none" w="med" len="med"/>
-                    </a:lnT>
-                    <a:lnB w="6350" cap="flat" cmpd="sng" algn="ctr">
-                      <a:solidFill>
-                        <a:srgbClr val="E3E3E3"/>
-                      </a:solidFill>
-                      <a:prstDash val="solid"/>
-                      <a:round/>
-                      <a:headEnd type="none" w="med" len="med"/>
-                      <a:tailEnd type="none" w="med" len="med"/>
-                    </a:lnB>
-                    <a:solidFill>
-                      <a:srgbClr val="FFF4D6"/>
-                    </a:solidFill>
-                  </a:tcPr>
-                </a:tc>
-                <a:tc>
-                  <a:txBody>
-                    <a:bodyPr/>
-                    <a:lstStyle/>
-                    <a:p>
-                      <a:pPr algn="ctr" indent="0" marL="0">
-                        <a:buNone/>
-                      </a:pPr>
-                      <a:r>
-                        <a:rPr lang="en-US" sz="1300" dirty="0">
-                          <a:solidFill>
-                            <a:srgbClr val="1A1A1A"/>
-                          </a:solidFill>
-                          <a:latin typeface="Arial" pitchFamily="34" charset="0"/>
-                          <a:ea typeface="Arial" pitchFamily="34" charset="-122"/>
-                          <a:cs typeface="Arial" pitchFamily="34" charset="-120"/>
-                        </a:rPr>
-                        <a:t>5.6</a:t>
-                      </a:r>
-                      <a:endParaRPr lang="en-US" sz="1300" dirty="0">
-                        <a:latin typeface="Arial" charset="0"/>
-                        <a:ea typeface="Arial" charset="0"/>
-                        <a:cs typeface="Arial" charset="0"/>
-                      </a:endParaRPr>
-                    </a:p>
-                  </a:txBody>
-                  <a:tcPr marL="91440" marR="91440" marT="45720" marB="45720" anchor="ctr">
-                    <a:lnL w="6350" cap="flat" cmpd="sng" algn="ctr">
-                      <a:solidFill>
-                        <a:srgbClr val="E3E3E3"/>
-                      </a:solidFill>
-                      <a:prstDash val="solid"/>
-                      <a:round/>
-                      <a:headEnd type="none" w="med" len="med"/>
-                      <a:tailEnd type="none" w="med" len="med"/>
-                    </a:lnL>
-                    <a:lnR w="6350" cap="flat" cmpd="sng" algn="ctr">
-                      <a:solidFill>
-                        <a:srgbClr val="E3E3E3"/>
-                      </a:solidFill>
-                      <a:prstDash val="solid"/>
-                      <a:round/>
-                      <a:headEnd type="none" w="med" len="med"/>
-                      <a:tailEnd type="none" w="med" len="med"/>
-                    </a:lnR>
-                    <a:lnT w="6350" cap="flat" cmpd="sng" algn="ctr">
-                      <a:solidFill>
-                        <a:srgbClr val="E3E3E3"/>
-                      </a:solidFill>
-                      <a:prstDash val="solid"/>
-                      <a:round/>
-                      <a:headEnd type="none" w="med" len="med"/>
-                      <a:tailEnd type="none" w="med" len="med"/>
-                    </a:lnT>
-                    <a:lnB w="6350" cap="flat" cmpd="sng" algn="ctr">
-                      <a:solidFill>
-                        <a:srgbClr val="E3E3E3"/>
-                      </a:solidFill>
-                      <a:prstDash val="solid"/>
-                      <a:round/>
-                      <a:headEnd type="none" w="med" len="med"/>
-                      <a:tailEnd type="none" w="med" len="med"/>
-                    </a:lnB>
-                    <a:solidFill>
-                      <a:srgbClr val="E3F1E6"/>
-                    </a:solidFill>
-                  </a:tcPr>
-                </a:tc>
-                <a:tc>
-                  <a:txBody>
-                    <a:bodyPr/>
-                    <a:lstStyle/>
-                    <a:p>
-                      <a:pPr algn="ctr" indent="0" marL="0">
-                        <a:buNone/>
-                      </a:pPr>
-                      <a:r>
-                        <a:rPr lang="en-US" sz="1300" dirty="0">
-                          <a:solidFill>
-                            <a:srgbClr val="1A1A1A"/>
-                          </a:solidFill>
-                          <a:latin typeface="Arial" pitchFamily="34" charset="0"/>
-                          <a:ea typeface="Arial" pitchFamily="34" charset="-122"/>
-                          <a:cs typeface="Arial" pitchFamily="34" charset="-120"/>
-                        </a:rPr>
-                        <a:t>5.2</a:t>
-                      </a:r>
-                      <a:endParaRPr lang="en-US" sz="1300" dirty="0">
-                        <a:latin typeface="Arial" charset="0"/>
-                        <a:ea typeface="Arial" charset="0"/>
-                        <a:cs typeface="Arial" charset="0"/>
-                      </a:endParaRPr>
-                    </a:p>
-                  </a:txBody>
-                  <a:tcPr marL="91440" marR="91440" marT="45720" marB="45720" anchor="ctr">
-                    <a:lnL w="6350" cap="flat" cmpd="sng" algn="ctr">
-                      <a:solidFill>
-                        <a:srgbClr val="E3E3E3"/>
-                      </a:solidFill>
-                      <a:prstDash val="solid"/>
-                      <a:round/>
-                      <a:headEnd type="none" w="med" len="med"/>
-                      <a:tailEnd type="none" w="med" len="med"/>
-                    </a:lnL>
-                    <a:lnR w="6350" cap="flat" cmpd="sng" algn="ctr">
-                      <a:solidFill>
-                        <a:srgbClr val="E3E3E3"/>
-                      </a:solidFill>
-                      <a:prstDash val="solid"/>
-                      <a:round/>
-                      <a:headEnd type="none" w="med" len="med"/>
-                      <a:tailEnd type="none" w="med" len="med"/>
-                    </a:lnR>
-                    <a:lnT w="6350" cap="flat" cmpd="sng" algn="ctr">
-                      <a:solidFill>
-                        <a:srgbClr val="E3E3E3"/>
-                      </a:solidFill>
-                      <a:prstDash val="solid"/>
-                      <a:round/>
-                      <a:headEnd type="none" w="med" len="med"/>
-                      <a:tailEnd type="none" w="med" len="med"/>
-                    </a:lnT>
-                    <a:lnB w="6350" cap="flat" cmpd="sng" algn="ctr">
-                      <a:solidFill>
-                        <a:srgbClr val="E3E3E3"/>
-                      </a:solidFill>
-                      <a:prstDash val="solid"/>
-                      <a:round/>
-                      <a:headEnd type="none" w="med" len="med"/>
-                      <a:tailEnd type="none" w="med" len="med"/>
-                    </a:lnB>
-                    <a:solidFill>
-                      <a:srgbClr val="E3F1E6"/>
-                    </a:solidFill>
-                  </a:tcPr>
-                </a:tc>
-                <a:tc>
-                  <a:txBody>
-                    <a:bodyPr/>
-                    <a:lstStyle/>
-                    <a:p>
-                      <a:pPr algn="ctr" indent="0" marL="0">
-                        <a:buNone/>
-                      </a:pPr>
-                      <a:r>
-                        <a:rPr lang="en-US" sz="1300" dirty="0">
-                          <a:solidFill>
-                            <a:srgbClr val="1A1A1A"/>
-                          </a:solidFill>
-                          <a:latin typeface="Arial" pitchFamily="34" charset="0"/>
-                          <a:ea typeface="Arial" pitchFamily="34" charset="-122"/>
-                          <a:cs typeface="Arial" pitchFamily="34" charset="-120"/>
-                        </a:rPr>
-                        <a:t>4.8</a:t>
-                      </a:r>
-                      <a:endParaRPr lang="en-US" sz="1300" dirty="0">
-                        <a:latin typeface="Arial" charset="0"/>
-                        <a:ea typeface="Arial" charset="0"/>
-                        <a:cs typeface="Arial" charset="0"/>
-                      </a:endParaRPr>
-                    </a:p>
-                  </a:txBody>
-                  <a:tcPr marL="91440" marR="91440" marT="45720" marB="45720" anchor="ctr">
-                    <a:lnL w="6350" cap="flat" cmpd="sng" algn="ctr">
-                      <a:solidFill>
-                        <a:srgbClr val="E3E3E3"/>
-                      </a:solidFill>
-                      <a:prstDash val="solid"/>
-                      <a:round/>
-                      <a:headEnd type="none" w="med" len="med"/>
-                      <a:tailEnd type="none" w="med" len="med"/>
-                    </a:lnL>
-                    <a:lnR w="6350" cap="flat" cmpd="sng" algn="ctr">
-                      <a:solidFill>
-                        <a:srgbClr val="E3E3E3"/>
-                      </a:solidFill>
-                      <a:prstDash val="solid"/>
-                      <a:round/>
-                      <a:headEnd type="none" w="med" len="med"/>
-                      <a:tailEnd type="none" w="med" len="med"/>
-                    </a:lnR>
-                    <a:lnT w="6350" cap="flat" cmpd="sng" algn="ctr">
-                      <a:solidFill>
-                        <a:srgbClr val="E3E3E3"/>
-                      </a:solidFill>
-                      <a:prstDash val="solid"/>
-                      <a:round/>
-                      <a:headEnd type="none" w="med" len="med"/>
-                      <a:tailEnd type="none" w="med" len="med"/>
-                    </a:lnT>
-                    <a:lnB w="6350" cap="flat" cmpd="sng" algn="ctr">
-                      <a:solidFill>
-                        <a:srgbClr val="E3E3E3"/>
-                      </a:solidFill>
-                      <a:prstDash val="solid"/>
-                      <a:round/>
-                      <a:headEnd type="none" w="med" len="med"/>
-                      <a:tailEnd type="none" w="med" len="med"/>
-                    </a:lnB>
-                    <a:solidFill>
-                      <a:srgbClr val="E3F1E6"/>
-                    </a:solidFill>
-                  </a:tcPr>
-                </a:tc>
-                <a:tc>
-                  <a:txBody>
-                    <a:bodyPr/>
-                    <a:lstStyle/>
-                    <a:p>
-                      <a:pPr algn="ctr" indent="0" marL="0">
-                        <a:buNone/>
-                      </a:pPr>
-                      <a:r>
-                        <a:rPr lang="en-US" sz="1300" dirty="0">
-                          <a:solidFill>
-                            <a:srgbClr val="1A1A1A"/>
-                          </a:solidFill>
-                          <a:latin typeface="Arial" pitchFamily="34" charset="0"/>
-                          <a:ea typeface="Arial" pitchFamily="34" charset="-122"/>
-                          <a:cs typeface="Arial" pitchFamily="34" charset="-120"/>
-                        </a:rPr>
-                        <a:t>4.5</a:t>
-                      </a:r>
-                      <a:endParaRPr lang="en-US" sz="1300" dirty="0">
-                        <a:latin typeface="Arial" charset="0"/>
-                        <a:ea typeface="Arial" charset="0"/>
-                        <a:cs typeface="Arial" charset="0"/>
-                      </a:endParaRPr>
-                    </a:p>
-                  </a:txBody>
-                  <a:tcPr marL="91440" marR="91440" marT="45720" marB="45720" anchor="ctr">
-                    <a:lnL w="6350" cap="flat" cmpd="sng" algn="ctr">
-                      <a:solidFill>
-                        <a:srgbClr val="E3E3E3"/>
-                      </a:solidFill>
-                      <a:prstDash val="solid"/>
-                      <a:round/>
-                      <a:headEnd type="none" w="med" len="med"/>
-                      <a:tailEnd type="none" w="med" len="med"/>
-                    </a:lnL>
-                    <a:lnR w="6350" cap="flat" cmpd="sng" algn="ctr">
-                      <a:solidFill>
-                        <a:srgbClr val="E3E3E3"/>
-                      </a:solidFill>
-                      <a:prstDash val="solid"/>
-                      <a:round/>
-                      <a:headEnd type="none" w="med" len="med"/>
-                      <a:tailEnd type="none" w="med" len="med"/>
-                    </a:lnR>
-                    <a:lnT w="6350" cap="flat" cmpd="sng" algn="ctr">
-                      <a:solidFill>
-                        <a:srgbClr val="E3E3E3"/>
-                      </a:solidFill>
-                      <a:prstDash val="solid"/>
-                      <a:round/>
-                      <a:headEnd type="none" w="med" len="med"/>
-                      <a:tailEnd type="none" w="med" len="med"/>
-                    </a:lnT>
-                    <a:lnB w="6350" cap="flat" cmpd="sng" algn="ctr">
-                      <a:solidFill>
-                        <a:srgbClr val="E3E3E3"/>
-                      </a:solidFill>
-                      <a:prstDash val="solid"/>
-                      <a:round/>
-                      <a:headEnd type="none" w="med" len="med"/>
-                      <a:tailEnd type="none" w="med" len="med"/>
-                    </a:lnB>
-                    <a:solidFill>
-                      <a:srgbClr val="E3F1E6"/>
-                    </a:solidFill>
-                  </a:tcPr>
-                </a:tc>
-              </a:tr>
-              <a:tr h="475488">
-                <a:tc>
-                  <a:txBody>
-                    <a:bodyPr/>
-                    <a:lstStyle/>
-                    <a:p>
-                      <a:pPr algn="ctr" indent="0" marL="0">
-                        <a:buNone/>
-                      </a:pPr>
-                      <a:r>
-                        <a:rPr lang="en-US" sz="1300" b="1" dirty="0">
-                          <a:solidFill>
-                            <a:srgbClr val="1A1A1A"/>
-                          </a:solidFill>
-                          <a:latin typeface="Arial" pitchFamily="34" charset="0"/>
-                          <a:ea typeface="Arial" pitchFamily="34" charset="-122"/>
-                          <a:cs typeface="Arial" pitchFamily="34" charset="-120"/>
-                        </a:rPr>
-                        <a:t>₹12</a:t>
-                      </a:r>
-                      <a:endParaRPr lang="en-US" sz="1300" dirty="0">
-                        <a:latin typeface="Arial" charset="0"/>
-                        <a:ea typeface="Arial" charset="0"/>
-                        <a:cs typeface="Arial" charset="0"/>
-                      </a:endParaRPr>
-                    </a:p>
-                  </a:txBody>
-                  <a:tcPr marL="91440" marR="91440" marT="45720" marB="45720" anchor="ctr">
-                    <a:lnL w="6350" cap="flat" cmpd="sng" algn="ctr">
-                      <a:solidFill>
-                        <a:srgbClr val="E3E3E3"/>
-                      </a:solidFill>
-                      <a:prstDash val="solid"/>
-                      <a:round/>
-                      <a:headEnd type="none" w="med" len="med"/>
-                      <a:tailEnd type="none" w="med" len="med"/>
-                    </a:lnL>
-                    <a:lnR w="6350" cap="flat" cmpd="sng" algn="ctr">
-                      <a:solidFill>
-                        <a:srgbClr val="E3E3E3"/>
-                      </a:solidFill>
-                      <a:prstDash val="solid"/>
-                      <a:round/>
-                      <a:headEnd type="none" w="med" len="med"/>
-                      <a:tailEnd type="none" w="med" len="med"/>
-                    </a:lnR>
-                    <a:lnT w="6350" cap="flat" cmpd="sng" algn="ctr">
-                      <a:solidFill>
-                        <a:srgbClr val="E3E3E3"/>
-                      </a:solidFill>
-                      <a:prstDash val="solid"/>
-                      <a:round/>
-                      <a:headEnd type="none" w="med" len="med"/>
-                      <a:tailEnd type="none" w="med" len="med"/>
-                    </a:lnT>
-                    <a:lnB w="6350" cap="flat" cmpd="sng" algn="ctr">
-                      <a:solidFill>
-                        <a:srgbClr val="E3E3E3"/>
-                      </a:solidFill>
-                      <a:prstDash val="solid"/>
-                      <a:round/>
-                      <a:headEnd type="none" w="med" len="med"/>
-                      <a:tailEnd type="none" w="med" len="med"/>
-                    </a:lnB>
-                    <a:solidFill>
-                      <a:srgbClr val="FFFFFF"/>
-                    </a:solidFill>
-                  </a:tcPr>
-                </a:tc>
-                <a:tc>
-                  <a:txBody>
-                    <a:bodyPr/>
-                    <a:lstStyle/>
-                    <a:p>
-                      <a:pPr algn="ctr" indent="0" marL="0">
-                        <a:buNone/>
-                      </a:pPr>
-                      <a:r>
-                        <a:rPr lang="en-US" sz="1300" dirty="0">
-                          <a:solidFill>
-                            <a:srgbClr val="1A1A1A"/>
-                          </a:solidFill>
-                          <a:latin typeface="Arial" pitchFamily="34" charset="0"/>
-                          <a:ea typeface="Arial" pitchFamily="34" charset="-122"/>
-                          <a:cs typeface="Arial" pitchFamily="34" charset="-120"/>
-                        </a:rPr>
-                        <a:t>5.6</a:t>
-                      </a:r>
-                      <a:endParaRPr lang="en-US" sz="1300" dirty="0">
-                        <a:latin typeface="Arial" charset="0"/>
-                        <a:ea typeface="Arial" charset="0"/>
-                        <a:cs typeface="Arial" charset="0"/>
-                      </a:endParaRPr>
-                    </a:p>
-                  </a:txBody>
-                  <a:tcPr marL="91440" marR="91440" marT="45720" marB="45720" anchor="ctr">
-                    <a:lnL w="6350" cap="flat" cmpd="sng" algn="ctr">
-                      <a:solidFill>
-                        <a:srgbClr val="E3E3E3"/>
-                      </a:solidFill>
-                      <a:prstDash val="solid"/>
-                      <a:round/>
-                      <a:headEnd type="none" w="med" len="med"/>
-                      <a:tailEnd type="none" w="med" len="med"/>
-                    </a:lnL>
-                    <a:lnR w="6350" cap="flat" cmpd="sng" algn="ctr">
-                      <a:solidFill>
-                        <a:srgbClr val="E3E3E3"/>
-                      </a:solidFill>
-                      <a:prstDash val="solid"/>
-                      <a:round/>
-                      <a:headEnd type="none" w="med" len="med"/>
-                      <a:tailEnd type="none" w="med" len="med"/>
-                    </a:lnR>
-                    <a:lnT w="6350" cap="flat" cmpd="sng" algn="ctr">
-                      <a:solidFill>
-                        <a:srgbClr val="E3E3E3"/>
-                      </a:solidFill>
-                      <a:prstDash val="solid"/>
-                      <a:round/>
-                      <a:headEnd type="none" w="med" len="med"/>
-                      <a:tailEnd type="none" w="med" len="med"/>
-                    </a:lnT>
-                    <a:lnB w="6350" cap="flat" cmpd="sng" algn="ctr">
-                      <a:solidFill>
-                        <a:srgbClr val="E3E3E3"/>
-                      </a:solidFill>
-                      <a:prstDash val="solid"/>
-                      <a:round/>
-                      <a:headEnd type="none" w="med" len="med"/>
-                      <a:tailEnd type="none" w="med" len="med"/>
-                    </a:lnB>
-                    <a:solidFill>
-                      <a:srgbClr val="E3F1E6"/>
-                    </a:solidFill>
-                  </a:tcPr>
-                </a:tc>
-                <a:tc>
-                  <a:txBody>
-                    <a:bodyPr/>
-                    <a:lstStyle/>
-                    <a:p>
-                      <a:pPr algn="ctr" indent="0" marL="0">
-                        <a:buNone/>
-                      </a:pPr>
-                      <a:r>
-                        <a:rPr lang="en-US" sz="1300" dirty="0">
-                          <a:solidFill>
-                            <a:srgbClr val="1A1A1A"/>
-                          </a:solidFill>
-                          <a:latin typeface="Arial" pitchFamily="34" charset="0"/>
-                          <a:ea typeface="Arial" pitchFamily="34" charset="-122"/>
-                          <a:cs typeface="Arial" pitchFamily="34" charset="-120"/>
-                        </a:rPr>
-                        <a:t>5.1</a:t>
-                      </a:r>
-                      <a:endParaRPr lang="en-US" sz="1300" dirty="0">
-                        <a:latin typeface="Arial" charset="0"/>
-                        <a:ea typeface="Arial" charset="0"/>
-                        <a:cs typeface="Arial" charset="0"/>
-                      </a:endParaRPr>
-                    </a:p>
-                  </a:txBody>
-                  <a:tcPr marL="91440" marR="91440" marT="45720" marB="45720" anchor="ctr">
-                    <a:lnL w="6350" cap="flat" cmpd="sng" algn="ctr">
-                      <a:solidFill>
-                        <a:srgbClr val="E3E3E3"/>
-                      </a:solidFill>
-                      <a:prstDash val="solid"/>
-                      <a:round/>
-                      <a:headEnd type="none" w="med" len="med"/>
-                      <a:tailEnd type="none" w="med" len="med"/>
-                    </a:lnL>
-                    <a:lnR w="6350" cap="flat" cmpd="sng" algn="ctr">
-                      <a:solidFill>
-                        <a:srgbClr val="E3E3E3"/>
-                      </a:solidFill>
-                      <a:prstDash val="solid"/>
-                      <a:round/>
-                      <a:headEnd type="none" w="med" len="med"/>
-                      <a:tailEnd type="none" w="med" len="med"/>
-                    </a:lnR>
-                    <a:lnT w="6350" cap="flat" cmpd="sng" algn="ctr">
-                      <a:solidFill>
-                        <a:srgbClr val="E3E3E3"/>
-                      </a:solidFill>
-                      <a:prstDash val="solid"/>
-                      <a:round/>
-                      <a:headEnd type="none" w="med" len="med"/>
-                      <a:tailEnd type="none" w="med" len="med"/>
-                    </a:lnT>
-                    <a:lnB w="6350" cap="flat" cmpd="sng" algn="ctr">
-                      <a:solidFill>
-                        <a:srgbClr val="E3E3E3"/>
-                      </a:solidFill>
-                      <a:prstDash val="solid"/>
-                      <a:round/>
-                      <a:headEnd type="none" w="med" len="med"/>
-                      <a:tailEnd type="none" w="med" len="med"/>
-                    </a:lnB>
-                    <a:solidFill>
-                      <a:srgbClr val="E3F1E6"/>
-                    </a:solidFill>
-                  </a:tcPr>
-                </a:tc>
-                <a:tc>
-                  <a:txBody>
-                    <a:bodyPr/>
-                    <a:lstStyle/>
-                    <a:p>
-                      <a:pPr algn="ctr" indent="0" marL="0">
-                        <a:buNone/>
-                      </a:pPr>
-                      <a:r>
-                        <a:rPr lang="en-US" sz="1300" dirty="0">
-                          <a:solidFill>
-                            <a:srgbClr val="1A1A1A"/>
-                          </a:solidFill>
-                          <a:latin typeface="Arial" pitchFamily="34" charset="0"/>
-                          <a:ea typeface="Arial" pitchFamily="34" charset="-122"/>
-                          <a:cs typeface="Arial" pitchFamily="34" charset="-120"/>
-                        </a:rPr>
-                        <a:t>4.7</a:t>
-                      </a:r>
-                      <a:endParaRPr lang="en-US" sz="1300" dirty="0">
-                        <a:latin typeface="Arial" charset="0"/>
-                        <a:ea typeface="Arial" charset="0"/>
-                        <a:cs typeface="Arial" charset="0"/>
-                      </a:endParaRPr>
-                    </a:p>
-                  </a:txBody>
-                  <a:tcPr marL="91440" marR="91440" marT="45720" marB="45720" anchor="ctr">
-                    <a:lnL w="6350" cap="flat" cmpd="sng" algn="ctr">
-                      <a:solidFill>
-                        <a:srgbClr val="E3E3E3"/>
-                      </a:solidFill>
-                      <a:prstDash val="solid"/>
-                      <a:round/>
-                      <a:headEnd type="none" w="med" len="med"/>
-                      <a:tailEnd type="none" w="med" len="med"/>
-                    </a:lnL>
-                    <a:lnR w="6350" cap="flat" cmpd="sng" algn="ctr">
-                      <a:solidFill>
-                        <a:srgbClr val="E3E3E3"/>
-                      </a:solidFill>
-                      <a:prstDash val="solid"/>
-                      <a:round/>
-                      <a:headEnd type="none" w="med" len="med"/>
-                      <a:tailEnd type="none" w="med" len="med"/>
-                    </a:lnR>
-                    <a:lnT w="6350" cap="flat" cmpd="sng" algn="ctr">
-                      <a:solidFill>
-                        <a:srgbClr val="E3E3E3"/>
-                      </a:solidFill>
-                      <a:prstDash val="solid"/>
-                      <a:round/>
-                      <a:headEnd type="none" w="med" len="med"/>
-                      <a:tailEnd type="none" w="med" len="med"/>
-                    </a:lnT>
-                    <a:lnB w="6350" cap="flat" cmpd="sng" algn="ctr">
-                      <a:solidFill>
-                        <a:srgbClr val="E3E3E3"/>
-                      </a:solidFill>
-                      <a:prstDash val="solid"/>
-                      <a:round/>
-                      <a:headEnd type="none" w="med" len="med"/>
-                      <a:tailEnd type="none" w="med" len="med"/>
-                    </a:lnB>
-                    <a:solidFill>
-                      <a:srgbClr val="E3F1E6"/>
-                    </a:solidFill>
-                  </a:tcPr>
-                </a:tc>
-                <a:tc>
-                  <a:txBody>
-                    <a:bodyPr/>
-                    <a:lstStyle/>
-                    <a:p>
-                      <a:pPr algn="ctr" indent="0" marL="0">
-                        <a:buNone/>
-                      </a:pPr>
-                      <a:r>
-                        <a:rPr lang="en-US" sz="1300" dirty="0">
-                          <a:solidFill>
-                            <a:srgbClr val="1A1A1A"/>
-                          </a:solidFill>
-                          <a:latin typeface="Arial" pitchFamily="34" charset="0"/>
-                          <a:ea typeface="Arial" pitchFamily="34" charset="-122"/>
-                          <a:cs typeface="Arial" pitchFamily="34" charset="-120"/>
-                        </a:rPr>
-                        <a:t>4.4</a:t>
-                      </a:r>
-                      <a:endParaRPr lang="en-US" sz="1300" dirty="0">
-                        <a:latin typeface="Arial" charset="0"/>
-                        <a:ea typeface="Arial" charset="0"/>
-                        <a:cs typeface="Arial" charset="0"/>
-                      </a:endParaRPr>
-                    </a:p>
-                  </a:txBody>
-                  <a:tcPr marL="91440" marR="91440" marT="45720" marB="45720" anchor="ctr">
-                    <a:lnL w="6350" cap="flat" cmpd="sng" algn="ctr">
-                      <a:solidFill>
-                        <a:srgbClr val="E3E3E3"/>
-                      </a:solidFill>
-                      <a:prstDash val="solid"/>
-                      <a:round/>
-                      <a:headEnd type="none" w="med" len="med"/>
-                      <a:tailEnd type="none" w="med" len="med"/>
-                    </a:lnL>
-                    <a:lnR w="6350" cap="flat" cmpd="sng" algn="ctr">
-                      <a:solidFill>
-                        <a:srgbClr val="E3E3E3"/>
-                      </a:solidFill>
-                      <a:prstDash val="solid"/>
-                      <a:round/>
-                      <a:headEnd type="none" w="med" len="med"/>
-                      <a:tailEnd type="none" w="med" len="med"/>
-                    </a:lnR>
-                    <a:lnT w="6350" cap="flat" cmpd="sng" algn="ctr">
-                      <a:solidFill>
-                        <a:srgbClr val="E3E3E3"/>
-                      </a:solidFill>
-                      <a:prstDash val="solid"/>
-                      <a:round/>
-                      <a:headEnd type="none" w="med" len="med"/>
-                      <a:tailEnd type="none" w="med" len="med"/>
-                    </a:lnT>
-                    <a:lnB w="6350" cap="flat" cmpd="sng" algn="ctr">
-                      <a:solidFill>
-                        <a:srgbClr val="E3E3E3"/>
-                      </a:solidFill>
-                      <a:prstDash val="solid"/>
-                      <a:round/>
-                      <a:headEnd type="none" w="med" len="med"/>
-                      <a:tailEnd type="none" w="med" len="med"/>
-                    </a:lnB>
-                    <a:solidFill>
-                      <a:srgbClr val="E3F1E6"/>
-                    </a:solidFill>
-                  </a:tcPr>
-                </a:tc>
-                <a:tc>
-                  <a:txBody>
-                    <a:bodyPr/>
-                    <a:lstStyle/>
-                    <a:p>
-                      <a:pPr algn="ctr" indent="0" marL="0">
-                        <a:buNone/>
-                      </a:pPr>
-                      <a:r>
-                        <a:rPr lang="en-US" sz="1300" dirty="0">
-                          <a:solidFill>
-                            <a:srgbClr val="1A1A1A"/>
-                          </a:solidFill>
-                          <a:latin typeface="Arial" pitchFamily="34" charset="0"/>
-                          <a:ea typeface="Arial" pitchFamily="34" charset="-122"/>
-                          <a:cs typeface="Arial" pitchFamily="34" charset="-120"/>
-                        </a:rPr>
-                        <a:t>4.1</a:t>
-                      </a:r>
-                      <a:endParaRPr lang="en-US" sz="1300" dirty="0">
-                        <a:latin typeface="Arial" charset="0"/>
-                        <a:ea typeface="Arial" charset="0"/>
-                        <a:cs typeface="Arial" charset="0"/>
-                      </a:endParaRPr>
-                    </a:p>
-                  </a:txBody>
-                  <a:tcPr marL="91440" marR="91440" marT="45720" marB="45720" anchor="ctr">
-                    <a:lnL w="6350" cap="flat" cmpd="sng" algn="ctr">
-                      <a:solidFill>
-                        <a:srgbClr val="E3E3E3"/>
-                      </a:solidFill>
-                      <a:prstDash val="solid"/>
-                      <a:round/>
-                      <a:headEnd type="none" w="med" len="med"/>
-                      <a:tailEnd type="none" w="med" len="med"/>
-                    </a:lnL>
-                    <a:lnR w="6350" cap="flat" cmpd="sng" algn="ctr">
-                      <a:solidFill>
-                        <a:srgbClr val="E3E3E3"/>
-                      </a:solidFill>
-                      <a:prstDash val="solid"/>
-                      <a:round/>
-                      <a:headEnd type="none" w="med" len="med"/>
-                      <a:tailEnd type="none" w="med" len="med"/>
-                    </a:lnR>
-                    <a:lnT w="6350" cap="flat" cmpd="sng" algn="ctr">
-                      <a:solidFill>
-                        <a:srgbClr val="E3E3E3"/>
-                      </a:solidFill>
-                      <a:prstDash val="solid"/>
-                      <a:round/>
-                      <a:headEnd type="none" w="med" len="med"/>
-                      <a:tailEnd type="none" w="med" len="med"/>
-                    </a:lnT>
-                    <a:lnB w="6350" cap="flat" cmpd="sng" algn="ctr">
-                      <a:solidFill>
-                        <a:srgbClr val="E3E3E3"/>
-                      </a:solidFill>
-                      <a:prstDash val="solid"/>
-                      <a:round/>
-                      <a:headEnd type="none" w="med" len="med"/>
-                      <a:tailEnd type="none" w="med" len="med"/>
-                    </a:lnB>
-                    <a:solidFill>
-                      <a:srgbClr val="E3F1E6"/>
-                    </a:solidFill>
-                  </a:tcPr>
-                </a:tc>
-              </a:tr>
-              <a:tr h="475488">
-                <a:tc>
-                  <a:txBody>
-                    <a:bodyPr/>
-                    <a:lstStyle/>
-                    <a:p>
-                      <a:pPr algn="ctr" indent="0" marL="0">
-                        <a:buNone/>
-                      </a:pPr>
-                      <a:r>
-                        <a:rPr lang="en-US" sz="1300" b="1" dirty="0">
-                          <a:solidFill>
-                            <a:srgbClr val="1A1A1A"/>
-                          </a:solidFill>
-                          <a:latin typeface="Arial" pitchFamily="34" charset="0"/>
-                          <a:ea typeface="Arial" pitchFamily="34" charset="-122"/>
-                          <a:cs typeface="Arial" pitchFamily="34" charset="-120"/>
-                        </a:rPr>
-                        <a:t>₹13</a:t>
-                      </a:r>
-                      <a:endParaRPr lang="en-US" sz="1300" dirty="0">
-                        <a:latin typeface="Arial" charset="0"/>
-                        <a:ea typeface="Arial" charset="0"/>
-                        <a:cs typeface="Arial" charset="0"/>
-                      </a:endParaRPr>
-                    </a:p>
-                  </a:txBody>
-                  <a:tcPr marL="91440" marR="91440" marT="45720" marB="45720" anchor="ctr">
-                    <a:lnL w="6350" cap="flat" cmpd="sng" algn="ctr">
-                      <a:solidFill>
-                        <a:srgbClr val="E3E3E3"/>
-                      </a:solidFill>
-                      <a:prstDash val="solid"/>
-                      <a:round/>
-                      <a:headEnd type="none" w="med" len="med"/>
-                      <a:tailEnd type="none" w="med" len="med"/>
-                    </a:lnL>
-                    <a:lnR w="6350" cap="flat" cmpd="sng" algn="ctr">
-                      <a:solidFill>
-                        <a:srgbClr val="E3E3E3"/>
-                      </a:solidFill>
-                      <a:prstDash val="solid"/>
-                      <a:round/>
-                      <a:headEnd type="none" w="med" len="med"/>
-                      <a:tailEnd type="none" w="med" len="med"/>
-                    </a:lnR>
-                    <a:lnT w="6350" cap="flat" cmpd="sng" algn="ctr">
-                      <a:solidFill>
-                        <a:srgbClr val="E3E3E3"/>
-                      </a:solidFill>
-                      <a:prstDash val="solid"/>
-                      <a:round/>
-                      <a:headEnd type="none" w="med" len="med"/>
-                      <a:tailEnd type="none" w="med" len="med"/>
-                    </a:lnT>
-                    <a:lnB w="6350" cap="flat" cmpd="sng" algn="ctr">
-                      <a:solidFill>
-                        <a:srgbClr val="E3E3E3"/>
-                      </a:solidFill>
-                      <a:prstDash val="solid"/>
-                      <a:round/>
-                      <a:headEnd type="none" w="med" len="med"/>
-                      <a:tailEnd type="none" w="med" len="med"/>
-                    </a:lnB>
-                    <a:solidFill>
-                      <a:srgbClr val="FFFFFF"/>
-                    </a:solidFill>
-                  </a:tcPr>
-                </a:tc>
-                <a:tc>
-                  <a:txBody>
-                    <a:bodyPr/>
-                    <a:lstStyle/>
-                    <a:p>
-                      <a:pPr algn="ctr" indent="0" marL="0">
-                        <a:buNone/>
-                      </a:pPr>
-                      <a:r>
-                        <a:rPr lang="en-US" sz="1300" dirty="0">
-                          <a:solidFill>
-                            <a:srgbClr val="1A1A1A"/>
-                          </a:solidFill>
-                          <a:latin typeface="Arial" pitchFamily="34" charset="0"/>
-                          <a:ea typeface="Arial" pitchFamily="34" charset="-122"/>
-                          <a:cs typeface="Arial" pitchFamily="34" charset="-120"/>
-                        </a:rPr>
-                        <a:t>5.1</a:t>
-                      </a:r>
-                      <a:endParaRPr lang="en-US" sz="1300" dirty="0">
-                        <a:latin typeface="Arial" charset="0"/>
-                        <a:ea typeface="Arial" charset="0"/>
-                        <a:cs typeface="Arial" charset="0"/>
-                      </a:endParaRPr>
-                    </a:p>
-                  </a:txBody>
-                  <a:tcPr marL="91440" marR="91440" marT="45720" marB="45720" anchor="ctr">
-                    <a:lnL w="6350" cap="flat" cmpd="sng" algn="ctr">
-                      <a:solidFill>
-                        <a:srgbClr val="E3E3E3"/>
-                      </a:solidFill>
-                      <a:prstDash val="solid"/>
-                      <a:round/>
-                      <a:headEnd type="none" w="med" len="med"/>
-                      <a:tailEnd type="none" w="med" len="med"/>
-                    </a:lnL>
-                    <a:lnR w="6350" cap="flat" cmpd="sng" algn="ctr">
-                      <a:solidFill>
-                        <a:srgbClr val="E3E3E3"/>
-                      </a:solidFill>
-                      <a:prstDash val="solid"/>
-                      <a:round/>
-                      <a:headEnd type="none" w="med" len="med"/>
-                      <a:tailEnd type="none" w="med" len="med"/>
-                    </a:lnR>
-                    <a:lnT w="6350" cap="flat" cmpd="sng" algn="ctr">
-                      <a:solidFill>
-                        <a:srgbClr val="E3E3E3"/>
-                      </a:solidFill>
-                      <a:prstDash val="solid"/>
-                      <a:round/>
-                      <a:headEnd type="none" w="med" len="med"/>
-                      <a:tailEnd type="none" w="med" len="med"/>
-                    </a:lnT>
-                    <a:lnB w="6350" cap="flat" cmpd="sng" algn="ctr">
-                      <a:solidFill>
-                        <a:srgbClr val="E3E3E3"/>
-                      </a:solidFill>
-                      <a:prstDash val="solid"/>
-                      <a:round/>
-                      <a:headEnd type="none" w="med" len="med"/>
-                      <a:tailEnd type="none" w="med" len="med"/>
-                    </a:lnB>
-                    <a:solidFill>
-                      <a:srgbClr val="E3F1E6"/>
-                    </a:solidFill>
-                  </a:tcPr>
-                </a:tc>
-                <a:tc>
-                  <a:txBody>
-                    <a:bodyPr/>
-                    <a:lstStyle/>
-                    <a:p>
-                      <a:pPr algn="ctr" indent="0" marL="0">
-                        <a:buNone/>
-                      </a:pPr>
-                      <a:r>
-                        <a:rPr lang="en-US" sz="1300" dirty="0">
-                          <a:solidFill>
-                            <a:srgbClr val="1A1A1A"/>
-                          </a:solidFill>
-                          <a:latin typeface="Arial" pitchFamily="34" charset="0"/>
-                          <a:ea typeface="Arial" pitchFamily="34" charset="-122"/>
-                          <a:cs typeface="Arial" pitchFamily="34" charset="-120"/>
-                        </a:rPr>
-                        <a:t>4.7</a:t>
-                      </a:r>
-                      <a:endParaRPr lang="en-US" sz="1300" dirty="0">
-                        <a:latin typeface="Arial" charset="0"/>
-                        <a:ea typeface="Arial" charset="0"/>
-                        <a:cs typeface="Arial" charset="0"/>
-                      </a:endParaRPr>
-                    </a:p>
-                  </a:txBody>
-                  <a:tcPr marL="91440" marR="91440" marT="45720" marB="45720" anchor="ctr">
-                    <a:lnL w="6350" cap="flat" cmpd="sng" algn="ctr">
-                      <a:solidFill>
-                        <a:srgbClr val="E3E3E3"/>
-                      </a:solidFill>
-                      <a:prstDash val="solid"/>
-                      <a:round/>
-                      <a:headEnd type="none" w="med" len="med"/>
-                      <a:tailEnd type="none" w="med" len="med"/>
-                    </a:lnL>
-                    <a:lnR w="6350" cap="flat" cmpd="sng" algn="ctr">
-                      <a:solidFill>
-                        <a:srgbClr val="E3E3E3"/>
-                      </a:solidFill>
-                      <a:prstDash val="solid"/>
-                      <a:round/>
-                      <a:headEnd type="none" w="med" len="med"/>
-                      <a:tailEnd type="none" w="med" len="med"/>
-                    </a:lnR>
-                    <a:lnT w="6350" cap="flat" cmpd="sng" algn="ctr">
-                      <a:solidFill>
-                        <a:srgbClr val="E3E3E3"/>
-                      </a:solidFill>
-                      <a:prstDash val="solid"/>
-                      <a:round/>
-                      <a:headEnd type="none" w="med" len="med"/>
-                      <a:tailEnd type="none" w="med" len="med"/>
-                    </a:lnT>
-                    <a:lnB w="6350" cap="flat" cmpd="sng" algn="ctr">
-                      <a:solidFill>
-                        <a:srgbClr val="E3E3E3"/>
-                      </a:solidFill>
-                      <a:prstDash val="solid"/>
-                      <a:round/>
-                      <a:headEnd type="none" w="med" len="med"/>
-                      <a:tailEnd type="none" w="med" len="med"/>
-                    </a:lnB>
-                    <a:solidFill>
-                      <a:srgbClr val="E3F1E6"/>
-                    </a:solidFill>
-                  </a:tcPr>
-                </a:tc>
-                <a:tc>
-                  <a:txBody>
-                    <a:bodyPr/>
-                    <a:lstStyle/>
-                    <a:p>
-                      <a:pPr algn="ctr" indent="0" marL="0">
-                        <a:buNone/>
-                      </a:pPr>
-                      <a:r>
-                        <a:rPr lang="en-US" sz="1300" dirty="0">
-                          <a:solidFill>
-                            <a:srgbClr val="1A1A1A"/>
-                          </a:solidFill>
-                          <a:latin typeface="Arial" pitchFamily="34" charset="0"/>
-                          <a:ea typeface="Arial" pitchFamily="34" charset="-122"/>
-                          <a:cs typeface="Arial" pitchFamily="34" charset="-120"/>
-                        </a:rPr>
-                        <a:t>4.4</a:t>
-                      </a:r>
-                      <a:endParaRPr lang="en-US" sz="1300" dirty="0">
-                        <a:latin typeface="Arial" charset="0"/>
-                        <a:ea typeface="Arial" charset="0"/>
-                        <a:cs typeface="Arial" charset="0"/>
-                      </a:endParaRPr>
-                    </a:p>
-                  </a:txBody>
-                  <a:tcPr marL="91440" marR="91440" marT="45720" marB="45720" anchor="ctr">
-                    <a:lnL w="6350" cap="flat" cmpd="sng" algn="ctr">
-                      <a:solidFill>
-                        <a:srgbClr val="E3E3E3"/>
-                      </a:solidFill>
-                      <a:prstDash val="solid"/>
-                      <a:round/>
-                      <a:headEnd type="none" w="med" len="med"/>
-                      <a:tailEnd type="none" w="med" len="med"/>
-                    </a:lnL>
-                    <a:lnR w="6350" cap="flat" cmpd="sng" algn="ctr">
-                      <a:solidFill>
-                        <a:srgbClr val="E3E3E3"/>
-                      </a:solidFill>
-                      <a:prstDash val="solid"/>
-                      <a:round/>
-                      <a:headEnd type="none" w="med" len="med"/>
-                      <a:tailEnd type="none" w="med" len="med"/>
-                    </a:lnR>
-                    <a:lnT w="6350" cap="flat" cmpd="sng" algn="ctr">
-                      <a:solidFill>
-                        <a:srgbClr val="E3E3E3"/>
-                      </a:solidFill>
-                      <a:prstDash val="solid"/>
-                      <a:round/>
-                      <a:headEnd type="none" w="med" len="med"/>
-                      <a:tailEnd type="none" w="med" len="med"/>
-                    </a:lnT>
-                    <a:lnB w="6350" cap="flat" cmpd="sng" algn="ctr">
-                      <a:solidFill>
-                        <a:srgbClr val="E3E3E3"/>
-                      </a:solidFill>
-                      <a:prstDash val="solid"/>
-                      <a:round/>
-                      <a:headEnd type="none" w="med" len="med"/>
-                      <a:tailEnd type="none" w="med" len="med"/>
-                    </a:lnB>
-                    <a:solidFill>
-                      <a:srgbClr val="E3F1E6"/>
-                    </a:solidFill>
-                  </a:tcPr>
-                </a:tc>
-                <a:tc>
-                  <a:txBody>
-                    <a:bodyPr/>
-                    <a:lstStyle/>
-                    <a:p>
-                      <a:pPr algn="ctr" indent="0" marL="0">
-                        <a:buNone/>
-                      </a:pPr>
-                      <a:r>
-                        <a:rPr lang="en-US" sz="1300" dirty="0">
-                          <a:solidFill>
-                            <a:srgbClr val="1A1A1A"/>
-                          </a:solidFill>
-                          <a:latin typeface="Arial" pitchFamily="34" charset="0"/>
-                          <a:ea typeface="Arial" pitchFamily="34" charset="-122"/>
-                          <a:cs typeface="Arial" pitchFamily="34" charset="-120"/>
-                        </a:rPr>
-                        <a:t>4.0</a:t>
-                      </a:r>
-                      <a:endParaRPr lang="en-US" sz="1300" dirty="0">
-                        <a:latin typeface="Arial" charset="0"/>
-                        <a:ea typeface="Arial" charset="0"/>
-                        <a:cs typeface="Arial" charset="0"/>
-                      </a:endParaRPr>
-                    </a:p>
-                  </a:txBody>
-                  <a:tcPr marL="91440" marR="91440" marT="45720" marB="45720" anchor="ctr">
-                    <a:lnL w="6350" cap="flat" cmpd="sng" algn="ctr">
-                      <a:solidFill>
-                        <a:srgbClr val="E3E3E3"/>
-                      </a:solidFill>
-                      <a:prstDash val="solid"/>
-                      <a:round/>
-                      <a:headEnd type="none" w="med" len="med"/>
-                      <a:tailEnd type="none" w="med" len="med"/>
-                    </a:lnL>
-                    <a:lnR w="6350" cap="flat" cmpd="sng" algn="ctr">
-                      <a:solidFill>
-                        <a:srgbClr val="E3E3E3"/>
-                      </a:solidFill>
-                      <a:prstDash val="solid"/>
-                      <a:round/>
-                      <a:headEnd type="none" w="med" len="med"/>
-                      <a:tailEnd type="none" w="med" len="med"/>
-                    </a:lnR>
-                    <a:lnT w="6350" cap="flat" cmpd="sng" algn="ctr">
-                      <a:solidFill>
-                        <a:srgbClr val="E3E3E3"/>
-                      </a:solidFill>
-                      <a:prstDash val="solid"/>
-                      <a:round/>
-                      <a:headEnd type="none" w="med" len="med"/>
-                      <a:tailEnd type="none" w="med" len="med"/>
-                    </a:lnT>
-                    <a:lnB w="6350" cap="flat" cmpd="sng" algn="ctr">
-                      <a:solidFill>
-                        <a:srgbClr val="E3E3E3"/>
-                      </a:solidFill>
-                      <a:prstDash val="solid"/>
-                      <a:round/>
-                      <a:headEnd type="none" w="med" len="med"/>
-                      <a:tailEnd type="none" w="med" len="med"/>
-                    </a:lnB>
-                    <a:solidFill>
-                      <a:srgbClr val="E3F1E6"/>
-                    </a:solidFill>
-                  </a:tcPr>
-                </a:tc>
-                <a:tc>
-                  <a:txBody>
-                    <a:bodyPr/>
-                    <a:lstStyle/>
-                    <a:p>
-                      <a:pPr algn="ctr" indent="0" marL="0">
-                        <a:buNone/>
-                      </a:pPr>
-                      <a:r>
-                        <a:rPr lang="en-US" sz="1300" dirty="0">
-                          <a:solidFill>
-                            <a:srgbClr val="1A1A1A"/>
-                          </a:solidFill>
-                          <a:latin typeface="Arial" pitchFamily="34" charset="0"/>
-                          <a:ea typeface="Arial" pitchFamily="34" charset="-122"/>
-                          <a:cs typeface="Arial" pitchFamily="34" charset="-120"/>
-                        </a:rPr>
-                        <a:t>3.8</a:t>
-                      </a:r>
-                      <a:endParaRPr lang="en-US" sz="1300" dirty="0">
-                        <a:latin typeface="Arial" charset="0"/>
-                        <a:ea typeface="Arial" charset="0"/>
-                        <a:cs typeface="Arial" charset="0"/>
-                      </a:endParaRPr>
-                    </a:p>
-                  </a:txBody>
-                  <a:tcPr marL="91440" marR="91440" marT="45720" marB="45720" anchor="ctr">
-                    <a:lnL w="6350" cap="flat" cmpd="sng" algn="ctr">
-                      <a:solidFill>
-                        <a:srgbClr val="E3E3E3"/>
-                      </a:solidFill>
-                      <a:prstDash val="solid"/>
-                      <a:round/>
-                      <a:headEnd type="none" w="med" len="med"/>
-                      <a:tailEnd type="none" w="med" len="med"/>
-                    </a:lnL>
-                    <a:lnR w="6350" cap="flat" cmpd="sng" algn="ctr">
-                      <a:solidFill>
-                        <a:srgbClr val="E3E3E3"/>
-                      </a:solidFill>
-                      <a:prstDash val="solid"/>
-                      <a:round/>
-                      <a:headEnd type="none" w="med" len="med"/>
-                      <a:tailEnd type="none" w="med" len="med"/>
-                    </a:lnR>
-                    <a:lnT w="6350" cap="flat" cmpd="sng" algn="ctr">
-                      <a:solidFill>
-                        <a:srgbClr val="E3E3E3"/>
-                      </a:solidFill>
-                      <a:prstDash val="solid"/>
-                      <a:round/>
-                      <a:headEnd type="none" w="med" len="med"/>
-                      <a:tailEnd type="none" w="med" len="med"/>
-                    </a:lnT>
-                    <a:lnB w="6350" cap="flat" cmpd="sng" algn="ctr">
-                      <a:solidFill>
-                        <a:srgbClr val="E3E3E3"/>
-                      </a:solidFill>
-                      <a:prstDash val="solid"/>
-                      <a:round/>
-                      <a:headEnd type="none" w="med" len="med"/>
-                      <a:tailEnd type="none" w="med" len="med"/>
-                    </a:lnB>
-                    <a:solidFill>
-                      <a:srgbClr val="E3F1E6"/>
-                    </a:solidFill>
-                  </a:tcPr>
-                </a:tc>
               </a:tr>
               <a:tr h="475488">
                 <a:tc>
@@ -10467,7 +10467,7 @@
                           <a:ea typeface="Arial" pitchFamily="34" charset="-122"/>
                           <a:cs typeface="Arial" pitchFamily="34" charset="-120"/>
                         </a:rPr>
-                        <a:t>4.7</a:t>
+                        <a:t>9.1</a:t>
                       </a:r>
                       <a:endParaRPr lang="en-US" sz="1300" dirty="0">
                         <a:latin typeface="Arial" charset="0"/>
@@ -10514,7 +10514,7 @@
                       <a:tailEnd type="none" w="med" len="med"/>
                     </a:lnB>
                     <a:solidFill>
-                      <a:srgbClr val="E3F1E6"/>
+                      <a:srgbClr val="FBEAEC"/>
                     </a:solidFill>
                   </a:tcPr>
                 </a:tc>
@@ -10535,7 +10535,7 @@
                           <a:ea typeface="Arial" pitchFamily="34" charset="-122"/>
                           <a:cs typeface="Arial" pitchFamily="34" charset="-120"/>
                         </a:rPr>
-                        <a:t>4.4</a:t>
+                        <a:t>8.3</a:t>
                       </a:r>
                       <a:endParaRPr lang="en-US" sz="1300" dirty="0">
                         <a:latin typeface="Arial" charset="0"/>
@@ -10582,7 +10582,7 @@
                       <a:tailEnd type="none" w="med" len="med"/>
                     </a:lnB>
                     <a:solidFill>
-                      <a:srgbClr val="E3F1E6"/>
+                      <a:srgbClr val="FFF4D6"/>
                     </a:solidFill>
                   </a:tcPr>
                 </a:tc>
@@ -10603,7 +10603,7 @@
                           <a:ea typeface="Arial" pitchFamily="34" charset="-122"/>
                           <a:cs typeface="Arial" pitchFamily="34" charset="-120"/>
                         </a:rPr>
-                        <a:t>4.0</a:t>
+                        <a:t>7.6</a:t>
                       </a:r>
                       <a:endParaRPr lang="en-US" sz="1300" dirty="0">
                         <a:latin typeface="Arial" charset="0"/>
@@ -10650,7 +10650,7 @@
                       <a:tailEnd type="none" w="med" len="med"/>
                     </a:lnB>
                     <a:solidFill>
-                      <a:srgbClr val="E3F1E6"/>
+                      <a:srgbClr val="FFF4D6"/>
                     </a:solidFill>
                   </a:tcPr>
                 </a:tc>
@@ -10671,7 +10671,7 @@
                           <a:ea typeface="Arial" pitchFamily="34" charset="-122"/>
                           <a:cs typeface="Arial" pitchFamily="34" charset="-120"/>
                         </a:rPr>
-                        <a:t>3.7</a:t>
+                        <a:t>7.1</a:t>
                       </a:r>
                       <a:endParaRPr lang="en-US" sz="1300" dirty="0">
                         <a:latin typeface="Arial" charset="0"/>
@@ -10718,7 +10718,7 @@
                       <a:tailEnd type="none" w="med" len="med"/>
                     </a:lnB>
                     <a:solidFill>
-                      <a:srgbClr val="E3F1E6"/>
+                      <a:srgbClr val="FFF4D6"/>
                     </a:solidFill>
                   </a:tcPr>
                 </a:tc>
@@ -10739,7 +10739,7 @@
                           <a:ea typeface="Arial" pitchFamily="34" charset="-122"/>
                           <a:cs typeface="Arial" pitchFamily="34" charset="-120"/>
                         </a:rPr>
-                        <a:t>3.5</a:t>
+                        <a:t>6.6</a:t>
                       </a:r>
                       <a:endParaRPr lang="en-US" sz="1300" dirty="0">
                         <a:latin typeface="Arial" charset="0"/>
@@ -10786,7 +10786,7 @@
                       <a:tailEnd type="none" w="med" len="med"/>
                     </a:lnB>
                     <a:solidFill>
-                      <a:srgbClr val="E3F1E6"/>
+                      <a:srgbClr val="FFF4D6"/>
                     </a:solidFill>
                   </a:tcPr>
                 </a:tc>
@@ -11448,7 +11448,143 @@
                           <a:ea typeface="Arial" pitchFamily="34" charset="-122"/>
                           <a:cs typeface="Arial" pitchFamily="34" charset="-120"/>
                         </a:rPr>
-                        <a:t>7.4</a:t>
+                        <a:t>12.3</a:t>
+                      </a:r>
+                      <a:endParaRPr lang="en-US" sz="1100" dirty="0">
+                        <a:latin typeface="Arial" charset="0"/>
+                        <a:ea typeface="Arial" charset="0"/>
+                        <a:cs typeface="Arial" charset="0"/>
+                      </a:endParaRPr>
+                    </a:p>
+                  </a:txBody>
+                  <a:tcPr marL="91440" marR="91440" marT="45720" marB="45720" anchor="ctr">
+                    <a:lnL w="6350" cap="flat" cmpd="sng" algn="ctr">
+                      <a:solidFill>
+                        <a:srgbClr val="E3E3E3"/>
+                      </a:solidFill>
+                      <a:prstDash val="solid"/>
+                      <a:round/>
+                      <a:headEnd type="none" w="med" len="med"/>
+                      <a:tailEnd type="none" w="med" len="med"/>
+                    </a:lnL>
+                    <a:lnR w="6350" cap="flat" cmpd="sng" algn="ctr">
+                      <a:solidFill>
+                        <a:srgbClr val="E3E3E3"/>
+                      </a:solidFill>
+                      <a:prstDash val="solid"/>
+                      <a:round/>
+                      <a:headEnd type="none" w="med" len="med"/>
+                      <a:tailEnd type="none" w="med" len="med"/>
+                    </a:lnR>
+                    <a:lnT w="6350" cap="flat" cmpd="sng" algn="ctr">
+                      <a:solidFill>
+                        <a:srgbClr val="E3E3E3"/>
+                      </a:solidFill>
+                      <a:prstDash val="solid"/>
+                      <a:round/>
+                      <a:headEnd type="none" w="med" len="med"/>
+                      <a:tailEnd type="none" w="med" len="med"/>
+                    </a:lnT>
+                    <a:lnB w="6350" cap="flat" cmpd="sng" algn="ctr">
+                      <a:solidFill>
+                        <a:srgbClr val="E3E3E3"/>
+                      </a:solidFill>
+                      <a:prstDash val="solid"/>
+                      <a:round/>
+                      <a:headEnd type="none" w="med" len="med"/>
+                      <a:tailEnd type="none" w="med" len="med"/>
+                    </a:lnB>
+                    <a:solidFill>
+                      <a:srgbClr val="FBEAEC"/>
+                    </a:solidFill>
+                  </a:tcPr>
+                </a:tc>
+                <a:tc>
+                  <a:txBody>
+                    <a:bodyPr/>
+                    <a:lstStyle/>
+                    <a:p>
+                      <a:pPr algn="ctr" indent="0" marL="0">
+                        <a:buNone/>
+                      </a:pPr>
+                      <a:r>
+                        <a:rPr lang="en-US" sz="1100" dirty="0">
+                          <a:solidFill>
+                            <a:srgbClr val="1A1A1A"/>
+                          </a:solidFill>
+                          <a:latin typeface="Arial" pitchFamily="34" charset="0"/>
+                          <a:ea typeface="Arial" pitchFamily="34" charset="-122"/>
+                          <a:cs typeface="Arial" pitchFamily="34" charset="-120"/>
+                        </a:rPr>
+                        <a:t>9.9</a:t>
+                      </a:r>
+                      <a:endParaRPr lang="en-US" sz="1100" dirty="0">
+                        <a:latin typeface="Arial" charset="0"/>
+                        <a:ea typeface="Arial" charset="0"/>
+                        <a:cs typeface="Arial" charset="0"/>
+                      </a:endParaRPr>
+                    </a:p>
+                  </a:txBody>
+                  <a:tcPr marL="91440" marR="91440" marT="45720" marB="45720" anchor="ctr">
+                    <a:lnL w="6350" cap="flat" cmpd="sng" algn="ctr">
+                      <a:solidFill>
+                        <a:srgbClr val="E3E3E3"/>
+                      </a:solidFill>
+                      <a:prstDash val="solid"/>
+                      <a:round/>
+                      <a:headEnd type="none" w="med" len="med"/>
+                      <a:tailEnd type="none" w="med" len="med"/>
+                    </a:lnL>
+                    <a:lnR w="6350" cap="flat" cmpd="sng" algn="ctr">
+                      <a:solidFill>
+                        <a:srgbClr val="E3E3E3"/>
+                      </a:solidFill>
+                      <a:prstDash val="solid"/>
+                      <a:round/>
+                      <a:headEnd type="none" w="med" len="med"/>
+                      <a:tailEnd type="none" w="med" len="med"/>
+                    </a:lnR>
+                    <a:lnT w="6350" cap="flat" cmpd="sng" algn="ctr">
+                      <a:solidFill>
+                        <a:srgbClr val="E3E3E3"/>
+                      </a:solidFill>
+                      <a:prstDash val="solid"/>
+                      <a:round/>
+                      <a:headEnd type="none" w="med" len="med"/>
+                      <a:tailEnd type="none" w="med" len="med"/>
+                    </a:lnT>
+                    <a:lnB w="6350" cap="flat" cmpd="sng" algn="ctr">
+                      <a:solidFill>
+                        <a:srgbClr val="E3E3E3"/>
+                      </a:solidFill>
+                      <a:prstDash val="solid"/>
+                      <a:round/>
+                      <a:headEnd type="none" w="med" len="med"/>
+                      <a:tailEnd type="none" w="med" len="med"/>
+                    </a:lnB>
+                    <a:solidFill>
+                      <a:srgbClr val="FBEAEC"/>
+                    </a:solidFill>
+                  </a:tcPr>
+                </a:tc>
+                <a:tc>
+                  <a:txBody>
+                    <a:bodyPr/>
+                    <a:lstStyle/>
+                    <a:p>
+                      <a:pPr algn="ctr" indent="0" marL="0">
+                        <a:buNone/>
+                      </a:pPr>
+                      <a:r>
+                        <a:rPr lang="en-US" sz="1100" dirty="0">
+                          <a:solidFill>
+                            <a:srgbClr val="1A1A1A"/>
+                          </a:solidFill>
+                          <a:latin typeface="Arial" pitchFamily="34" charset="0"/>
+                          <a:ea typeface="Arial" pitchFamily="34" charset="-122"/>
+                          <a:cs typeface="Arial" pitchFamily="34" charset="-120"/>
+                        </a:rPr>
+                        <a:t>7.5</a:t>
                       </a:r>
                       <a:endParaRPr lang="en-US" sz="1100" dirty="0">
                         <a:latin typeface="Arial" charset="0"/>
@@ -11516,143 +11652,7 @@
                           <a:ea typeface="Arial" pitchFamily="34" charset="-122"/>
                           <a:cs typeface="Arial" pitchFamily="34" charset="-120"/>
                         </a:rPr>
-                        <a:t>6.1</a:t>
-                      </a:r>
-                      <a:endParaRPr lang="en-US" sz="1100" dirty="0">
-                        <a:latin typeface="Arial" charset="0"/>
-                        <a:ea typeface="Arial" charset="0"/>
-                        <a:cs typeface="Arial" charset="0"/>
-                      </a:endParaRPr>
-                    </a:p>
-                  </a:txBody>
-                  <a:tcPr marL="91440" marR="91440" marT="45720" marB="45720" anchor="ctr">
-                    <a:lnL w="6350" cap="flat" cmpd="sng" algn="ctr">
-                      <a:solidFill>
-                        <a:srgbClr val="E3E3E3"/>
-                      </a:solidFill>
-                      <a:prstDash val="solid"/>
-                      <a:round/>
-                      <a:headEnd type="none" w="med" len="med"/>
-                      <a:tailEnd type="none" w="med" len="med"/>
-                    </a:lnL>
-                    <a:lnR w="6350" cap="flat" cmpd="sng" algn="ctr">
-                      <a:solidFill>
-                        <a:srgbClr val="E3E3E3"/>
-                      </a:solidFill>
-                      <a:prstDash val="solid"/>
-                      <a:round/>
-                      <a:headEnd type="none" w="med" len="med"/>
-                      <a:tailEnd type="none" w="med" len="med"/>
-                    </a:lnR>
-                    <a:lnT w="6350" cap="flat" cmpd="sng" algn="ctr">
-                      <a:solidFill>
-                        <a:srgbClr val="E3E3E3"/>
-                      </a:solidFill>
-                      <a:prstDash val="solid"/>
-                      <a:round/>
-                      <a:headEnd type="none" w="med" len="med"/>
-                      <a:tailEnd type="none" w="med" len="med"/>
-                    </a:lnT>
-                    <a:lnB w="6350" cap="flat" cmpd="sng" algn="ctr">
-                      <a:solidFill>
-                        <a:srgbClr val="E3E3E3"/>
-                      </a:solidFill>
-                      <a:prstDash val="solid"/>
-                      <a:round/>
-                      <a:headEnd type="none" w="med" len="med"/>
-                      <a:tailEnd type="none" w="med" len="med"/>
-                    </a:lnB>
-                    <a:solidFill>
-                      <a:srgbClr val="FFF4D6"/>
-                    </a:solidFill>
-                  </a:tcPr>
-                </a:tc>
-                <a:tc>
-                  <a:txBody>
-                    <a:bodyPr/>
-                    <a:lstStyle/>
-                    <a:p>
-                      <a:pPr algn="ctr" indent="0" marL="0">
-                        <a:buNone/>
-                      </a:pPr>
-                      <a:r>
-                        <a:rPr lang="en-US" sz="1100" dirty="0">
-                          <a:solidFill>
-                            <a:srgbClr val="1A1A1A"/>
-                          </a:solidFill>
-                          <a:latin typeface="Arial" pitchFamily="34" charset="0"/>
-                          <a:ea typeface="Arial" pitchFamily="34" charset="-122"/>
-                          <a:cs typeface="Arial" pitchFamily="34" charset="-120"/>
-                        </a:rPr>
-                        <a:t>4.8</a:t>
-                      </a:r>
-                      <a:endParaRPr lang="en-US" sz="1100" dirty="0">
-                        <a:latin typeface="Arial" charset="0"/>
-                        <a:ea typeface="Arial" charset="0"/>
-                        <a:cs typeface="Arial" charset="0"/>
-                      </a:endParaRPr>
-                    </a:p>
-                  </a:txBody>
-                  <a:tcPr marL="91440" marR="91440" marT="45720" marB="45720" anchor="ctr">
-                    <a:lnL w="6350" cap="flat" cmpd="sng" algn="ctr">
-                      <a:solidFill>
-                        <a:srgbClr val="E3E3E3"/>
-                      </a:solidFill>
-                      <a:prstDash val="solid"/>
-                      <a:round/>
-                      <a:headEnd type="none" w="med" len="med"/>
-                      <a:tailEnd type="none" w="med" len="med"/>
-                    </a:lnL>
-                    <a:lnR w="6350" cap="flat" cmpd="sng" algn="ctr">
-                      <a:solidFill>
-                        <a:srgbClr val="E3E3E3"/>
-                      </a:solidFill>
-                      <a:prstDash val="solid"/>
-                      <a:round/>
-                      <a:headEnd type="none" w="med" len="med"/>
-                      <a:tailEnd type="none" w="med" len="med"/>
-                    </a:lnR>
-                    <a:lnT w="6350" cap="flat" cmpd="sng" algn="ctr">
-                      <a:solidFill>
-                        <a:srgbClr val="E3E3E3"/>
-                      </a:solidFill>
-                      <a:prstDash val="solid"/>
-                      <a:round/>
-                      <a:headEnd type="none" w="med" len="med"/>
-                      <a:tailEnd type="none" w="med" len="med"/>
-                    </a:lnT>
-                    <a:lnB w="6350" cap="flat" cmpd="sng" algn="ctr">
-                      <a:solidFill>
-                        <a:srgbClr val="E3E3E3"/>
-                      </a:solidFill>
-                      <a:prstDash val="solid"/>
-                      <a:round/>
-                      <a:headEnd type="none" w="med" len="med"/>
-                      <a:tailEnd type="none" w="med" len="med"/>
-                    </a:lnB>
-                    <a:solidFill>
-                      <a:srgbClr val="E3F1E6"/>
-                    </a:solidFill>
-                  </a:tcPr>
-                </a:tc>
-                <a:tc>
-                  <a:txBody>
-                    <a:bodyPr/>
-                    <a:lstStyle/>
-                    <a:p>
-                      <a:pPr algn="ctr" indent="0" marL="0">
-                        <a:buNone/>
-                      </a:pPr>
-                      <a:r>
-                        <a:rPr lang="en-US" sz="1100" dirty="0">
-                          <a:solidFill>
-                            <a:srgbClr val="1A1A1A"/>
-                          </a:solidFill>
-                          <a:latin typeface="Arial" pitchFamily="34" charset="0"/>
-                          <a:ea typeface="Arial" pitchFamily="34" charset="-122"/>
-                          <a:cs typeface="Arial" pitchFamily="34" charset="-120"/>
-                        </a:rPr>
-                        <a:t>3.5</a:t>
+                        <a:t>5.2</a:t>
                       </a:r>
                       <a:endParaRPr lang="en-US" sz="1100" dirty="0">
                         <a:latin typeface="Arial" charset="0"/>
@@ -16263,7 +16263,7 @@
                   <a:schemeClr val="accent1"/>
                 </a:solidFill>
               </a:rPr>
-              <a:t>6.7 years</a:t>
+              <a:t>11.4 years</a:t>
             </a:r>
             <a:endParaRPr lang="en-US" sz="1600" dirty="0"/>
           </a:p>
@@ -16749,7 +16749,7 @@
                   <a:schemeClr val="accent6"/>
                 </a:solidFill>
               </a:rPr>
-              <a:t>6.1 years</a:t>
+              <a:t>10.8 years</a:t>
             </a:r>
             <a:endParaRPr lang="en-US" sz="1600" dirty="0"/>
           </a:p>
@@ -17235,7 +17235,7 @@
                   <a:schemeClr val="accent2"/>
                 </a:solidFill>
               </a:rPr>
-              <a:t>5.5 years</a:t>
+              <a:t>10.6 years</a:t>
             </a:r>
             <a:endParaRPr lang="en-US" sz="1600" dirty="0"/>
           </a:p>
@@ -17721,7 +17721,7 @@
                   <a:schemeClr val="tx2"/>
                 </a:solidFill>
               </a:rPr>
-              <a:t>5.5 years</a:t>
+              <a:t>10.6 years</a:t>
             </a:r>
             <a:endParaRPr lang="en-US" sz="1600" dirty="0"/>
           </a:p>
@@ -19050,6 +19050,24 @@
                 </a:solidFill>
               </a:rPr>
               <a:t>Permission for a 2-3 day installation window and a safety induction</a:t>
+            </a:r>
+            <a:endParaRPr lang="en-US" sz="1400" dirty="0"/>
+          </a:p>
+          <a:p>
+            <a:pPr marL="342900" indent="-342900">
+              <a:spcAft>
+                <a:spcPts val="800"/>
+              </a:spcAft>
+              <a:buSzPct val="100000"/>
+              <a:buChar char="•"/>
+            </a:pPr>
+            <a:r>
+              <a:rPr lang="en-US" sz="1400" dirty="0">
+                <a:solidFill>
+                  <a:schemeClr val="bg1"/>
+                </a:solidFill>
+              </a:rPr>
+              <a:t>A soaked CBR test of the subgrade at the pilot stretch (done at the site walk, one test per 25 m²)</a:t>
             </a:r>
             <a:endParaRPr lang="en-US" sz="1400" dirty="0"/>
           </a:p>
@@ -21136,7 +21154,7 @@
                           <a:ea typeface="Arial" pitchFamily="34" charset="-122"/>
                           <a:cs typeface="Arial" pitchFamily="34" charset="-120"/>
                         </a:rPr>
-                        <a:t>₹883/sq ft pilot; ₹790/sq ft rollout</a:t>
+                        <a:t>₹1,521/sq ft pilot; ₹1,485/sq ft rollout</a:t>
                       </a:r>
                       <a:endParaRPr lang="en-US" sz="1200" dirty="0">
                         <a:latin typeface="Arial" charset="0"/>
@@ -21204,7 +21222,7 @@
                           <a:ea typeface="Arial" pitchFamily="34" charset="-122"/>
                           <a:cs typeface="Arial" pitchFamily="34" charset="-120"/>
                         </a:rPr>
-                        <a:t>₹9,500/m² quote; ₹8,000-9,000/m² range</a:t>
+                        <a:t>GridMats pilot and volume pricing, Oct 2026</a:t>
                       </a:r>
                       <a:endParaRPr lang="en-US" sz="1200" dirty="0">
                         <a:latin typeface="Arial" charset="0"/>
@@ -21274,7 +21292,7 @@
                           <a:ea typeface="Arial" pitchFamily="34" charset="-122"/>
                           <a:cs typeface="Arial" pitchFamily="34" charset="-120"/>
                         </a:rPr>
-                        <a:t>Base and electrical</a:t>
+                        <a:t>Ground, base, electrical</a:t>
                       </a:r>
                       <a:endParaRPr lang="en-US" sz="1200" dirty="0">
                         <a:latin typeface="Arial" charset="0"/>
@@ -21342,7 +21360,7 @@
                           <a:ea typeface="Arial" pitchFamily="34" charset="-122"/>
                           <a:cs typeface="Arial" pitchFamily="34" charset="-120"/>
                         </a:rPr>
-                        <a:t>OC-LW 40 ₹64/sq ft; BOS ₹8/Wp</a:t>
+                        <a:t>Prep ₹34/sq ft (100 mm WMM); OC-LW 40 ₹64/sq ft; electrical ₹6.7/Wp</a:t>
                       </a:r>
                       <a:endParaRPr lang="en-US" sz="1200" dirty="0">
                         <a:latin typeface="Arial" charset="0"/>
@@ -21410,7 +21428,7 @@
                           <a:ea typeface="Arial" pitchFamily="34" charset="-122"/>
                           <a:cs typeface="Arial" pitchFamily="34" charset="-120"/>
                         </a:rPr>
-                        <a:t>Price ladder (Sep 2026); earlier ROI model</a:t>
+                        <a:t>Site soil CBR 5% (confirm by test); price ladder Sep 2026</a:t>
                       </a:r>
                       <a:endParaRPr lang="en-US" sz="1200" dirty="0">
                         <a:latin typeface="Arial" charset="0"/>
@@ -22114,7 +22132,7 @@
                   <a:schemeClr val="accent4"/>
                 </a:solidFill>
               </a:rPr>
-              <a:t>Changes from earlier calculations: walkway power 126-110 → 160 W/m²; PV layer ₹2,500 (input error) → ₹9,500/m²; base HD ₹1,200 → OC-LW ₹690/m²; flat 78% PR → 73% loss stack; GST 13.8% → 8.9%.</a:t>
+              <a:t>Walkway power is the 160 W/m² design basis (Oct 2026). Prices are GridMats pilot prices, ex-GST. Performance ratio 73% from a seven-loss stack, not a flat figure.</a:t>
             </a:r>
             <a:endParaRPr lang="en-US" sz="1000" dirty="0"/>
           </a:p>
@@ -22659,7 +22677,7 @@
                   <a:schemeClr val="tx2"/>
                 </a:solidFill>
               </a:rPr>
-              <a:t>Reliance Jio pays ₹2.22 L ex-GST (₹825/sq ft). GridMats contributes ₹3.69 L: design, half the PV layer, supervision and the performance study.</a:t>
+              <a:t>Reliance Jio pays ₹3.26 L ex-GST (₹1,211/sq ft). GridMats contributes ₹4.55 L: design, 50% of the PV layer, supervision, IoT study.</a:t>
             </a:r>
             <a:endParaRPr lang="en-US" sz="1400" dirty="0"/>
           </a:p>
@@ -22792,7 +22810,7 @@
                   <a:schemeClr val="tx2"/>
                 </a:solidFill>
               </a:rPr>
-              <a:t>3-month evaluation against an agreed scorecard, monitoring for 12 months. At campus scale (1,000 m²) the model shows a 5.3-year payback.</a:t>
+              <a:t>3-month evaluation against an agreed scorecard, monitoring for 12 months. At campus scale (1,000 m²) the model shows a 9.6-year payback at today's prices.</a:t>
             </a:r>
             <a:endParaRPr lang="en-US" sz="1400" dirty="0"/>
           </a:p>
@@ -23035,7 +23053,7 @@
                   <a:schemeClr val="bg1"/>
                 </a:solidFill>
               </a:rPr>
-              <a:t>₹2.22 L</a:t>
+              <a:t>₹3.26 L</a:t>
             </a:r>
             <a:endParaRPr lang="en-US" sz="2400" dirty="0"/>
           </a:p>
@@ -23107,7 +23125,7 @@
                   <a:schemeClr val="bg1"/>
                 </a:solidFill>
               </a:rPr>
-              <a:t>4.6 years</a:t>
+              <a:t>6.9 years</a:t>
             </a:r>
             <a:endParaRPr lang="en-US" sz="2400" dirty="0"/>
           </a:p>
@@ -24254,7 +24272,7 @@
       </p:sp>
       <p:pic>
         <p:nvPicPr>
-          <p:cNvPr id="4" name="Image 0" descr="Exploded view: PV module, MLP lumber, GridMats base on aggregate">    </p:cNvPr>
+          <p:cNvPr id="4" name="Image 0" descr="Exploded view: PV module, MLP lumber, GridMats base on prepared ground">    </p:cNvPr>
           <p:cNvPicPr>
             <a:picLocks noChangeAspect="1"/>
           </p:cNvPicPr>
@@ -24320,11 +24338,11 @@
         <p:spPr>
           <a:xfrm>
             <a:off x="6583680" y="1600200"/>
-            <a:ext cx="5056632" cy="987552"/>
+            <a:ext cx="5056632" cy="822960"/>
           </a:xfrm>
           <a:prstGeom prst="roundRect">
             <a:avLst>
-              <a:gd name="adj" fmla="val 7407"/>
+              <a:gd name="adj" fmla="val 8889"/>
             </a:avLst>
           </a:prstGeom>
           <a:solidFill>
@@ -24346,8 +24364,8 @@
         </p:nvSpPr>
         <p:spPr>
           <a:xfrm>
-            <a:off x="6766560" y="1819656"/>
-            <a:ext cx="548640" cy="548640"/>
+            <a:off x="6748272" y="1764792"/>
+            <a:ext cx="493776" cy="493776"/>
           </a:xfrm>
           <a:prstGeom prst="ellipse">
             <a:avLst/>
@@ -24371,8 +24389,8 @@
         </p:nvSpPr>
         <p:spPr>
           <a:xfrm>
-            <a:off x="6766560" y="1819656"/>
-            <a:ext cx="548640" cy="548640"/>
+            <a:off x="6748272" y="1764792"/>
+            <a:ext cx="493776" cy="493776"/>
           </a:xfrm>
           <a:prstGeom prst="rect">
             <a:avLst/>
@@ -24407,8 +24425,8 @@
         </p:nvSpPr>
         <p:spPr>
           <a:xfrm>
-            <a:off x="7498080" y="1709928"/>
-            <a:ext cx="4023360" cy="292608"/>
+            <a:off x="7406640" y="1664208"/>
+            <a:ext cx="4160520" cy="256032"/>
           </a:xfrm>
           <a:prstGeom prst="rect">
             <a:avLst/>
@@ -24424,14 +24442,14 @@
               <a:buNone/>
             </a:pPr>
             <a:r>
-              <a:rPr lang="en-US" sz="1500" b="1" dirty="0">
+              <a:rPr lang="en-US" sz="1400" b="1" dirty="0">
                 <a:solidFill>
                   <a:schemeClr val="tx1"/>
                 </a:solidFill>
               </a:rPr>
               <a:t>1. Walkable photovoltaic layer</a:t>
             </a:r>
-            <a:endParaRPr lang="en-US" sz="1500" dirty="0"/>
+            <a:endParaRPr lang="en-US" sz="1400" dirty="0"/>
           </a:p>
         </p:txBody>
       </p:sp>
@@ -24443,8 +24461,8 @@
         </p:nvSpPr>
         <p:spPr>
           <a:xfrm>
-            <a:off x="7498080" y="2011680"/>
-            <a:ext cx="4023360" cy="548640"/>
+            <a:off x="7406640" y="1920240"/>
+            <a:ext cx="4160520" cy="475488"/>
           </a:xfrm>
           <a:prstGeom prst="rect">
             <a:avLst/>
@@ -24460,14 +24478,14 @@
               <a:buNone/>
             </a:pPr>
             <a:r>
-              <a:rPr lang="en-US" sz="1200" dirty="0">
+              <a:rPr lang="en-US" sz="1100" dirty="0">
                 <a:solidFill>
                   <a:schemeClr val="tx2"/>
                 </a:solidFill>
               </a:rPr>
               <a:t>12 mm toughened glass over a 40 W module; modular, so one module can be replaced without lifting the walkway.</a:t>
             </a:r>
-            <a:endParaRPr lang="en-US" sz="1200" dirty="0"/>
+            <a:endParaRPr lang="en-US" sz="1100" dirty="0"/>
           </a:p>
         </p:txBody>
       </p:sp>
@@ -24479,12 +24497,12 @@
         </p:nvSpPr>
         <p:spPr>
           <a:xfrm>
-            <a:off x="6583680" y="2715768"/>
-            <a:ext cx="5056632" cy="987552"/>
+            <a:off x="6583680" y="2505456"/>
+            <a:ext cx="5056632" cy="822960"/>
           </a:xfrm>
           <a:prstGeom prst="roundRect">
             <a:avLst>
-              <a:gd name="adj" fmla="val 7407"/>
+              <a:gd name="adj" fmla="val 8889"/>
             </a:avLst>
           </a:prstGeom>
           <a:solidFill>
@@ -24506,8 +24524,8 @@
         </p:nvSpPr>
         <p:spPr>
           <a:xfrm>
-            <a:off x="6766560" y="2935224"/>
-            <a:ext cx="548640" cy="548640"/>
+            <a:off x="6748272" y="2670048"/>
+            <a:ext cx="493776" cy="493776"/>
           </a:xfrm>
           <a:prstGeom prst="ellipse">
             <a:avLst/>
@@ -24531,8 +24549,8 @@
         </p:nvSpPr>
         <p:spPr>
           <a:xfrm>
-            <a:off x="6766560" y="2935224"/>
-            <a:ext cx="548640" cy="548640"/>
+            <a:off x="6748272" y="2670048"/>
+            <a:ext cx="493776" cy="493776"/>
           </a:xfrm>
           <a:prstGeom prst="rect">
             <a:avLst/>
@@ -24567,8 +24585,8 @@
         </p:nvSpPr>
         <p:spPr>
           <a:xfrm>
-            <a:off x="7498080" y="2825496"/>
-            <a:ext cx="4023360" cy="292608"/>
+            <a:off x="7406640" y="2569464"/>
+            <a:ext cx="4160520" cy="256032"/>
           </a:xfrm>
           <a:prstGeom prst="rect">
             <a:avLst/>
@@ -24584,14 +24602,14 @@
               <a:buNone/>
             </a:pPr>
             <a:r>
-              <a:rPr lang="en-US" sz="1500" b="1" dirty="0">
+              <a:rPr lang="en-US" sz="1400" b="1" dirty="0">
                 <a:solidFill>
                   <a:schemeClr val="tx1"/>
                 </a:solidFill>
               </a:rPr>
               <a:t>2. MLP lumber electrical layer</a:t>
             </a:r>
-            <a:endParaRPr lang="en-US" sz="1500" dirty="0"/>
+            <a:endParaRPr lang="en-US" sz="1400" dirty="0"/>
           </a:p>
         </p:txBody>
       </p:sp>
@@ -24603,8 +24621,8 @@
         </p:nvSpPr>
         <p:spPr>
           <a:xfrm>
-            <a:off x="7498080" y="3127248"/>
-            <a:ext cx="4023360" cy="548640"/>
+            <a:off x="7406640" y="2825496"/>
+            <a:ext cx="4160520" cy="475488"/>
           </a:xfrm>
           <a:prstGeom prst="rect">
             <a:avLst/>
@@ -24620,14 +24638,14 @@
               <a:buNone/>
             </a:pPr>
             <a:r>
-              <a:rPr lang="en-US" sz="1200" dirty="0">
+              <a:rPr lang="en-US" sz="1100" dirty="0">
                 <a:solidFill>
                   <a:schemeClr val="tx2"/>
                 </a:solidFill>
               </a:rPr>
               <a:t>40 × 40 mm recycled MLP lumber carries the wiring, with about 50 mm open gaps for airflow and drainage.</a:t>
             </a:r>
-            <a:endParaRPr lang="en-US" sz="1200" dirty="0"/>
+            <a:endParaRPr lang="en-US" sz="1100" dirty="0"/>
           </a:p>
         </p:txBody>
       </p:sp>
@@ -24639,12 +24657,12 @@
         </p:nvSpPr>
         <p:spPr>
           <a:xfrm>
-            <a:off x="6583680" y="3831336"/>
-            <a:ext cx="5056632" cy="987552"/>
+            <a:off x="6583680" y="3410712"/>
+            <a:ext cx="5056632" cy="822960"/>
           </a:xfrm>
           <a:prstGeom prst="roundRect">
             <a:avLst>
-              <a:gd name="adj" fmla="val 7407"/>
+              <a:gd name="adj" fmla="val 8889"/>
             </a:avLst>
           </a:prstGeom>
           <a:solidFill>
@@ -24666,8 +24684,8 @@
         </p:nvSpPr>
         <p:spPr>
           <a:xfrm>
-            <a:off x="6766560" y="4050792"/>
-            <a:ext cx="548640" cy="548640"/>
+            <a:off x="6748272" y="3575304"/>
+            <a:ext cx="493776" cy="493776"/>
           </a:xfrm>
           <a:prstGeom prst="ellipse">
             <a:avLst/>
@@ -24691,8 +24709,8 @@
         </p:nvSpPr>
         <p:spPr>
           <a:xfrm>
-            <a:off x="6766560" y="4050792"/>
-            <a:ext cx="548640" cy="548640"/>
+            <a:off x="6748272" y="3575304"/>
+            <a:ext cx="493776" cy="493776"/>
           </a:xfrm>
           <a:prstGeom prst="rect">
             <a:avLst/>
@@ -24727,8 +24745,8 @@
         </p:nvSpPr>
         <p:spPr>
           <a:xfrm>
-            <a:off x="7498080" y="3941064"/>
-            <a:ext cx="4023360" cy="292608"/>
+            <a:off x="7406640" y="3474720"/>
+            <a:ext cx="4160520" cy="256032"/>
           </a:xfrm>
           <a:prstGeom prst="rect">
             <a:avLst/>
@@ -24744,14 +24762,14 @@
               <a:buNone/>
             </a:pPr>
             <a:r>
-              <a:rPr lang="en-US" sz="1500" b="1" dirty="0">
+              <a:rPr lang="en-US" sz="1400" b="1" dirty="0">
                 <a:solidFill>
                   <a:schemeClr val="tx1"/>
                 </a:solidFill>
               </a:rPr>
               <a:t>3. Patented GridMats structural base</a:t>
             </a:r>
-            <a:endParaRPr lang="en-US" sz="1500" dirty="0"/>
+            <a:endParaRPr lang="en-US" sz="1400" dirty="0"/>
           </a:p>
         </p:txBody>
       </p:sp>
@@ -24763,8 +24781,8 @@
         </p:nvSpPr>
         <p:spPr>
           <a:xfrm>
-            <a:off x="7498080" y="4242816"/>
-            <a:ext cx="4023360" cy="548640"/>
+            <a:off x="7406640" y="3730752"/>
+            <a:ext cx="4160520" cy="475488"/>
           </a:xfrm>
           <a:prstGeom prst="rect">
             <a:avLst/>
@@ -24780,20 +24798,180 @@
               <a:buNone/>
             </a:pPr>
             <a:r>
-              <a:rPr lang="en-US" sz="1200" dirty="0">
+              <a:rPr lang="en-US" sz="1100" dirty="0">
                 <a:solidFill>
                   <a:schemeClr val="tx2"/>
                 </a:solidFill>
               </a:rPr>
               <a:t>100% recycled polypropylene grid (500 × 500 mm, 4 per m²) gives confinement, stability and a level bed.</a:t>
             </a:r>
-            <a:endParaRPr lang="en-US" sz="1200" dirty="0"/>
+            <a:endParaRPr lang="en-US" sz="1100" dirty="0"/>
           </a:p>
         </p:txBody>
       </p:sp>
       <p:sp>
         <p:nvSpPr>
-          <p:cNvPr id="21" name="basis-card"/>
+          <p:cNvPr id="21" name="layer-card"/>
+          <p:cNvSpPr/>
+          <p:nvPr/>
+        </p:nvSpPr>
+        <p:spPr>
+          <a:xfrm>
+            <a:off x="6583680" y="4315968"/>
+            <a:ext cx="5056632" cy="822960"/>
+          </a:xfrm>
+          <a:prstGeom prst="roundRect">
+            <a:avLst>
+              <a:gd name="adj" fmla="val 8889"/>
+            </a:avLst>
+          </a:prstGeom>
+          <a:solidFill>
+            <a:schemeClr val="bg1"/>
+          </a:solidFill>
+          <a:ln w="9525">
+            <a:solidFill>
+              <a:srgbClr val="E3E3E3"/>
+            </a:solidFill>
+            <a:prstDash val="solid"/>
+          </a:ln>
+        </p:spPr>
+      </p:sp>
+      <p:sp>
+        <p:nvSpPr>
+          <p:cNvPr id="22" name="badge"/>
+          <p:cNvSpPr/>
+          <p:nvPr/>
+        </p:nvSpPr>
+        <p:spPr>
+          <a:xfrm>
+            <a:off x="6748272" y="4480560"/>
+            <a:ext cx="493776" cy="493776"/>
+          </a:xfrm>
+          <a:prstGeom prst="ellipse">
+            <a:avLst/>
+          </a:prstGeom>
+          <a:solidFill>
+            <a:schemeClr val="tx2"/>
+          </a:solidFill>
+          <a:ln w="12700">
+            <a:solidFill>
+              <a:schemeClr val="tx2"/>
+            </a:solidFill>
+            <a:prstDash val="solid"/>
+          </a:ln>
+        </p:spPr>
+      </p:sp>
+      <p:sp>
+        <p:nvSpPr>
+          <p:cNvPr id="23" name="Text 20"/>
+          <p:cNvSpPr txBox="1"/>
+          <p:nvPr/>
+        </p:nvSpPr>
+        <p:spPr>
+          <a:xfrm>
+            <a:off x="6748272" y="4480560"/>
+            <a:ext cx="493776" cy="493776"/>
+          </a:xfrm>
+          <a:prstGeom prst="rect">
+            <a:avLst/>
+          </a:prstGeom>
+          <a:noFill/>
+          <a:ln/>
+        </p:spPr>
+        <p:txBody>
+          <a:bodyPr wrap="square" lIns="0" tIns="0" rIns="0" bIns="0" rtlCol="0" anchor="ctr"/>
+          <a:lstStyle/>
+          <a:p>
+            <a:pPr algn="ctr" indent="0" marL="0">
+              <a:buNone/>
+            </a:pPr>
+            <a:r>
+              <a:rPr lang="en-US" sz="1300" b="1" dirty="0">
+                <a:solidFill>
+                  <a:schemeClr val="bg1"/>
+                </a:solidFill>
+              </a:rPr>
+              <a:t>GP</a:t>
+            </a:r>
+            <a:endParaRPr lang="en-US" sz="1300" dirty="0"/>
+          </a:p>
+        </p:txBody>
+      </p:sp>
+      <p:sp>
+        <p:nvSpPr>
+          <p:cNvPr id="24" name="Text 21"/>
+          <p:cNvSpPr txBox="1"/>
+          <p:nvPr/>
+        </p:nvSpPr>
+        <p:spPr>
+          <a:xfrm>
+            <a:off x="7406640" y="4379976"/>
+            <a:ext cx="4160520" cy="256032"/>
+          </a:xfrm>
+          <a:prstGeom prst="rect">
+            <a:avLst/>
+          </a:prstGeom>
+          <a:noFill/>
+          <a:ln/>
+        </p:spPr>
+        <p:txBody>
+          <a:bodyPr wrap="square" lIns="0" tIns="0" rIns="0" bIns="0" rtlCol="0" anchor="t"/>
+          <a:lstStyle/>
+          <a:p>
+            <a:pPr indent="0" marL="0">
+              <a:buNone/>
+            </a:pPr>
+            <a:r>
+              <a:rPr lang="en-US" sz="1400" b="1" dirty="0">
+                <a:solidFill>
+                  <a:schemeClr val="tx1"/>
+                </a:solidFill>
+              </a:rPr>
+              <a:t>4. Prepared ground</a:t>
+            </a:r>
+            <a:endParaRPr lang="en-US" sz="1400" dirty="0"/>
+          </a:p>
+        </p:txBody>
+      </p:sp>
+      <p:sp>
+        <p:nvSpPr>
+          <p:cNvPr id="25" name="Text 22"/>
+          <p:cNvSpPr txBox="1"/>
+          <p:nvPr/>
+        </p:nvSpPr>
+        <p:spPr>
+          <a:xfrm>
+            <a:off x="7406640" y="4636008"/>
+            <a:ext cx="4160520" cy="475488"/>
+          </a:xfrm>
+          <a:prstGeom prst="rect">
+            <a:avLst/>
+          </a:prstGeom>
+          <a:noFill/>
+          <a:ln/>
+        </p:spPr>
+        <p:txBody>
+          <a:bodyPr wrap="square" lIns="0" tIns="0" rIns="0" bIns="0" rtlCol="0" anchor="t"/>
+          <a:lstStyle/>
+          <a:p>
+            <a:pPr indent="0" marL="0">
+              <a:buNone/>
+            </a:pPr>
+            <a:r>
+              <a:rPr lang="en-US" sz="1100" dirty="0">
+                <a:solidFill>
+                  <a:schemeClr val="tx2"/>
+                </a:solidFill>
+              </a:rPr>
+              <a:t>Well-compacted subgrade, geotextile fabric, 100 mm wet mix macadam and 20 mm M-sand bedding (soil CBR under 8).</a:t>
+            </a:r>
+            <a:endParaRPr lang="en-US" sz="1100" dirty="0"/>
+          </a:p>
+        </p:txBody>
+      </p:sp>
+      <p:sp>
+        <p:nvSpPr>
+          <p:cNvPr id="26" name="basis-card"/>
           <p:cNvSpPr/>
           <p:nvPr/>
         </p:nvSpPr>
@@ -24820,7 +24998,7 @@
       </p:sp>
       <p:sp>
         <p:nvSpPr>
-          <p:cNvPr id="22" name="Text 19"/>
+          <p:cNvPr id="27" name="Text 24"/>
           <p:cNvSpPr txBox="1"/>
           <p:nvPr/>
         </p:nvSpPr>
@@ -24856,7 +25034,7 @@
       </p:sp>
       <p:sp>
         <p:nvSpPr>
-          <p:cNvPr id="23" name="source"/>
+          <p:cNvPr id="28" name="source"/>
           <p:cNvSpPr txBox="1"/>
           <p:nvPr/>
         </p:nvSpPr>
@@ -32734,7 +32912,7 @@
                           <a:ea typeface="Arial" pitchFamily="34" charset="-122"/>
                           <a:cs typeface="Arial" pitchFamily="34" charset="-120"/>
                         </a:rPr>
-                        <a:t>Base works and GridMats OC-LW 40 base</a:t>
+                        <a:t>Ground preparation and GridMats OC-LW 40 base</a:t>
                       </a:r>
                       <a:endParaRPr lang="en-US" sz="1200" dirty="0">
                         <a:latin typeface="Arial" charset="0"/>
@@ -32802,7 +32980,7 @@
                           <a:ea typeface="Arial" pitchFamily="34" charset="-122"/>
                           <a:cs typeface="Arial" pitchFamily="34" charset="-120"/>
                         </a:rPr>
-                        <a:t>₹0.24 L</a:t>
+                        <a:t>₹0.26 L</a:t>
                       </a:r>
                       <a:endParaRPr lang="en-US" sz="1200" dirty="0">
                         <a:latin typeface="Arial" charset="0"/>
@@ -32938,7 +33116,7 @@
                           <a:ea typeface="Arial" pitchFamily="34" charset="-122"/>
                           <a:cs typeface="Arial" pitchFamily="34" charset="-120"/>
                         </a:rPr>
-                        <a:t>₹0.24 L</a:t>
+                        <a:t>₹0.26 L</a:t>
                       </a:r>
                       <a:endParaRPr lang="en-US" sz="1200" dirty="0">
                         <a:latin typeface="Arial" charset="0"/>
@@ -33076,7 +33254,7 @@
                           <a:ea typeface="Arial" pitchFamily="34" charset="-122"/>
                           <a:cs typeface="Arial" pitchFamily="34" charset="-120"/>
                         </a:rPr>
-                        <a:t>₹2.38 L</a:t>
+                        <a:t>₹4.09 L</a:t>
                       </a:r>
                       <a:endParaRPr lang="en-US" sz="1200" dirty="0">
                         <a:latin typeface="Arial" charset="0"/>
@@ -33144,7 +33322,7 @@
                           <a:ea typeface="Arial" pitchFamily="34" charset="-122"/>
                           <a:cs typeface="Arial" pitchFamily="34" charset="-120"/>
                         </a:rPr>
-                        <a:t>₹1.19 L</a:t>
+                        <a:t>₹2.05 L</a:t>
                       </a:r>
                       <a:endParaRPr lang="en-US" sz="1200" dirty="0">
                         <a:latin typeface="Arial" charset="0"/>
@@ -33212,7 +33390,7 @@
                           <a:ea typeface="Arial" pitchFamily="34" charset="-122"/>
                           <a:cs typeface="Arial" pitchFamily="34" charset="-120"/>
                         </a:rPr>
-                        <a:t>₹1.19 L</a:t>
+                        <a:t>₹2.05 L</a:t>
                       </a:r>
                       <a:endParaRPr lang="en-US" sz="1200" dirty="0">
                         <a:latin typeface="Arial" charset="0"/>
@@ -33350,7 +33528,7 @@
                           <a:ea typeface="Arial" pitchFamily="34" charset="-122"/>
                           <a:cs typeface="Arial" pitchFamily="34" charset="-120"/>
                         </a:rPr>
-                        <a:t>₹0.57 L</a:t>
+                        <a:t>₹0.52 L</a:t>
                       </a:r>
                       <a:endParaRPr lang="en-US" sz="1200" dirty="0">
                         <a:latin typeface="Arial" charset="0"/>
@@ -33486,7 +33664,7 @@
                           <a:ea typeface="Arial" pitchFamily="34" charset="-122"/>
                           <a:cs typeface="Arial" pitchFamily="34" charset="-120"/>
                         </a:rPr>
-                        <a:t>₹0.57 L</a:t>
+                        <a:t>₹0.52 L</a:t>
                       </a:r>
                       <a:endParaRPr lang="en-US" sz="1200" dirty="0">
                         <a:latin typeface="Arial" charset="0"/>
@@ -33624,7 +33802,7 @@
                           <a:ea typeface="Arial" pitchFamily="34" charset="-122"/>
                           <a:cs typeface="Arial" pitchFamily="34" charset="-120"/>
                         </a:rPr>
-                        <a:t>₹0.22 L</a:t>
+                        <a:t>₹0.43 L</a:t>
                       </a:r>
                       <a:endParaRPr lang="en-US" sz="1200" dirty="0">
                         <a:latin typeface="Arial" charset="0"/>
@@ -33760,7 +33938,7 @@
                           <a:ea typeface="Arial" pitchFamily="34" charset="-122"/>
                           <a:cs typeface="Arial" pitchFamily="34" charset="-120"/>
                         </a:rPr>
-                        <a:t>₹0.22 L</a:t>
+                        <a:t>₹0.43 L</a:t>
                       </a:r>
                       <a:endParaRPr lang="en-US" sz="1200" dirty="0">
                         <a:latin typeface="Arial" charset="0"/>
@@ -34446,7 +34624,7 @@
                           <a:ea typeface="Arial" pitchFamily="34" charset="-122"/>
                           <a:cs typeface="Arial" pitchFamily="34" charset="-120"/>
                         </a:rPr>
-                        <a:t>₹5.91 L</a:t>
+                        <a:t>₹7.80 L</a:t>
                       </a:r>
                       <a:endParaRPr lang="en-US" sz="1200" dirty="0">
                         <a:latin typeface="Arial" charset="0"/>
@@ -34514,7 +34692,7 @@
                           <a:ea typeface="Arial" pitchFamily="34" charset="-122"/>
                           <a:cs typeface="Arial" pitchFamily="34" charset="-120"/>
                         </a:rPr>
-                        <a:t>₹3.69 L</a:t>
+                        <a:t>₹4.55 L</a:t>
                       </a:r>
                       <a:endParaRPr lang="en-US" sz="1200" dirty="0">
                         <a:latin typeface="Arial" charset="0"/>
@@ -34582,7 +34760,7 @@
                           <a:ea typeface="Arial" pitchFamily="34" charset="-122"/>
                           <a:cs typeface="Arial" pitchFamily="34" charset="-120"/>
                         </a:rPr>
-                        <a:t>₹2.22 L</a:t>
+                        <a:t>₹3.26 L</a:t>
                       </a:r>
                       <a:endParaRPr lang="en-US" sz="1200" dirty="0">
                         <a:latin typeface="Arial" charset="0"/>
@@ -34695,7 +34873,7 @@
                   <a:schemeClr val="accent1"/>
                 </a:solidFill>
               </a:rPr>
-              <a:t>₹2.22 L</a:t>
+              <a:t>₹3.26 L</a:t>
             </a:r>
             <a:endParaRPr lang="en-US" sz="3000" dirty="0"/>
           </a:p>
@@ -34731,7 +34909,7 @@
                   <a:schemeClr val="tx2"/>
                 </a:solidFill>
               </a:rPr>
-              <a:t>Reliance Jio pays, ex-GST: ₹825/sq ft (₹2.42 L with GST)</a:t>
+              <a:t>Reliance Jio pays, ex-GST: ₹1,211/sq ft (₹3.55 L with GST)</a:t>
             </a:r>
             <a:endParaRPr lang="en-US" sz="1300" dirty="0"/>
           </a:p>
@@ -34767,7 +34945,7 @@
                   <a:schemeClr val="accent2"/>
                 </a:solidFill>
               </a:rPr>
-              <a:t>₹3.69 L</a:t>
+              <a:t>₹4.55 L</a:t>
             </a:r>
             <a:endParaRPr lang="en-US" sz="3000" dirty="0"/>
           </a:p>
@@ -34803,7 +34981,7 @@
                   <a:schemeClr val="tx2"/>
                 </a:solidFill>
               </a:rPr>
-              <a:t>GridMats contributes (62% of list): design, half the PV layer, supervision, IoT study</a:t>
+              <a:t>GridMats contributes (58% of list): design, 50% of the PV layer, supervision, IoT study</a:t>
             </a:r>
             <a:endParaRPr lang="en-US" sz="1300" dirty="0"/>
           </a:p>
@@ -34839,7 +35017,7 @@
                   <a:schemeClr val="tx2"/>
                 </a:solidFill>
               </a:rPr>
-              <a:t>Defect liability: 12 months from handover, with joint inspections. PV layer price ₹883/sq ft (₹9,500/m²).</a:t>
+              <a:t>Defect liability: 12 months from handover, with joint inspections. PV layer price ₹1,521/sq ft (₹16,373/m²).</a:t>
             </a:r>
             <a:endParaRPr lang="en-US" sz="1200" dirty="0"/>
           </a:p>
@@ -34875,7 +35053,7 @@
                   <a:schemeClr val="accent4"/>
                 </a:solidFill>
               </a:rPr>
-              <a:t>Co-funding of the PV layer: 50% (pilot offer, needs MD approval). Full physical installed cost before co-funding: ₹3.41 L (₹1,266/sq ft).</a:t>
+              <a:t>Co-funding of the PV layer: 50% (pilot offer, needs MD approval). Full physical installed cost before co-funding: ₹5.30 L (₹1,971/sq ft).</a:t>
             </a:r>
             <a:endParaRPr lang="en-US" sz="1000" dirty="0"/>
           </a:p>
